--- a/Infosys-Springboard-Virtual-Internship-6.0 (1).pptx
+++ b/Infosys-Springboard-Virtual-Internship-6.0 (1).pptx
@@ -14,7 +14,6 @@
     <p:sldId id="262" r:id="rId9"/>
     <p:sldId id="263" r:id="rId10"/>
     <p:sldId id="264" r:id="rId11"/>
-    <p:sldId id="265" r:id="rId12"/>
   </p:sldIdLst>
   <p:sldSz cx="14630400" cy="8229600"/>
   <p:notesSz cx="7559675" cy="10691813"/>
@@ -54,15 +53,15 @@
         <p:spPr>
           <a:xfrm>
             <a:off x="0" y="0"/>
-            <a:ext cx="14630040" cy="8229240"/>
+            <a:ext cx="14629680" cy="8228880"/>
           </a:xfrm>
           <a:custGeom>
             <a:avLst/>
             <a:gdLst>
-              <a:gd name="textAreaLeft" fmla="*/ 0 w 14630040"/>
-              <a:gd name="textAreaRight" fmla="*/ 14630400 w 14630040"/>
-              <a:gd name="textAreaTop" fmla="*/ 0 h 8229240"/>
-              <a:gd name="textAreaBottom" fmla="*/ 8229600 h 8229240"/>
+              <a:gd name="textAreaLeft" fmla="*/ 0 w 14629680"/>
+              <a:gd name="textAreaRight" fmla="*/ 14630400 w 14629680"/>
+              <a:gd name="textAreaTop" fmla="*/ 0 h 8228880"/>
+              <a:gd name="textAreaBottom" fmla="*/ 8229600 h 8228880"/>
             </a:gdLst>
             <a:ahLst/>
             <a:cxnLst/>
@@ -132,7 +131,7 @@
         <p:spPr>
           <a:xfrm>
             <a:off x="12838320" y="7751160"/>
-            <a:ext cx="1724760" cy="411120"/>
+            <a:ext cx="1724400" cy="410760"/>
           </a:xfrm>
           <a:prstGeom prst="rect">
             <a:avLst/>
@@ -152,15 +151,15 @@
         <p:spPr>
           <a:xfrm>
             <a:off x="0" y="0"/>
-            <a:ext cx="14630040" cy="8229240"/>
+            <a:ext cx="14629680" cy="8228880"/>
           </a:xfrm>
           <a:custGeom>
             <a:avLst/>
             <a:gdLst>
-              <a:gd name="textAreaLeft" fmla="*/ 0 w 14630040"/>
-              <a:gd name="textAreaRight" fmla="*/ 14630400 w 14630040"/>
-              <a:gd name="textAreaTop" fmla="*/ 0 h 8229240"/>
-              <a:gd name="textAreaBottom" fmla="*/ 8229600 h 8229240"/>
+              <a:gd name="textAreaLeft" fmla="*/ 0 w 14629680"/>
+              <a:gd name="textAreaRight" fmla="*/ 14630400 w 14629680"/>
+              <a:gd name="textAreaTop" fmla="*/ 0 h 8228880"/>
+              <a:gd name="textAreaBottom" fmla="*/ 8229600 h 8228880"/>
             </a:gdLst>
             <a:ahLst/>
             <a:cxnLst/>
@@ -230,7 +229,7 @@
         <p:spPr>
           <a:xfrm>
             <a:off x="12838320" y="7751160"/>
-            <a:ext cx="1724760" cy="411120"/>
+            <a:ext cx="1724400" cy="410760"/>
           </a:xfrm>
           <a:prstGeom prst="rect">
             <a:avLst/>
@@ -254,7 +253,7 @@
         <p:spPr>
           <a:xfrm>
             <a:off x="9144000" y="0"/>
-            <a:ext cx="5486040" cy="8229240"/>
+            <a:ext cx="5485680" cy="8228880"/>
           </a:xfrm>
           <a:prstGeom prst="rect">
             <a:avLst/>
@@ -278,7 +277,7 @@
         <p:spPr>
           <a:xfrm>
             <a:off x="12179160" y="7596360"/>
-            <a:ext cx="2439720" cy="340920"/>
+            <a:ext cx="2439360" cy="340560"/>
           </a:xfrm>
           <a:prstGeom prst="rect">
             <a:avLst/>
@@ -302,7 +301,7 @@
         <p:spPr>
           <a:xfrm>
             <a:off x="12179160" y="7863120"/>
-            <a:ext cx="2439720" cy="340920"/>
+            <a:ext cx="2439360" cy="340560"/>
           </a:xfrm>
           <a:prstGeom prst="rect">
             <a:avLst/>
@@ -326,7 +325,7 @@
         <p:spPr>
           <a:xfrm>
             <a:off x="1007640" y="2876760"/>
-            <a:ext cx="6826680" cy="525960"/>
+            <a:ext cx="6826320" cy="525960"/>
           </a:xfrm>
           <a:prstGeom prst="rect">
             <a:avLst/>
@@ -342,7 +341,13 @@
           </a:bodyPr>
           <a:lstStyle>
             <a:lvl1pPr indent="0" algn="l">
+              <a:lnSpc>
+                <a:spcPct val="100000"/>
+              </a:lnSpc>
               <a:buNone/>
+              <a:tabLst>
+                <a:tab pos="0" algn="l"/>
+              </a:tabLst>
               <a:defRPr lang="en-IN" sz="3450" b="0" u="none" strike="noStrike">
                 <a:solidFill>
                   <a:srgbClr val="000000"/>
@@ -355,7 +360,13 @@
           </a:lstStyle>
           <a:p>
             <a:pPr indent="0" algn="l">
+              <a:lnSpc>
+                <a:spcPct val="100000"/>
+              </a:lnSpc>
               <a:buNone/>
+              <a:tabLst>
+                <a:tab pos="0" algn="l"/>
+              </a:tabLst>
             </a:pPr>
             <a:r>
               <a:rPr lang="en-IN" sz="3450" b="0" u="none" strike="noStrike">
@@ -392,7 +403,7 @@
         <p:spPr>
           <a:xfrm>
             <a:off x="4974480" y="7653600"/>
-            <a:ext cx="4681440" cy="411120"/>
+            <a:ext cx="4681080" cy="410760"/>
           </a:xfrm>
           <a:prstGeom prst="rect">
             <a:avLst/>
@@ -408,7 +419,13 @@
           </a:bodyPr>
           <a:lstStyle>
             <a:lvl1pPr indent="0" algn="ctr">
+              <a:lnSpc>
+                <a:spcPct val="100000"/>
+              </a:lnSpc>
               <a:buNone/>
+              <a:tabLst>
+                <a:tab pos="0" algn="l"/>
+              </a:tabLst>
               <a:defRPr lang="en-IN" sz="1400" b="0" u="none" strike="noStrike">
                 <a:solidFill>
                   <a:srgbClr val="000000"/>
@@ -421,7 +438,13 @@
           </a:lstStyle>
           <a:p>
             <a:pPr indent="0" algn="ctr">
+              <a:lnSpc>
+                <a:spcPct val="100000"/>
+              </a:lnSpc>
               <a:buNone/>
+              <a:tabLst>
+                <a:tab pos="0" algn="l"/>
+              </a:tabLst>
             </a:pPr>
             <a:r>
               <a:rPr lang="en-IN" sz="1400" b="0" u="none" strike="noStrike">
@@ -432,7 +455,7 @@
                 <a:uFillTx/>
                 <a:latin typeface="Times New Roman"/>
               </a:rPr>
-              <a:t>&lt;footer&gt;</a:t>
+              <a:t> </a:t>
             </a:r>
             <a:endParaRPr lang="en-IN" sz="1400" b="0" u="none" strike="noStrike">
               <a:solidFill>
@@ -458,7 +481,7 @@
         <p:spPr>
           <a:xfrm>
             <a:off x="731520" y="7653600"/>
-            <a:ext cx="3364560" cy="411120"/>
+            <a:ext cx="3364200" cy="410760"/>
           </a:xfrm>
           <a:prstGeom prst="rect">
             <a:avLst/>
@@ -474,7 +497,13 @@
           </a:bodyPr>
           <a:lstStyle>
             <a:lvl1pPr indent="0" algn="l">
+              <a:lnSpc>
+                <a:spcPct val="100000"/>
+              </a:lnSpc>
               <a:buNone/>
+              <a:tabLst>
+                <a:tab pos="0" algn="l"/>
+              </a:tabLst>
               <a:defRPr lang="en-IN" sz="1400" b="0" u="none" strike="noStrike">
                 <a:solidFill>
                   <a:srgbClr val="000000"/>
@@ -487,7 +516,13 @@
           </a:lstStyle>
           <a:p>
             <a:pPr indent="0" algn="l">
+              <a:lnSpc>
+                <a:spcPct val="100000"/>
+              </a:lnSpc>
               <a:buNone/>
+              <a:tabLst>
+                <a:tab pos="0" algn="l"/>
+              </a:tabLst>
             </a:pPr>
             <a:r>
               <a:rPr lang="en-IN" sz="1400" b="0" u="none" strike="noStrike">
@@ -498,7 +533,7 @@
                 <a:uFillTx/>
                 <a:latin typeface="Times New Roman"/>
               </a:rPr>
-              <a:t>&lt;date/time&gt;</a:t>
+              <a:t> </a:t>
             </a:r>
             <a:endParaRPr lang="en-IN" sz="1400" b="0" u="none" strike="noStrike">
               <a:solidFill>
@@ -524,7 +559,7 @@
         <p:spPr>
           <a:xfrm>
             <a:off x="10533960" y="7653600"/>
-            <a:ext cx="3364560" cy="411120"/>
+            <a:ext cx="3364200" cy="410760"/>
           </a:xfrm>
           <a:prstGeom prst="rect">
             <a:avLst/>
@@ -544,6 +579,9 @@
                 <a:spcPct val="100000"/>
               </a:lnSpc>
               <a:buNone/>
+              <a:tabLst>
+                <a:tab pos="0" algn="l"/>
+              </a:tabLst>
               <a:defRPr lang="en-IN" sz="1400" b="0" u="none" strike="noStrike">
                 <a:solidFill>
                   <a:schemeClr val="dk1">
@@ -562,8 +600,11 @@
                 <a:spcPct val="100000"/>
               </a:lnSpc>
               <a:buNone/>
+              <a:tabLst>
+                <a:tab pos="0" algn="l"/>
+              </a:tabLst>
             </a:pPr>
-            <a:fld id="{A7BB1F2B-2644-424D-A7F7-8325B7115A68}" type="slidenum">
+            <a:fld id="{4E7A121A-30EE-4A3A-AB1D-6080B2B56E8E}" type="slidenum">
               <a:rPr lang="en-IN" sz="1400" b="0" u="none" strike="noStrike">
                 <a:solidFill>
                   <a:schemeClr val="dk1">
@@ -574,7 +615,7 @@
                 <a:uFillTx/>
                 <a:latin typeface="Times New Roman"/>
               </a:rPr>
-              <a:t>&lt;number&gt;</a:t>
+              <a:t>1</a:t>
             </a:fld>
             <a:endParaRPr lang="en-IN" sz="1400" b="0" u="none" strike="noStrike">
               <a:solidFill>
@@ -600,7 +641,7 @@
         <p:spPr>
           <a:xfrm>
             <a:off x="731520" y="1925640"/>
-            <a:ext cx="13167000" cy="4772520"/>
+            <a:ext cx="13166640" cy="4772160"/>
           </a:xfrm>
           <a:prstGeom prst="rect">
             <a:avLst/>
@@ -616,6 +657,9 @@
           </a:bodyPr>
           <a:lstStyle>
             <a:lvl1pPr algn="l">
+              <a:lnSpc>
+                <a:spcPct val="100000"/>
+              </a:lnSpc>
               <a:spcBef>
                 <a:spcPts val="1417"/>
               </a:spcBef>
@@ -635,6 +679,9 @@
               </a:defRPr>
             </a:lvl1pPr>
             <a:lvl2pPr lvl="1" algn="l">
+              <a:lnSpc>
+                <a:spcPct val="100000"/>
+              </a:lnSpc>
               <a:spcBef>
                 <a:spcPts val="1134"/>
               </a:spcBef>
@@ -654,6 +701,9 @@
               </a:defRPr>
             </a:lvl2pPr>
             <a:lvl3pPr lvl="2" algn="l">
+              <a:lnSpc>
+                <a:spcPct val="100000"/>
+              </a:lnSpc>
               <a:spcBef>
                 <a:spcPts val="850"/>
               </a:spcBef>
@@ -673,6 +723,9 @@
               </a:defRPr>
             </a:lvl3pPr>
             <a:lvl4pPr lvl="3" algn="l">
+              <a:lnSpc>
+                <a:spcPct val="100000"/>
+              </a:lnSpc>
               <a:spcBef>
                 <a:spcPts val="567"/>
               </a:spcBef>
@@ -692,6 +745,9 @@
               </a:defRPr>
             </a:lvl4pPr>
             <a:lvl5pPr lvl="4" algn="l">
+              <a:lnSpc>
+                <a:spcPct val="100000"/>
+              </a:lnSpc>
               <a:spcBef>
                 <a:spcPts val="283"/>
               </a:spcBef>
@@ -711,6 +767,9 @@
               </a:defRPr>
             </a:lvl5pPr>
             <a:lvl6pPr lvl="5" algn="l">
+              <a:lnSpc>
+                <a:spcPct val="100000"/>
+              </a:lnSpc>
               <a:spcBef>
                 <a:spcPts val="283"/>
               </a:spcBef>
@@ -730,6 +789,9 @@
               </a:defRPr>
             </a:lvl6pPr>
             <a:lvl7pPr lvl="6" algn="l">
+              <a:lnSpc>
+                <a:spcPct val="100000"/>
+              </a:lnSpc>
               <a:spcBef>
                 <a:spcPts val="283"/>
               </a:spcBef>
@@ -751,6 +813,9 @@
           </a:lstStyle>
           <a:p>
             <a:pPr marL="432000" indent="-324000" algn="l">
+              <a:lnSpc>
+                <a:spcPct val="100000"/>
+              </a:lnSpc>
               <a:spcBef>
                 <a:spcPts val="1417"/>
               </a:spcBef>
@@ -783,6 +848,9 @@
           </a:p>
           <a:p>
             <a:pPr marL="864000" lvl="1" indent="-324000" algn="l">
+              <a:lnSpc>
+                <a:spcPct val="100000"/>
+              </a:lnSpc>
               <a:spcBef>
                 <a:spcPts val="1134"/>
               </a:spcBef>
@@ -815,6 +883,9 @@
           </a:p>
           <a:p>
             <a:pPr marL="1296000" lvl="2" indent="-288000" algn="l">
+              <a:lnSpc>
+                <a:spcPct val="100000"/>
+              </a:lnSpc>
               <a:spcBef>
                 <a:spcPts val="850"/>
               </a:spcBef>
@@ -847,6 +918,9 @@
           </a:p>
           <a:p>
             <a:pPr marL="1728000" lvl="3" indent="-216000" algn="l">
+              <a:lnSpc>
+                <a:spcPct val="100000"/>
+              </a:lnSpc>
               <a:spcBef>
                 <a:spcPts val="567"/>
               </a:spcBef>
@@ -879,6 +953,9 @@
           </a:p>
           <a:p>
             <a:pPr marL="2160000" lvl="4" indent="-216000" algn="l">
+              <a:lnSpc>
+                <a:spcPct val="100000"/>
+              </a:lnSpc>
               <a:spcBef>
                 <a:spcPts val="283"/>
               </a:spcBef>
@@ -911,6 +988,9 @@
           </a:p>
           <a:p>
             <a:pPr marL="2592000" lvl="5" indent="-216000" algn="l">
+              <a:lnSpc>
+                <a:spcPct val="100000"/>
+              </a:lnSpc>
               <a:spcBef>
                 <a:spcPts val="283"/>
               </a:spcBef>
@@ -943,6 +1023,9 @@
           </a:p>
           <a:p>
             <a:pPr marL="3024000" lvl="6" indent="-216000" algn="l">
+              <a:lnSpc>
+                <a:spcPct val="100000"/>
+              </a:lnSpc>
               <a:spcBef>
                 <a:spcPts val="283"/>
               </a:spcBef>
@@ -1013,15 +1096,15 @@
         <p:spPr>
           <a:xfrm>
             <a:off x="0" y="0"/>
-            <a:ext cx="14630040" cy="8229240"/>
+            <a:ext cx="14629680" cy="8228880"/>
           </a:xfrm>
           <a:custGeom>
             <a:avLst/>
             <a:gdLst>
-              <a:gd name="textAreaLeft" fmla="*/ 0 w 14630040"/>
-              <a:gd name="textAreaRight" fmla="*/ 14630400 w 14630040"/>
-              <a:gd name="textAreaTop" fmla="*/ 0 h 8229240"/>
-              <a:gd name="textAreaBottom" fmla="*/ 8229600 h 8229240"/>
+              <a:gd name="textAreaLeft" fmla="*/ 0 w 14629680"/>
+              <a:gd name="textAreaRight" fmla="*/ 14630400 w 14629680"/>
+              <a:gd name="textAreaTop" fmla="*/ 0 h 8228880"/>
+              <a:gd name="textAreaBottom" fmla="*/ 8229600 h 8228880"/>
             </a:gdLst>
             <a:ahLst/>
             <a:cxnLst/>
@@ -1091,7 +1174,7 @@
         <p:spPr>
           <a:xfrm>
             <a:off x="12838320" y="7751160"/>
-            <a:ext cx="1724760" cy="411120"/>
+            <a:ext cx="1724400" cy="410760"/>
           </a:xfrm>
           <a:prstGeom prst="rect">
             <a:avLst/>
@@ -1115,7 +1198,7 @@
         <p:spPr>
           <a:xfrm>
             <a:off x="693720" y="442440"/>
-            <a:ext cx="13242240" cy="1696320"/>
+            <a:ext cx="13241880" cy="1695960"/>
           </a:xfrm>
           <a:prstGeom prst="rect">
             <a:avLst/>
@@ -1131,7 +1214,13 @@
           </a:bodyPr>
           <a:lstStyle>
             <a:lvl1pPr indent="0" algn="l">
+              <a:lnSpc>
+                <a:spcPct val="100000"/>
+              </a:lnSpc>
               <a:buNone/>
+              <a:tabLst>
+                <a:tab pos="0" algn="l"/>
+              </a:tabLst>
               <a:defRPr lang="en-IN" sz="3450" b="0" u="none" strike="noStrike">
                 <a:solidFill>
                   <a:srgbClr val="000000"/>
@@ -1144,7 +1233,13 @@
           </a:lstStyle>
           <a:p>
             <a:pPr indent="0" algn="l">
+              <a:lnSpc>
+                <a:spcPct val="100000"/>
+              </a:lnSpc>
               <a:buNone/>
+              <a:tabLst>
+                <a:tab pos="0" algn="l"/>
+              </a:tabLst>
             </a:pPr>
             <a:r>
               <a:rPr lang="en-IN" sz="3450" b="0" u="none" strike="noStrike">
@@ -1181,7 +1276,7 @@
         <p:spPr>
           <a:xfrm>
             <a:off x="7327080" y="2057760"/>
-            <a:ext cx="6111000" cy="5285880"/>
+            <a:ext cx="6110640" cy="5285520"/>
           </a:xfrm>
           <a:prstGeom prst="rect">
             <a:avLst/>
@@ -1197,6 +1292,9 @@
           </a:bodyPr>
           <a:lstStyle>
             <a:lvl1pPr algn="l">
+              <a:lnSpc>
+                <a:spcPct val="100000"/>
+              </a:lnSpc>
               <a:spcBef>
                 <a:spcPts val="1417"/>
               </a:spcBef>
@@ -1216,6 +1314,9 @@
               </a:defRPr>
             </a:lvl1pPr>
             <a:lvl2pPr lvl="1" algn="l">
+              <a:lnSpc>
+                <a:spcPct val="100000"/>
+              </a:lnSpc>
               <a:spcBef>
                 <a:spcPts val="1134"/>
               </a:spcBef>
@@ -1235,6 +1336,9 @@
               </a:defRPr>
             </a:lvl2pPr>
             <a:lvl3pPr lvl="2" algn="l">
+              <a:lnSpc>
+                <a:spcPct val="100000"/>
+              </a:lnSpc>
               <a:spcBef>
                 <a:spcPts val="850"/>
               </a:spcBef>
@@ -1254,6 +1358,9 @@
               </a:defRPr>
             </a:lvl3pPr>
             <a:lvl4pPr lvl="3" algn="l">
+              <a:lnSpc>
+                <a:spcPct val="100000"/>
+              </a:lnSpc>
               <a:spcBef>
                 <a:spcPts val="567"/>
               </a:spcBef>
@@ -1273,6 +1380,9 @@
               </a:defRPr>
             </a:lvl4pPr>
             <a:lvl5pPr lvl="4" algn="l">
+              <a:lnSpc>
+                <a:spcPct val="100000"/>
+              </a:lnSpc>
               <a:spcBef>
                 <a:spcPts val="283"/>
               </a:spcBef>
@@ -1292,6 +1402,9 @@
               </a:defRPr>
             </a:lvl5pPr>
             <a:lvl6pPr lvl="5" algn="l">
+              <a:lnSpc>
+                <a:spcPct val="100000"/>
+              </a:lnSpc>
               <a:spcBef>
                 <a:spcPts val="283"/>
               </a:spcBef>
@@ -1311,6 +1424,9 @@
               </a:defRPr>
             </a:lvl6pPr>
             <a:lvl7pPr lvl="6" algn="l">
+              <a:lnSpc>
+                <a:spcPct val="100000"/>
+              </a:lnSpc>
               <a:spcBef>
                 <a:spcPts val="283"/>
               </a:spcBef>
@@ -1331,7 +1447,10 @@
             </a:lvl7pPr>
           </a:lstStyle>
           <a:p>
-            <a:pPr indent="-324000" algn="l">
+            <a:pPr marL="432000" indent="-324000" algn="l">
+              <a:lnSpc>
+                <a:spcPct val="100000"/>
+              </a:lnSpc>
               <a:spcBef>
                 <a:spcPts val="1417"/>
               </a:spcBef>
@@ -1364,6 +1483,9 @@
           </a:p>
           <a:p>
             <a:pPr marL="457200" lvl="1" indent="-324000" algn="l">
+              <a:lnSpc>
+                <a:spcPct val="100000"/>
+              </a:lnSpc>
               <a:spcBef>
                 <a:spcPts val="1134"/>
               </a:spcBef>
@@ -1396,6 +1518,9 @@
           </a:p>
           <a:p>
             <a:pPr marL="914400" lvl="2" indent="-288000" algn="l">
+              <a:lnSpc>
+                <a:spcPct val="100000"/>
+              </a:lnSpc>
               <a:spcBef>
                 <a:spcPts val="850"/>
               </a:spcBef>
@@ -1428,6 +1553,9 @@
           </a:p>
           <a:p>
             <a:pPr marL="1371600" lvl="3" indent="-216000" algn="l">
+              <a:lnSpc>
+                <a:spcPct val="100000"/>
+              </a:lnSpc>
               <a:spcBef>
                 <a:spcPts val="567"/>
               </a:spcBef>
@@ -1460,6 +1588,9 @@
           </a:p>
           <a:p>
             <a:pPr marL="1828800" lvl="4" indent="-216000" algn="l">
+              <a:lnSpc>
+                <a:spcPct val="100000"/>
+              </a:lnSpc>
               <a:spcBef>
                 <a:spcPts val="283"/>
               </a:spcBef>
@@ -1492,6 +1623,9 @@
           </a:p>
           <a:p>
             <a:pPr marL="2286000" lvl="5" indent="-216000" algn="l">
+              <a:lnSpc>
+                <a:spcPct val="100000"/>
+              </a:lnSpc>
               <a:spcBef>
                 <a:spcPts val="283"/>
               </a:spcBef>
@@ -1524,6 +1658,9 @@
           </a:p>
           <a:p>
             <a:pPr marL="2743200" lvl="6" indent="-216000" algn="l">
+              <a:lnSpc>
+                <a:spcPct val="100000"/>
+              </a:lnSpc>
               <a:spcBef>
                 <a:spcPts val="283"/>
               </a:spcBef>
@@ -1569,7 +1706,7 @@
         <p:spPr>
           <a:xfrm>
             <a:off x="4974480" y="7653600"/>
-            <a:ext cx="4681440" cy="411120"/>
+            <a:ext cx="4681080" cy="410760"/>
           </a:xfrm>
           <a:prstGeom prst="rect">
             <a:avLst/>
@@ -1585,7 +1722,13 @@
           </a:bodyPr>
           <a:lstStyle>
             <a:lvl1pPr indent="0" algn="ctr">
+              <a:lnSpc>
+                <a:spcPct val="100000"/>
+              </a:lnSpc>
               <a:buNone/>
+              <a:tabLst>
+                <a:tab pos="0" algn="l"/>
+              </a:tabLst>
               <a:defRPr lang="en-IN" sz="1400" b="0" u="none" strike="noStrike">
                 <a:solidFill>
                   <a:srgbClr val="000000"/>
@@ -1598,7 +1741,13 @@
           </a:lstStyle>
           <a:p>
             <a:pPr indent="0" algn="ctr">
+              <a:lnSpc>
+                <a:spcPct val="100000"/>
+              </a:lnSpc>
               <a:buNone/>
+              <a:tabLst>
+                <a:tab pos="0" algn="l"/>
+              </a:tabLst>
             </a:pPr>
             <a:r>
               <a:rPr lang="en-IN" sz="1400" b="0" u="none" strike="noStrike">
@@ -1635,7 +1784,7 @@
         <p:spPr>
           <a:xfrm>
             <a:off x="731520" y="7653600"/>
-            <a:ext cx="3364560" cy="411120"/>
+            <a:ext cx="3364200" cy="410760"/>
           </a:xfrm>
           <a:prstGeom prst="rect">
             <a:avLst/>
@@ -1651,7 +1800,13 @@
           </a:bodyPr>
           <a:lstStyle>
             <a:lvl1pPr indent="0" algn="l">
+              <a:lnSpc>
+                <a:spcPct val="100000"/>
+              </a:lnSpc>
               <a:buNone/>
+              <a:tabLst>
+                <a:tab pos="0" algn="l"/>
+              </a:tabLst>
               <a:defRPr lang="en-IN" sz="1400" b="0" u="none" strike="noStrike">
                 <a:solidFill>
                   <a:srgbClr val="000000"/>
@@ -1664,7 +1819,13 @@
           </a:lstStyle>
           <a:p>
             <a:pPr indent="0" algn="l">
+              <a:lnSpc>
+                <a:spcPct val="100000"/>
+              </a:lnSpc>
               <a:buNone/>
+              <a:tabLst>
+                <a:tab pos="0" algn="l"/>
+              </a:tabLst>
             </a:pPr>
             <a:r>
               <a:rPr lang="en-IN" sz="1400" b="0" u="none" strike="noStrike">
@@ -1701,7 +1862,7 @@
         <p:spPr>
           <a:xfrm>
             <a:off x="10533960" y="7653600"/>
-            <a:ext cx="3364560" cy="411120"/>
+            <a:ext cx="3364200" cy="410760"/>
           </a:xfrm>
           <a:prstGeom prst="rect">
             <a:avLst/>
@@ -1721,6 +1882,9 @@
                 <a:spcPct val="100000"/>
               </a:lnSpc>
               <a:buNone/>
+              <a:tabLst>
+                <a:tab pos="0" algn="l"/>
+              </a:tabLst>
               <a:defRPr lang="en-IN" sz="1400" b="0" u="none" strike="noStrike">
                 <a:solidFill>
                   <a:schemeClr val="dk1">
@@ -1739,8 +1903,11 @@
                 <a:spcPct val="100000"/>
               </a:lnSpc>
               <a:buNone/>
+              <a:tabLst>
+                <a:tab pos="0" algn="l"/>
+              </a:tabLst>
             </a:pPr>
-            <a:fld id="{F7056515-149E-431B-9CE9-E96D9A1E9ACF}" type="slidenum">
+            <a:fld id="{35F621B2-D24D-4610-9D95-8D77B1869442}" type="slidenum">
               <a:rPr lang="en-IN" sz="1400" b="0" u="none" strike="noStrike">
                 <a:solidFill>
                   <a:schemeClr val="dk1">
@@ -1802,15 +1969,15 @@
         <p:spPr>
           <a:xfrm>
             <a:off x="0" y="0"/>
-            <a:ext cx="14630040" cy="8229240"/>
+            <a:ext cx="14629680" cy="8228880"/>
           </a:xfrm>
           <a:custGeom>
             <a:avLst/>
             <a:gdLst>
-              <a:gd name="textAreaLeft" fmla="*/ 0 w 14630040"/>
-              <a:gd name="textAreaRight" fmla="*/ 14630400 w 14630040"/>
-              <a:gd name="textAreaTop" fmla="*/ 0 h 8229240"/>
-              <a:gd name="textAreaBottom" fmla="*/ 8229600 h 8229240"/>
+              <a:gd name="textAreaLeft" fmla="*/ 0 w 14629680"/>
+              <a:gd name="textAreaRight" fmla="*/ 14630400 w 14629680"/>
+              <a:gd name="textAreaTop" fmla="*/ 0 h 8228880"/>
+              <a:gd name="textAreaBottom" fmla="*/ 8229600 h 8228880"/>
             </a:gdLst>
             <a:ahLst/>
             <a:cxnLst/>
@@ -1880,7 +2047,7 @@
         <p:spPr>
           <a:xfrm>
             <a:off x="12838320" y="7751160"/>
-            <a:ext cx="1724760" cy="411120"/>
+            <a:ext cx="1724400" cy="410760"/>
           </a:xfrm>
           <a:prstGeom prst="rect">
             <a:avLst/>
@@ -1904,7 +2071,7 @@
         <p:spPr>
           <a:xfrm>
             <a:off x="693720" y="442440"/>
-            <a:ext cx="13242240" cy="1696320"/>
+            <a:ext cx="13241880" cy="1695960"/>
           </a:xfrm>
           <a:prstGeom prst="rect">
             <a:avLst/>
@@ -1920,7 +2087,13 @@
           </a:bodyPr>
           <a:lstStyle>
             <a:lvl1pPr indent="0" algn="l">
+              <a:lnSpc>
+                <a:spcPct val="100000"/>
+              </a:lnSpc>
               <a:buNone/>
+              <a:tabLst>
+                <a:tab pos="0" algn="l"/>
+              </a:tabLst>
               <a:defRPr lang="en-IN" sz="3450" b="0" u="none" strike="noStrike">
                 <a:solidFill>
                   <a:srgbClr val="000000"/>
@@ -1933,7 +2106,13 @@
           </a:lstStyle>
           <a:p>
             <a:pPr indent="0" algn="l">
+              <a:lnSpc>
+                <a:spcPct val="100000"/>
+              </a:lnSpc>
               <a:buNone/>
+              <a:tabLst>
+                <a:tab pos="0" algn="l"/>
+              </a:tabLst>
             </a:pPr>
             <a:r>
               <a:rPr lang="en-IN" sz="3450" b="0" u="none" strike="noStrike">
@@ -1970,7 +2149,7 @@
         <p:spPr>
           <a:xfrm>
             <a:off x="731520" y="1892880"/>
-            <a:ext cx="6363720" cy="2778480"/>
+            <a:ext cx="6363360" cy="2778480"/>
           </a:xfrm>
           <a:prstGeom prst="rect">
             <a:avLst/>
@@ -1986,6 +2165,9 @@
           </a:bodyPr>
           <a:lstStyle>
             <a:lvl1pPr algn="l">
+              <a:lnSpc>
+                <a:spcPct val="100000"/>
+              </a:lnSpc>
               <a:spcBef>
                 <a:spcPts val="1417"/>
               </a:spcBef>
@@ -2005,6 +2187,9 @@
               </a:defRPr>
             </a:lvl1pPr>
             <a:lvl2pPr lvl="1" algn="l">
+              <a:lnSpc>
+                <a:spcPct val="100000"/>
+              </a:lnSpc>
               <a:spcBef>
                 <a:spcPts val="1134"/>
               </a:spcBef>
@@ -2024,6 +2209,9 @@
               </a:defRPr>
             </a:lvl2pPr>
             <a:lvl3pPr lvl="2" algn="l">
+              <a:lnSpc>
+                <a:spcPct val="100000"/>
+              </a:lnSpc>
               <a:spcBef>
                 <a:spcPts val="850"/>
               </a:spcBef>
@@ -2043,6 +2231,9 @@
               </a:defRPr>
             </a:lvl3pPr>
             <a:lvl4pPr lvl="3" algn="l">
+              <a:lnSpc>
+                <a:spcPct val="100000"/>
+              </a:lnSpc>
               <a:spcBef>
                 <a:spcPts val="567"/>
               </a:spcBef>
@@ -2062,6 +2253,9 @@
               </a:defRPr>
             </a:lvl4pPr>
             <a:lvl5pPr lvl="4" algn="l">
+              <a:lnSpc>
+                <a:spcPct val="100000"/>
+              </a:lnSpc>
               <a:spcBef>
                 <a:spcPts val="283"/>
               </a:spcBef>
@@ -2081,6 +2275,9 @@
               </a:defRPr>
             </a:lvl5pPr>
             <a:lvl6pPr lvl="5" algn="l">
+              <a:lnSpc>
+                <a:spcPct val="100000"/>
+              </a:lnSpc>
               <a:spcBef>
                 <a:spcPts val="283"/>
               </a:spcBef>
@@ -2100,6 +2297,9 @@
               </a:defRPr>
             </a:lvl6pPr>
             <a:lvl7pPr lvl="6" algn="l">
+              <a:lnSpc>
+                <a:spcPct val="100000"/>
+              </a:lnSpc>
               <a:spcBef>
                 <a:spcPts val="283"/>
               </a:spcBef>
@@ -2120,7 +2320,10 @@
             </a:lvl7pPr>
           </a:lstStyle>
           <a:p>
-            <a:pPr indent="-324000" algn="l">
+            <a:pPr marL="432000" indent="-324000" algn="l">
+              <a:lnSpc>
+                <a:spcPct val="100000"/>
+              </a:lnSpc>
               <a:spcBef>
                 <a:spcPts val="1417"/>
               </a:spcBef>
@@ -2153,6 +2356,9 @@
           </a:p>
           <a:p>
             <a:pPr marL="457200" lvl="1" indent="-324000" algn="l">
+              <a:lnSpc>
+                <a:spcPct val="100000"/>
+              </a:lnSpc>
               <a:spcBef>
                 <a:spcPts val="1134"/>
               </a:spcBef>
@@ -2185,6 +2391,9 @@
           </a:p>
           <a:p>
             <a:pPr marL="914400" lvl="2" indent="-288000" algn="l">
+              <a:lnSpc>
+                <a:spcPct val="100000"/>
+              </a:lnSpc>
               <a:spcBef>
                 <a:spcPts val="850"/>
               </a:spcBef>
@@ -2217,6 +2426,9 @@
           </a:p>
           <a:p>
             <a:pPr marL="1371600" lvl="3" indent="-216000" algn="l">
+              <a:lnSpc>
+                <a:spcPct val="100000"/>
+              </a:lnSpc>
               <a:spcBef>
                 <a:spcPts val="567"/>
               </a:spcBef>
@@ -2249,6 +2461,9 @@
           </a:p>
           <a:p>
             <a:pPr marL="1828800" lvl="4" indent="-216000" algn="l">
+              <a:lnSpc>
+                <a:spcPct val="100000"/>
+              </a:lnSpc>
               <a:spcBef>
                 <a:spcPts val="283"/>
               </a:spcBef>
@@ -2281,6 +2496,9 @@
           </a:p>
           <a:p>
             <a:pPr marL="2286000" lvl="5" indent="-216000" algn="l">
+              <a:lnSpc>
+                <a:spcPct val="100000"/>
+              </a:lnSpc>
               <a:spcBef>
                 <a:spcPts val="283"/>
               </a:spcBef>
@@ -2313,6 +2531,9 @@
           </a:p>
           <a:p>
             <a:pPr marL="2743200" lvl="6" indent="-216000" algn="l">
+              <a:lnSpc>
+                <a:spcPct val="100000"/>
+              </a:lnSpc>
               <a:spcBef>
                 <a:spcPts val="283"/>
               </a:spcBef>
@@ -2358,7 +2579,7 @@
         <p:spPr>
           <a:xfrm>
             <a:off x="7534800" y="1892880"/>
-            <a:ext cx="6363720" cy="2778480"/>
+            <a:ext cx="6363360" cy="2778480"/>
           </a:xfrm>
           <a:prstGeom prst="rect">
             <a:avLst/>
@@ -2374,6 +2595,9 @@
           </a:bodyPr>
           <a:lstStyle>
             <a:lvl1pPr algn="l">
+              <a:lnSpc>
+                <a:spcPct val="100000"/>
+              </a:lnSpc>
               <a:spcBef>
                 <a:spcPts val="1417"/>
               </a:spcBef>
@@ -2393,6 +2617,9 @@
               </a:defRPr>
             </a:lvl1pPr>
             <a:lvl2pPr lvl="1" algn="l">
+              <a:lnSpc>
+                <a:spcPct val="100000"/>
+              </a:lnSpc>
               <a:spcBef>
                 <a:spcPts val="1134"/>
               </a:spcBef>
@@ -2412,6 +2639,9 @@
               </a:defRPr>
             </a:lvl2pPr>
             <a:lvl3pPr lvl="2" algn="l">
+              <a:lnSpc>
+                <a:spcPct val="100000"/>
+              </a:lnSpc>
               <a:spcBef>
                 <a:spcPts val="850"/>
               </a:spcBef>
@@ -2431,6 +2661,9 @@
               </a:defRPr>
             </a:lvl3pPr>
             <a:lvl4pPr lvl="3" algn="l">
+              <a:lnSpc>
+                <a:spcPct val="100000"/>
+              </a:lnSpc>
               <a:spcBef>
                 <a:spcPts val="567"/>
               </a:spcBef>
@@ -2450,6 +2683,9 @@
               </a:defRPr>
             </a:lvl4pPr>
             <a:lvl5pPr lvl="4" algn="l">
+              <a:lnSpc>
+                <a:spcPct val="100000"/>
+              </a:lnSpc>
               <a:spcBef>
                 <a:spcPts val="283"/>
               </a:spcBef>
@@ -2469,6 +2705,9 @@
               </a:defRPr>
             </a:lvl5pPr>
             <a:lvl6pPr lvl="5" algn="l">
+              <a:lnSpc>
+                <a:spcPct val="100000"/>
+              </a:lnSpc>
               <a:spcBef>
                 <a:spcPts val="283"/>
               </a:spcBef>
@@ -2488,6 +2727,9 @@
               </a:defRPr>
             </a:lvl6pPr>
             <a:lvl7pPr lvl="6" algn="l">
+              <a:lnSpc>
+                <a:spcPct val="100000"/>
+              </a:lnSpc>
               <a:spcBef>
                 <a:spcPts val="283"/>
               </a:spcBef>
@@ -2509,6 +2751,9 @@
           </a:lstStyle>
           <a:p>
             <a:pPr indent="-324000" algn="l">
+              <a:lnSpc>
+                <a:spcPct val="100000"/>
+              </a:lnSpc>
               <a:spcBef>
                 <a:spcPts val="1417"/>
               </a:spcBef>
@@ -2541,6 +2786,9 @@
           </a:p>
           <a:p>
             <a:pPr marL="457200" lvl="1" indent="-324000" algn="l">
+              <a:lnSpc>
+                <a:spcPct val="100000"/>
+              </a:lnSpc>
               <a:spcBef>
                 <a:spcPts val="1134"/>
               </a:spcBef>
@@ -2573,6 +2821,9 @@
           </a:p>
           <a:p>
             <a:pPr marL="914400" lvl="2" indent="-288000" algn="l">
+              <a:lnSpc>
+                <a:spcPct val="100000"/>
+              </a:lnSpc>
               <a:spcBef>
                 <a:spcPts val="850"/>
               </a:spcBef>
@@ -2605,6 +2856,9 @@
           </a:p>
           <a:p>
             <a:pPr marL="1371600" lvl="3" indent="-216000" algn="l">
+              <a:lnSpc>
+                <a:spcPct val="100000"/>
+              </a:lnSpc>
               <a:spcBef>
                 <a:spcPts val="567"/>
               </a:spcBef>
@@ -2637,6 +2891,9 @@
           </a:p>
           <a:p>
             <a:pPr marL="1828800" lvl="4" indent="-216000" algn="l">
+              <a:lnSpc>
+                <a:spcPct val="100000"/>
+              </a:lnSpc>
               <a:spcBef>
                 <a:spcPts val="283"/>
               </a:spcBef>
@@ -2669,6 +2926,9 @@
           </a:p>
           <a:p>
             <a:pPr marL="2286000" lvl="5" indent="-216000" algn="l">
+              <a:lnSpc>
+                <a:spcPct val="100000"/>
+              </a:lnSpc>
               <a:spcBef>
                 <a:spcPts val="283"/>
               </a:spcBef>
@@ -2701,6 +2961,9 @@
           </a:p>
           <a:p>
             <a:pPr marL="2743200" lvl="6" indent="-216000" algn="l">
+              <a:lnSpc>
+                <a:spcPct val="100000"/>
+              </a:lnSpc>
               <a:spcBef>
                 <a:spcPts val="283"/>
               </a:spcBef>
@@ -2746,7 +3009,7 @@
         <p:spPr>
           <a:xfrm>
             <a:off x="4974480" y="7653600"/>
-            <a:ext cx="4681440" cy="411120"/>
+            <a:ext cx="4681080" cy="410760"/>
           </a:xfrm>
           <a:prstGeom prst="rect">
             <a:avLst/>
@@ -2762,7 +3025,13 @@
           </a:bodyPr>
           <a:lstStyle>
             <a:lvl1pPr indent="0" algn="ctr">
+              <a:lnSpc>
+                <a:spcPct val="100000"/>
+              </a:lnSpc>
               <a:buNone/>
+              <a:tabLst>
+                <a:tab pos="0" algn="l"/>
+              </a:tabLst>
               <a:defRPr lang="en-IN" sz="1400" b="0" u="none" strike="noStrike">
                 <a:solidFill>
                   <a:srgbClr val="000000"/>
@@ -2775,7 +3044,13 @@
           </a:lstStyle>
           <a:p>
             <a:pPr indent="0" algn="ctr">
+              <a:lnSpc>
+                <a:spcPct val="100000"/>
+              </a:lnSpc>
               <a:buNone/>
+              <a:tabLst>
+                <a:tab pos="0" algn="l"/>
+              </a:tabLst>
             </a:pPr>
             <a:r>
               <a:rPr lang="en-IN" sz="1400" b="0" u="none" strike="noStrike">
@@ -2812,7 +3087,7 @@
         <p:spPr>
           <a:xfrm>
             <a:off x="731520" y="7653600"/>
-            <a:ext cx="3364560" cy="411120"/>
+            <a:ext cx="3364200" cy="410760"/>
           </a:xfrm>
           <a:prstGeom prst="rect">
             <a:avLst/>
@@ -2828,7 +3103,13 @@
           </a:bodyPr>
           <a:lstStyle>
             <a:lvl1pPr indent="0" algn="l">
+              <a:lnSpc>
+                <a:spcPct val="100000"/>
+              </a:lnSpc>
               <a:buNone/>
+              <a:tabLst>
+                <a:tab pos="0" algn="l"/>
+              </a:tabLst>
               <a:defRPr lang="en-IN" sz="1400" b="0" u="none" strike="noStrike">
                 <a:solidFill>
                   <a:srgbClr val="000000"/>
@@ -2841,7 +3122,13 @@
           </a:lstStyle>
           <a:p>
             <a:pPr indent="0" algn="l">
+              <a:lnSpc>
+                <a:spcPct val="100000"/>
+              </a:lnSpc>
               <a:buNone/>
+              <a:tabLst>
+                <a:tab pos="0" algn="l"/>
+              </a:tabLst>
             </a:pPr>
             <a:r>
               <a:rPr lang="en-IN" sz="1400" b="0" u="none" strike="noStrike">
@@ -2878,7 +3165,7 @@
         <p:spPr>
           <a:xfrm>
             <a:off x="10533960" y="7653600"/>
-            <a:ext cx="3364560" cy="411120"/>
+            <a:ext cx="3364200" cy="410760"/>
           </a:xfrm>
           <a:prstGeom prst="rect">
             <a:avLst/>
@@ -2898,6 +3185,9 @@
                 <a:spcPct val="100000"/>
               </a:lnSpc>
               <a:buNone/>
+              <a:tabLst>
+                <a:tab pos="0" algn="l"/>
+              </a:tabLst>
               <a:defRPr lang="en-IN" sz="1400" b="0" u="none" strike="noStrike">
                 <a:solidFill>
                   <a:schemeClr val="dk1">
@@ -2916,8 +3206,11 @@
                 <a:spcPct val="100000"/>
               </a:lnSpc>
               <a:buNone/>
+              <a:tabLst>
+                <a:tab pos="0" algn="l"/>
+              </a:tabLst>
             </a:pPr>
-            <a:fld id="{66321915-1CB3-4200-BFF7-32A236A1C6BE}" type="slidenum">
+            <a:fld id="{60663A4D-6579-462F-A2DB-D1D59C006A45}" type="slidenum">
               <a:rPr lang="en-IN" sz="1400" b="0" u="none" strike="noStrike">
                 <a:solidFill>
                   <a:schemeClr val="dk1">
@@ -2979,15 +3272,15 @@
         <p:spPr>
           <a:xfrm>
             <a:off x="0" y="0"/>
-            <a:ext cx="14630040" cy="8229240"/>
+            <a:ext cx="14629680" cy="8228880"/>
           </a:xfrm>
           <a:custGeom>
             <a:avLst/>
             <a:gdLst>
-              <a:gd name="textAreaLeft" fmla="*/ 0 w 14630040"/>
-              <a:gd name="textAreaRight" fmla="*/ 14630400 w 14630040"/>
-              <a:gd name="textAreaTop" fmla="*/ 0 h 8229240"/>
-              <a:gd name="textAreaBottom" fmla="*/ 8229600 h 8229240"/>
+              <a:gd name="textAreaLeft" fmla="*/ 0 w 14629680"/>
+              <a:gd name="textAreaRight" fmla="*/ 14630400 w 14629680"/>
+              <a:gd name="textAreaTop" fmla="*/ 0 h 8228880"/>
+              <a:gd name="textAreaBottom" fmla="*/ 8229600 h 8228880"/>
             </a:gdLst>
             <a:ahLst/>
             <a:cxnLst/>
@@ -3057,7 +3350,7 @@
         <p:spPr>
           <a:xfrm>
             <a:off x="12838320" y="7751160"/>
-            <a:ext cx="1724760" cy="411120"/>
+            <a:ext cx="1724400" cy="410760"/>
           </a:xfrm>
           <a:prstGeom prst="rect">
             <a:avLst/>
@@ -3081,7 +3374,7 @@
         <p:spPr>
           <a:xfrm>
             <a:off x="693720" y="442440"/>
-            <a:ext cx="13242240" cy="1696320"/>
+            <a:ext cx="13241880" cy="1695960"/>
           </a:xfrm>
           <a:prstGeom prst="rect">
             <a:avLst/>
@@ -3097,7 +3390,13 @@
           </a:bodyPr>
           <a:lstStyle>
             <a:lvl1pPr indent="0" algn="l">
+              <a:lnSpc>
+                <a:spcPct val="100000"/>
+              </a:lnSpc>
               <a:buNone/>
+              <a:tabLst>
+                <a:tab pos="0" algn="l"/>
+              </a:tabLst>
               <a:defRPr lang="en-IN" sz="3450" b="0" u="none" strike="noStrike">
                 <a:solidFill>
                   <a:srgbClr val="000000"/>
@@ -3110,7 +3409,13 @@
           </a:lstStyle>
           <a:p>
             <a:pPr indent="0" algn="l">
+              <a:lnSpc>
+                <a:spcPct val="100000"/>
+              </a:lnSpc>
               <a:buNone/>
+              <a:tabLst>
+                <a:tab pos="0" algn="l"/>
+              </a:tabLst>
             </a:pPr>
             <a:r>
               <a:rPr lang="en-IN" sz="3450" b="0" u="none" strike="noStrike">
@@ -3147,7 +3452,7 @@
         <p:spPr>
           <a:xfrm>
             <a:off x="4974480" y="7653600"/>
-            <a:ext cx="4681440" cy="411120"/>
+            <a:ext cx="4681080" cy="410760"/>
           </a:xfrm>
           <a:prstGeom prst="rect">
             <a:avLst/>
@@ -3163,7 +3468,13 @@
           </a:bodyPr>
           <a:lstStyle>
             <a:lvl1pPr indent="0" algn="ctr">
+              <a:lnSpc>
+                <a:spcPct val="100000"/>
+              </a:lnSpc>
               <a:buNone/>
+              <a:tabLst>
+                <a:tab pos="0" algn="l"/>
+              </a:tabLst>
               <a:defRPr lang="en-IN" sz="1400" b="0" u="none" strike="noStrike">
                 <a:solidFill>
                   <a:srgbClr val="000000"/>
@@ -3176,7 +3487,13 @@
           </a:lstStyle>
           <a:p>
             <a:pPr indent="0" algn="ctr">
+              <a:lnSpc>
+                <a:spcPct val="100000"/>
+              </a:lnSpc>
               <a:buNone/>
+              <a:tabLst>
+                <a:tab pos="0" algn="l"/>
+              </a:tabLst>
             </a:pPr>
             <a:r>
               <a:rPr lang="en-IN" sz="1400" b="0" u="none" strike="noStrike">
@@ -3213,7 +3530,7 @@
         <p:spPr>
           <a:xfrm>
             <a:off x="731520" y="7653600"/>
-            <a:ext cx="3364560" cy="411120"/>
+            <a:ext cx="3364200" cy="410760"/>
           </a:xfrm>
           <a:prstGeom prst="rect">
             <a:avLst/>
@@ -3229,7 +3546,13 @@
           </a:bodyPr>
           <a:lstStyle>
             <a:lvl1pPr indent="0" algn="l">
+              <a:lnSpc>
+                <a:spcPct val="100000"/>
+              </a:lnSpc>
               <a:buNone/>
+              <a:tabLst>
+                <a:tab pos="0" algn="l"/>
+              </a:tabLst>
               <a:defRPr lang="en-IN" sz="1400" b="0" u="none" strike="noStrike">
                 <a:solidFill>
                   <a:srgbClr val="000000"/>
@@ -3242,7 +3565,13 @@
           </a:lstStyle>
           <a:p>
             <a:pPr indent="0" algn="l">
+              <a:lnSpc>
+                <a:spcPct val="100000"/>
+              </a:lnSpc>
               <a:buNone/>
+              <a:tabLst>
+                <a:tab pos="0" algn="l"/>
+              </a:tabLst>
             </a:pPr>
             <a:r>
               <a:rPr lang="en-IN" sz="1400" b="0" u="none" strike="noStrike">
@@ -3279,7 +3608,7 @@
         <p:spPr>
           <a:xfrm>
             <a:off x="10533960" y="7653600"/>
-            <a:ext cx="3364560" cy="411120"/>
+            <a:ext cx="3364200" cy="410760"/>
           </a:xfrm>
           <a:prstGeom prst="rect">
             <a:avLst/>
@@ -3299,6 +3628,9 @@
                 <a:spcPct val="100000"/>
               </a:lnSpc>
               <a:buNone/>
+              <a:tabLst>
+                <a:tab pos="0" algn="l"/>
+              </a:tabLst>
               <a:defRPr lang="en-IN" sz="1400" b="0" u="none" strike="noStrike">
                 <a:solidFill>
                   <a:schemeClr val="dk1">
@@ -3317,8 +3649,11 @@
                 <a:spcPct val="100000"/>
               </a:lnSpc>
               <a:buNone/>
+              <a:tabLst>
+                <a:tab pos="0" algn="l"/>
+              </a:tabLst>
             </a:pPr>
-            <a:fld id="{B00B3348-D497-4E52-BBD9-59A5D6F13F0E}" type="slidenum">
+            <a:fld id="{95583723-0575-421F-822A-2AB662703CEE}" type="slidenum">
               <a:rPr lang="en-IN" sz="1400" b="0" u="none" strike="noStrike">
                 <a:solidFill>
                   <a:schemeClr val="dk1">
@@ -3380,15 +3715,15 @@
         <p:spPr>
           <a:xfrm>
             <a:off x="0" y="0"/>
-            <a:ext cx="14630040" cy="8229240"/>
+            <a:ext cx="14629680" cy="8228880"/>
           </a:xfrm>
           <a:custGeom>
             <a:avLst/>
             <a:gdLst>
-              <a:gd name="textAreaLeft" fmla="*/ 0 w 14630040"/>
-              <a:gd name="textAreaRight" fmla="*/ 14630400 w 14630040"/>
-              <a:gd name="textAreaTop" fmla="*/ 0 h 8229240"/>
-              <a:gd name="textAreaBottom" fmla="*/ 8229600 h 8229240"/>
+              <a:gd name="textAreaLeft" fmla="*/ 0 w 14629680"/>
+              <a:gd name="textAreaRight" fmla="*/ 14630400 w 14629680"/>
+              <a:gd name="textAreaTop" fmla="*/ 0 h 8228880"/>
+              <a:gd name="textAreaBottom" fmla="*/ 8229600 h 8228880"/>
             </a:gdLst>
             <a:ahLst/>
             <a:cxnLst/>
@@ -3458,7 +3793,7 @@
         <p:spPr>
           <a:xfrm>
             <a:off x="12838320" y="7751160"/>
-            <a:ext cx="1724760" cy="411120"/>
+            <a:ext cx="1724400" cy="410760"/>
           </a:xfrm>
           <a:prstGeom prst="rect">
             <a:avLst/>
@@ -3482,7 +3817,7 @@
         <p:spPr>
           <a:xfrm>
             <a:off x="4974480" y="7653600"/>
-            <a:ext cx="4681440" cy="411120"/>
+            <a:ext cx="4681080" cy="410760"/>
           </a:xfrm>
           <a:prstGeom prst="rect">
             <a:avLst/>
@@ -3498,7 +3833,13 @@
           </a:bodyPr>
           <a:lstStyle>
             <a:lvl1pPr indent="0" algn="ctr">
+              <a:lnSpc>
+                <a:spcPct val="100000"/>
+              </a:lnSpc>
               <a:buNone/>
+              <a:tabLst>
+                <a:tab pos="0" algn="l"/>
+              </a:tabLst>
               <a:defRPr lang="en-IN" sz="1400" b="0" u="none" strike="noStrike">
                 <a:solidFill>
                   <a:srgbClr val="000000"/>
@@ -3511,7 +3852,13 @@
           </a:lstStyle>
           <a:p>
             <a:pPr indent="0" algn="ctr">
+              <a:lnSpc>
+                <a:spcPct val="100000"/>
+              </a:lnSpc>
               <a:buNone/>
+              <a:tabLst>
+                <a:tab pos="0" algn="l"/>
+              </a:tabLst>
             </a:pPr>
             <a:r>
               <a:rPr lang="en-IN" sz="1400" b="0" u="none" strike="noStrike">
@@ -3548,7 +3895,7 @@
         <p:spPr>
           <a:xfrm>
             <a:off x="731520" y="7653600"/>
-            <a:ext cx="3364560" cy="411120"/>
+            <a:ext cx="3364200" cy="410760"/>
           </a:xfrm>
           <a:prstGeom prst="rect">
             <a:avLst/>
@@ -3564,7 +3911,13 @@
           </a:bodyPr>
           <a:lstStyle>
             <a:lvl1pPr indent="0" algn="l">
+              <a:lnSpc>
+                <a:spcPct val="100000"/>
+              </a:lnSpc>
               <a:buNone/>
+              <a:tabLst>
+                <a:tab pos="0" algn="l"/>
+              </a:tabLst>
               <a:defRPr lang="en-IN" sz="1400" b="0" u="none" strike="noStrike">
                 <a:solidFill>
                   <a:srgbClr val="000000"/>
@@ -3577,7 +3930,13 @@
           </a:lstStyle>
           <a:p>
             <a:pPr indent="0" algn="l">
+              <a:lnSpc>
+                <a:spcPct val="100000"/>
+              </a:lnSpc>
               <a:buNone/>
+              <a:tabLst>
+                <a:tab pos="0" algn="l"/>
+              </a:tabLst>
             </a:pPr>
             <a:r>
               <a:rPr lang="en-IN" sz="1400" b="0" u="none" strike="noStrike">
@@ -3614,7 +3973,7 @@
         <p:spPr>
           <a:xfrm>
             <a:off x="10533960" y="7653600"/>
-            <a:ext cx="3364560" cy="411120"/>
+            <a:ext cx="3364200" cy="410760"/>
           </a:xfrm>
           <a:prstGeom prst="rect">
             <a:avLst/>
@@ -3634,6 +3993,9 @@
                 <a:spcPct val="100000"/>
               </a:lnSpc>
               <a:buNone/>
+              <a:tabLst>
+                <a:tab pos="0" algn="l"/>
+              </a:tabLst>
               <a:defRPr lang="en-IN" sz="1400" b="0" u="none" strike="noStrike">
                 <a:solidFill>
                   <a:schemeClr val="dk1">
@@ -3652,8 +4014,11 @@
                 <a:spcPct val="100000"/>
               </a:lnSpc>
               <a:buNone/>
+              <a:tabLst>
+                <a:tab pos="0" algn="l"/>
+              </a:tabLst>
             </a:pPr>
-            <a:fld id="{F4B7B31C-9CFC-43B8-8F61-07ACFE135F0D}" type="slidenum">
+            <a:fld id="{3CA34B99-FE8C-40BE-8D9F-B4CE93AF1DF2}" type="slidenum">
               <a:rPr lang="en-IN" sz="1400" b="0" u="none" strike="noStrike">
                 <a:solidFill>
                   <a:schemeClr val="dk1">
@@ -3742,7 +4107,7 @@
         <p:spPr>
           <a:xfrm>
             <a:off x="1007640" y="2876760"/>
-            <a:ext cx="6826680" cy="1585800"/>
+            <a:ext cx="6826320" cy="1586160"/>
           </a:xfrm>
           <a:prstGeom prst="rect">
             <a:avLst/>
@@ -3762,6 +4127,9 @@
                 <a:spcPts val="6290"/>
               </a:lnSpc>
               <a:buNone/>
+              <a:tabLst>
+                <a:tab pos="0" algn="l"/>
+              </a:tabLst>
             </a:pPr>
             <a:r>
               <a:rPr lang="en-IN" sz="5000" b="0" u="none" spc="394" strike="noStrike">
@@ -3871,7 +4239,7 @@
         <p:spPr>
           <a:xfrm>
             <a:off x="1080000" y="6120000"/>
-            <a:ext cx="4022280" cy="316800"/>
+            <a:ext cx="4021920" cy="316080"/>
           </a:xfrm>
           <a:prstGeom prst="rect">
             <a:avLst/>
@@ -4013,2440 +4381,6 @@
             <a:endParaRPr lang="en-IN" sz="2000" b="0" u="none" strike="noStrike">
               <a:solidFill>
                 <a:srgbClr val="000000"/>
-              </a:solidFill>
-              <a:effectLst/>
-              <a:uFillTx/>
-              <a:latin typeface="Arial"/>
-            </a:endParaRPr>
-          </a:p>
-        </p:txBody>
-      </p:sp>
-    </p:spTree>
-  </p:cSld>
-  <mc:AlternateContent>
-    <mc:Choice Requires="p14">
-      <p:transition spd="slow" p14:dur="2000"/>
-    </mc:Choice>
-    <mc:Fallback>
-      <p:transition spd="slow"/>
-    </mc:Fallback>
-  </mc:AlternateContent>
-</p:sld>
-</file>
-
-<file path=ppt/slides/slide10.xml><?xml version="1.0" encoding="utf-8"?>
-<p:sld xmlns:a="http://schemas.openxmlformats.org/drawingml/2006/main" xmlns:p="http://schemas.openxmlformats.org/presentationml/2006/main" xmlns:r="http://schemas.openxmlformats.org/officeDocument/2006/relationships" xmlns:p14="http://schemas.microsoft.com/office/powerpoint/2010/main" xmlns:p15="http://schemas.microsoft.com/office/powerpoint/2012/main" xmlns:mc="http://schemas.openxmlformats.org/markup-compatibility/2006">
-  <p:cSld>
-    <p:spTree>
-      <p:nvGrpSpPr>
-        <p:cNvPr id="1" name=""/>
-        <p:cNvGrpSpPr/>
-        <p:nvPr/>
-      </p:nvGrpSpPr>
-      <p:grpSpPr>
-        <a:xfrm>
-          <a:off x="0" y="0"/>
-          <a:ext cx="0" cy="0"/>
-          <a:chOff x="0" y="0"/>
-          <a:chExt cx="0" cy="0"/>
-        </a:xfrm>
-      </p:grpSpPr>
-      <p:pic>
-        <p:nvPicPr>
-          <p:cNvPr id="162" name="object 2"/>
-          <p:cNvPicPr/>
-          <p:nvPr/>
-        </p:nvPicPr>
-        <p:blipFill>
-          <a:blip r:embed="rId1"/>
-          <a:stretch/>
-        </p:blipFill>
-        <p:spPr>
-          <a:xfrm>
-            <a:off x="9144000" y="0"/>
-            <a:ext cx="5486040" cy="8229240"/>
-          </a:xfrm>
-          <a:prstGeom prst="rect">
-            <a:avLst/>
-          </a:prstGeom>
-          <a:noFill/>
-          <a:ln w="0">
-            <a:noFill/>
-          </a:ln>
-        </p:spPr>
-      </p:pic>
-      <p:sp>
-        <p:nvSpPr>
-          <p:cNvPr id="163" name="PlaceHolder 1"/>
-          <p:cNvSpPr>
-            <a:spLocks noGrp="1"/>
-          </p:cNvSpPr>
-          <p:nvPr>
-            <p:ph type="title"/>
-          </p:nvPr>
-        </p:nvSpPr>
-        <p:spPr>
-          <a:xfrm>
-            <a:off x="693720" y="442440"/>
-            <a:ext cx="13242240" cy="1697040"/>
-          </a:xfrm>
-          <a:prstGeom prst="rect">
-            <a:avLst/>
-          </a:prstGeom>
-          <a:noFill/>
-          <a:ln w="0">
-            <a:noFill/>
-          </a:ln>
-        </p:spPr>
-        <p:txBody>
-          <a:bodyPr lIns="0" tIns="13320" rIns="0" bIns="0" anchor="t">
-            <a:spAutoFit/>
-          </a:bodyPr>
-          <a:p>
-            <a:pPr marL="12600" indent="0" algn="l">
-              <a:lnSpc>
-                <a:spcPct val="100000"/>
-              </a:lnSpc>
-              <a:spcBef>
-                <a:spcPts val="105"/>
-              </a:spcBef>
-              <a:buNone/>
-            </a:pPr>
-            <a:r>
-              <a:rPr lang="en-IN" sz="3450" b="0" u="none" spc="241" strike="noStrike">
-                <a:solidFill>
-                  <a:srgbClr val="F5EFEF"/>
-                </a:solidFill>
-                <a:effectLst/>
-                <a:uFillTx/>
-                <a:latin typeface="Cambria"/>
-              </a:rPr>
-              <a:t>Key</a:t>
-            </a:r>
-            <a:r>
-              <a:rPr lang="en-IN" sz="3450" b="0" u="none" spc="31" strike="noStrike">
-                <a:solidFill>
-                  <a:srgbClr val="F5EFEF"/>
-                </a:solidFill>
-                <a:effectLst/>
-                <a:uFillTx/>
-                <a:latin typeface="Cambria"/>
-              </a:rPr>
-              <a:t> </a:t>
-            </a:r>
-            <a:r>
-              <a:rPr lang="en-IN" sz="3450" b="0" u="none" spc="244" strike="noStrike">
-                <a:solidFill>
-                  <a:srgbClr val="F5EFEF"/>
-                </a:solidFill>
-                <a:effectLst/>
-                <a:uFillTx/>
-                <a:latin typeface="Cambria"/>
-              </a:rPr>
-              <a:t>Takeaways</a:t>
-            </a:r>
-            <a:r>
-              <a:rPr lang="en-IN" sz="3450" b="0" u="none" spc="34" strike="noStrike">
-                <a:solidFill>
-                  <a:srgbClr val="F5EFEF"/>
-                </a:solidFill>
-                <a:effectLst/>
-                <a:uFillTx/>
-                <a:latin typeface="Cambria"/>
-              </a:rPr>
-              <a:t> </a:t>
-            </a:r>
-            <a:r>
-              <a:rPr lang="en-IN" sz="3450" b="0" u="none" spc="235" strike="noStrike">
-                <a:solidFill>
-                  <a:srgbClr val="F5EFEF"/>
-                </a:solidFill>
-                <a:effectLst/>
-                <a:uFillTx/>
-                <a:latin typeface="Cambria"/>
-              </a:rPr>
-              <a:t>&amp;</a:t>
-            </a:r>
-            <a:r>
-              <a:rPr lang="en-IN" sz="3450" b="0" u="none" spc="71" strike="noStrike">
-                <a:solidFill>
-                  <a:srgbClr val="F5EFEF"/>
-                </a:solidFill>
-                <a:effectLst/>
-                <a:uFillTx/>
-                <a:latin typeface="Cambria"/>
-              </a:rPr>
-              <a:t> </a:t>
-            </a:r>
-            <a:r>
-              <a:rPr lang="en-IN" sz="3450" b="0" u="none" spc="230" strike="noStrike">
-                <a:solidFill>
-                  <a:srgbClr val="F5EFEF"/>
-                </a:solidFill>
-                <a:effectLst/>
-                <a:uFillTx/>
-                <a:latin typeface="Cambria"/>
-              </a:rPr>
-              <a:t>Gratitude</a:t>
-            </a:r>
-            <a:endParaRPr lang="en-IN" sz="3450" b="0" u="none" strike="noStrike">
-              <a:solidFill>
-                <a:srgbClr val="000000"/>
-              </a:solidFill>
-              <a:effectLst/>
-              <a:uFillTx/>
-              <a:latin typeface="Calibri"/>
-            </a:endParaRPr>
-          </a:p>
-        </p:txBody>
-      </p:sp>
-      <p:grpSp>
-        <p:nvGrpSpPr>
-          <p:cNvPr id="164" name="object 4"/>
-          <p:cNvGrpSpPr/>
-          <p:nvPr/>
-        </p:nvGrpSpPr>
-        <p:grpSpPr>
-          <a:xfrm>
-            <a:off x="708480" y="1302840"/>
-            <a:ext cx="7729560" cy="1740240"/>
-            <a:chOff x="708480" y="1302840"/>
-            <a:chExt cx="7729560" cy="1740240"/>
-          </a:xfrm>
-        </p:grpSpPr>
-        <p:sp>
-          <p:nvSpPr>
-            <p:cNvPr id="165" name="object 5"/>
-            <p:cNvSpPr/>
-            <p:nvPr/>
-          </p:nvSpPr>
-          <p:spPr>
-            <a:xfrm>
-              <a:off x="708480" y="1302840"/>
-              <a:ext cx="7729560" cy="1740240"/>
-            </a:xfrm>
-            <a:custGeom>
-              <a:avLst/>
-              <a:gdLst>
-                <a:gd name="textAreaLeft" fmla="*/ 0 w 7729560"/>
-                <a:gd name="textAreaRight" fmla="*/ 7729920 w 7729560"/>
-                <a:gd name="textAreaTop" fmla="*/ 0 h 1740240"/>
-                <a:gd name="textAreaBottom" fmla="*/ 1740600 h 1740240"/>
-              </a:gdLst>
-              <a:ahLst/>
-              <a:cxnLst/>
-              <a:rect l="textAreaLeft" t="textAreaTop" r="textAreaRight" b="textAreaBottom"/>
-              <a:pathLst>
-                <a:path w="7729855" h="1740535">
-                  <a:moveTo>
-                    <a:pt x="7655433" y="0"/>
-                  </a:moveTo>
-                  <a:lnTo>
-                    <a:pt x="74244" y="0"/>
-                  </a:lnTo>
-                  <a:lnTo>
-                    <a:pt x="45343" y="5840"/>
-                  </a:lnTo>
-                  <a:lnTo>
-                    <a:pt x="21743" y="21764"/>
-                  </a:lnTo>
-                  <a:lnTo>
-                    <a:pt x="5833" y="45380"/>
-                  </a:lnTo>
-                  <a:lnTo>
-                    <a:pt x="0" y="74295"/>
-                  </a:lnTo>
-                  <a:lnTo>
-                    <a:pt x="0" y="1666113"/>
-                  </a:lnTo>
-                  <a:lnTo>
-                    <a:pt x="5833" y="1695027"/>
-                  </a:lnTo>
-                  <a:lnTo>
-                    <a:pt x="21743" y="1718643"/>
-                  </a:lnTo>
-                  <a:lnTo>
-                    <a:pt x="45343" y="1734567"/>
-                  </a:lnTo>
-                  <a:lnTo>
-                    <a:pt x="74244" y="1740407"/>
-                  </a:lnTo>
-                  <a:lnTo>
-                    <a:pt x="7655433" y="1740407"/>
-                  </a:lnTo>
-                  <a:lnTo>
-                    <a:pt x="7684347" y="1734567"/>
-                  </a:lnTo>
-                  <a:lnTo>
-                    <a:pt x="7707963" y="1718643"/>
-                  </a:lnTo>
-                  <a:lnTo>
-                    <a:pt x="7723887" y="1695027"/>
-                  </a:lnTo>
-                  <a:lnTo>
-                    <a:pt x="7729728" y="1666113"/>
-                  </a:lnTo>
-                  <a:lnTo>
-                    <a:pt x="7729728" y="74295"/>
-                  </a:lnTo>
-                  <a:lnTo>
-                    <a:pt x="7723887" y="45380"/>
-                  </a:lnTo>
-                  <a:lnTo>
-                    <a:pt x="7707963" y="21764"/>
-                  </a:lnTo>
-                  <a:lnTo>
-                    <a:pt x="7684347" y="5840"/>
-                  </a:lnTo>
-                  <a:lnTo>
-                    <a:pt x="7655433" y="0"/>
-                  </a:lnTo>
-                  <a:close/>
-                </a:path>
-              </a:pathLst>
-            </a:custGeom>
-            <a:solidFill>
-              <a:srgbClr val="003080"/>
-            </a:solidFill>
-            <a:ln w="0">
-              <a:noFill/>
-            </a:ln>
-          </p:spPr>
-          <p:style>
-            <a:lnRef idx="0"/>
-            <a:fillRef idx="0"/>
-            <a:effectRef idx="0"/>
-            <a:fontRef idx="minor"/>
-          </p:style>
-          <p:txBody>
-            <a:bodyPr lIns="0" tIns="0" rIns="0" bIns="0" anchor="t">
-              <a:noAutofit/>
-            </a:bodyPr>
-            <a:p>
-              <a:endParaRPr lang="en-IN" sz="1800" b="0" u="none" strike="noStrike">
-                <a:solidFill>
-                  <a:srgbClr val="FFFFFF"/>
-                </a:solidFill>
-                <a:effectLst/>
-                <a:uFillTx/>
-                <a:latin typeface="Arial"/>
-              </a:endParaRPr>
-            </a:p>
-          </p:txBody>
-        </p:sp>
-        <p:sp>
-          <p:nvSpPr>
-            <p:cNvPr id="166" name="object 6"/>
-            <p:cNvSpPr/>
-            <p:nvPr/>
-          </p:nvSpPr>
-          <p:spPr>
-            <a:xfrm>
-              <a:off x="708480" y="1302840"/>
-              <a:ext cx="7729560" cy="1740240"/>
-            </a:xfrm>
-            <a:custGeom>
-              <a:avLst/>
-              <a:gdLst>
-                <a:gd name="textAreaLeft" fmla="*/ 0 w 7729560"/>
-                <a:gd name="textAreaRight" fmla="*/ 7729920 w 7729560"/>
-                <a:gd name="textAreaTop" fmla="*/ 0 h 1740240"/>
-                <a:gd name="textAreaBottom" fmla="*/ 1740600 h 1740240"/>
-              </a:gdLst>
-              <a:ahLst/>
-              <a:cxnLst/>
-              <a:rect l="textAreaLeft" t="textAreaTop" r="textAreaRight" b="textAreaBottom"/>
-              <a:pathLst>
-                <a:path w="7729855" h="1740535">
-                  <a:moveTo>
-                    <a:pt x="0" y="74295"/>
-                  </a:moveTo>
-                  <a:lnTo>
-                    <a:pt x="5833" y="45380"/>
-                  </a:lnTo>
-                  <a:lnTo>
-                    <a:pt x="21743" y="21764"/>
-                  </a:lnTo>
-                  <a:lnTo>
-                    <a:pt x="45343" y="5840"/>
-                  </a:lnTo>
-                  <a:lnTo>
-                    <a:pt x="74244" y="0"/>
-                  </a:lnTo>
-                  <a:lnTo>
-                    <a:pt x="7655433" y="0"/>
-                  </a:lnTo>
-                  <a:lnTo>
-                    <a:pt x="7684347" y="5840"/>
-                  </a:lnTo>
-                  <a:lnTo>
-                    <a:pt x="7707963" y="21764"/>
-                  </a:lnTo>
-                  <a:lnTo>
-                    <a:pt x="7723887" y="45380"/>
-                  </a:lnTo>
-                  <a:lnTo>
-                    <a:pt x="7729728" y="74295"/>
-                  </a:lnTo>
-                  <a:lnTo>
-                    <a:pt x="7729728" y="1666113"/>
-                  </a:lnTo>
-                  <a:lnTo>
-                    <a:pt x="7723887" y="1695027"/>
-                  </a:lnTo>
-                  <a:lnTo>
-                    <a:pt x="7707963" y="1718643"/>
-                  </a:lnTo>
-                  <a:lnTo>
-                    <a:pt x="7684347" y="1734567"/>
-                  </a:lnTo>
-                  <a:lnTo>
-                    <a:pt x="7655433" y="1740407"/>
-                  </a:lnTo>
-                  <a:lnTo>
-                    <a:pt x="74244" y="1740407"/>
-                  </a:lnTo>
-                  <a:lnTo>
-                    <a:pt x="45343" y="1734567"/>
-                  </a:lnTo>
-                  <a:lnTo>
-                    <a:pt x="21743" y="1718643"/>
-                  </a:lnTo>
-                  <a:lnTo>
-                    <a:pt x="5833" y="1695027"/>
-                  </a:lnTo>
-                  <a:lnTo>
-                    <a:pt x="0" y="1666113"/>
-                  </a:lnTo>
-                  <a:lnTo>
-                    <a:pt x="0" y="74295"/>
-                  </a:lnTo>
-                  <a:close/>
-                </a:path>
-              </a:pathLst>
-            </a:custGeom>
-            <a:noFill/>
-            <a:ln w="9144">
-              <a:solidFill>
-                <a:srgbClr val="184999"/>
-              </a:solidFill>
-              <a:round/>
-            </a:ln>
-          </p:spPr>
-          <p:style>
-            <a:lnRef idx="0"/>
-            <a:fillRef idx="0"/>
-            <a:effectRef idx="0"/>
-            <a:fontRef idx="minor"/>
-          </p:style>
-          <p:txBody>
-            <a:bodyPr lIns="0" tIns="0" rIns="0" bIns="0" anchor="t">
-              <a:noAutofit/>
-            </a:bodyPr>
-            <a:p>
-              <a:endParaRPr lang="en-IN" sz="1800" b="0" u="none" strike="noStrike">
-                <a:solidFill>
-                  <a:srgbClr val="000000"/>
-                </a:solidFill>
-                <a:effectLst/>
-                <a:uFillTx/>
-                <a:latin typeface="Arial"/>
-              </a:endParaRPr>
-            </a:p>
-          </p:txBody>
-        </p:sp>
-        <p:sp>
-          <p:nvSpPr>
-            <p:cNvPr id="167" name="object 7"/>
-            <p:cNvSpPr/>
-            <p:nvPr/>
-          </p:nvSpPr>
-          <p:spPr>
-            <a:xfrm>
-              <a:off x="889920" y="1487520"/>
-              <a:ext cx="530640" cy="527400"/>
-            </a:xfrm>
-            <a:custGeom>
-              <a:avLst/>
-              <a:gdLst>
-                <a:gd name="textAreaLeft" fmla="*/ 0 w 530640"/>
-                <a:gd name="textAreaRight" fmla="*/ 531000 w 530640"/>
-                <a:gd name="textAreaTop" fmla="*/ 0 h 527400"/>
-                <a:gd name="textAreaBottom" fmla="*/ 527760 h 527400"/>
-              </a:gdLst>
-              <a:ahLst/>
-              <a:cxnLst/>
-              <a:rect l="textAreaLeft" t="textAreaTop" r="textAreaRight" b="textAreaBottom"/>
-              <a:pathLst>
-                <a:path w="530860" h="527685">
-                  <a:moveTo>
-                    <a:pt x="266700" y="0"/>
-                  </a:moveTo>
-                  <a:lnTo>
-                    <a:pt x="263652" y="0"/>
-                  </a:lnTo>
-                  <a:lnTo>
-                    <a:pt x="216261" y="4245"/>
-                  </a:lnTo>
-                  <a:lnTo>
-                    <a:pt x="171657" y="16488"/>
-                  </a:lnTo>
-                  <a:lnTo>
-                    <a:pt x="130584" y="35983"/>
-                  </a:lnTo>
-                  <a:lnTo>
-                    <a:pt x="93786" y="61988"/>
-                  </a:lnTo>
-                  <a:lnTo>
-                    <a:pt x="62009" y="93760"/>
-                  </a:lnTo>
-                  <a:lnTo>
-                    <a:pt x="35997" y="130555"/>
-                  </a:lnTo>
-                  <a:lnTo>
-                    <a:pt x="16495" y="171631"/>
-                  </a:lnTo>
-                  <a:lnTo>
-                    <a:pt x="4247" y="216244"/>
-                  </a:lnTo>
-                  <a:lnTo>
-                    <a:pt x="0" y="263651"/>
-                  </a:lnTo>
-                  <a:lnTo>
-                    <a:pt x="4247" y="311059"/>
-                  </a:lnTo>
-                  <a:lnTo>
-                    <a:pt x="16495" y="355672"/>
-                  </a:lnTo>
-                  <a:lnTo>
-                    <a:pt x="35997" y="396748"/>
-                  </a:lnTo>
-                  <a:lnTo>
-                    <a:pt x="62009" y="433543"/>
-                  </a:lnTo>
-                  <a:lnTo>
-                    <a:pt x="93786" y="465315"/>
-                  </a:lnTo>
-                  <a:lnTo>
-                    <a:pt x="130584" y="491320"/>
-                  </a:lnTo>
-                  <a:lnTo>
-                    <a:pt x="171657" y="510815"/>
-                  </a:lnTo>
-                  <a:lnTo>
-                    <a:pt x="216261" y="523058"/>
-                  </a:lnTo>
-                  <a:lnTo>
-                    <a:pt x="263652" y="527303"/>
-                  </a:lnTo>
-                  <a:lnTo>
-                    <a:pt x="266700" y="527303"/>
-                  </a:lnTo>
-                  <a:lnTo>
-                    <a:pt x="314107" y="523058"/>
-                  </a:lnTo>
-                  <a:lnTo>
-                    <a:pt x="358720" y="510815"/>
-                  </a:lnTo>
-                  <a:lnTo>
-                    <a:pt x="399795" y="491320"/>
-                  </a:lnTo>
-                  <a:lnTo>
-                    <a:pt x="436591" y="465315"/>
-                  </a:lnTo>
-                  <a:lnTo>
-                    <a:pt x="468363" y="433543"/>
-                  </a:lnTo>
-                  <a:lnTo>
-                    <a:pt x="494368" y="396748"/>
-                  </a:lnTo>
-                  <a:lnTo>
-                    <a:pt x="513863" y="355672"/>
-                  </a:lnTo>
-                  <a:lnTo>
-                    <a:pt x="526106" y="311059"/>
-                  </a:lnTo>
-                  <a:lnTo>
-                    <a:pt x="530352" y="263651"/>
-                  </a:lnTo>
-                  <a:lnTo>
-                    <a:pt x="526106" y="216244"/>
-                  </a:lnTo>
-                  <a:lnTo>
-                    <a:pt x="513863" y="171631"/>
-                  </a:lnTo>
-                  <a:lnTo>
-                    <a:pt x="494368" y="130555"/>
-                  </a:lnTo>
-                  <a:lnTo>
-                    <a:pt x="468363" y="93760"/>
-                  </a:lnTo>
-                  <a:lnTo>
-                    <a:pt x="436591" y="61988"/>
-                  </a:lnTo>
-                  <a:lnTo>
-                    <a:pt x="399796" y="35983"/>
-                  </a:lnTo>
-                  <a:lnTo>
-                    <a:pt x="358720" y="16488"/>
-                  </a:lnTo>
-                  <a:lnTo>
-                    <a:pt x="314107" y="4245"/>
-                  </a:lnTo>
-                  <a:lnTo>
-                    <a:pt x="266700" y="0"/>
-                  </a:lnTo>
-                  <a:close/>
-                </a:path>
-              </a:pathLst>
-            </a:custGeom>
-            <a:solidFill>
-              <a:srgbClr val="5F9DFF"/>
-            </a:solidFill>
-            <a:ln w="0">
-              <a:noFill/>
-            </a:ln>
-          </p:spPr>
-          <p:style>
-            <a:lnRef idx="0"/>
-            <a:fillRef idx="0"/>
-            <a:effectRef idx="0"/>
-            <a:fontRef idx="minor"/>
-          </p:style>
-          <p:txBody>
-            <a:bodyPr lIns="0" tIns="0" rIns="0" bIns="0" anchor="t">
-              <a:noAutofit/>
-            </a:bodyPr>
-            <a:p>
-              <a:endParaRPr lang="en-IN" sz="1800" b="0" u="none" strike="noStrike">
-                <a:solidFill>
-                  <a:srgbClr val="FFFFFF"/>
-                </a:solidFill>
-                <a:effectLst/>
-                <a:uFillTx/>
-                <a:latin typeface="Arial"/>
-              </a:endParaRPr>
-            </a:p>
-          </p:txBody>
-        </p:sp>
-        <p:pic>
-          <p:nvPicPr>
-            <p:cNvPr id="168" name="object 8"/>
-            <p:cNvPicPr/>
-            <p:nvPr/>
-          </p:nvPicPr>
-          <p:blipFill>
-            <a:blip r:embed="rId2"/>
-            <a:stretch/>
-          </p:blipFill>
-          <p:spPr>
-            <a:xfrm>
-              <a:off x="1036440" y="1630800"/>
-              <a:ext cx="237240" cy="240480"/>
-            </a:xfrm>
-            <a:prstGeom prst="rect">
-              <a:avLst/>
-            </a:prstGeom>
-            <a:noFill/>
-            <a:ln w="0">
-              <a:noFill/>
-            </a:ln>
-          </p:spPr>
-        </p:pic>
-      </p:grpSp>
-      <p:sp>
-        <p:nvSpPr>
-          <p:cNvPr id="169" name="object 9"/>
-          <p:cNvSpPr/>
-          <p:nvPr/>
-        </p:nvSpPr>
-        <p:spPr>
-          <a:xfrm>
-            <a:off x="878040" y="2174760"/>
-            <a:ext cx="3430440" cy="657360"/>
-          </a:xfrm>
-          <a:prstGeom prst="rect">
-            <a:avLst/>
-          </a:prstGeom>
-          <a:noFill/>
-          <a:ln w="0">
-            <a:noFill/>
-          </a:ln>
-        </p:spPr>
-        <p:style>
-          <a:lnRef idx="0"/>
-          <a:fillRef idx="0"/>
-          <a:effectRef idx="0"/>
-          <a:fontRef idx="minor"/>
-        </p:style>
-        <p:txBody>
-          <a:bodyPr lIns="0" tIns="13320" rIns="0" bIns="0" anchor="t">
-            <a:spAutoFit/>
-          </a:bodyPr>
-          <a:p>
-            <a:pPr marL="12600">
-              <a:lnSpc>
-                <a:spcPct val="100000"/>
-              </a:lnSpc>
-              <a:spcBef>
-                <a:spcPts val="105"/>
-              </a:spcBef>
-            </a:pPr>
-            <a:r>
-              <a:rPr lang="en-IN" sz="1700" b="0" u="none" spc="201" strike="noStrike">
-                <a:solidFill>
-                  <a:srgbClr val="E1E6E9"/>
-                </a:solidFill>
-                <a:effectLst/>
-                <a:uFillTx/>
-                <a:latin typeface="Cambria"/>
-              </a:rPr>
-              <a:t>Full-</a:t>
-            </a:r>
-            <a:r>
-              <a:rPr lang="en-IN" sz="1700" b="0" u="none" spc="130" strike="noStrike">
-                <a:solidFill>
-                  <a:srgbClr val="E1E6E9"/>
-                </a:solidFill>
-                <a:effectLst/>
-                <a:uFillTx/>
-                <a:latin typeface="Cambria"/>
-              </a:rPr>
-              <a:t>Stack</a:t>
-            </a:r>
-            <a:r>
-              <a:rPr lang="en-IN" sz="1700" b="0" u="none" spc="-26" strike="noStrike">
-                <a:solidFill>
-                  <a:srgbClr val="E1E6E9"/>
-                </a:solidFill>
-                <a:effectLst/>
-                <a:uFillTx/>
-                <a:latin typeface="Cambria"/>
-              </a:rPr>
-              <a:t> </a:t>
-            </a:r>
-            <a:r>
-              <a:rPr lang="en-IN" sz="1700" b="0" u="none" spc="125" strike="noStrike">
-                <a:solidFill>
-                  <a:srgbClr val="E1E6E9"/>
-                </a:solidFill>
-                <a:effectLst/>
-                <a:uFillTx/>
-                <a:latin typeface="Cambria"/>
-              </a:rPr>
-              <a:t>Mastery</a:t>
-            </a:r>
-            <a:endParaRPr lang="en-IN" sz="1700" b="0" u="none" strike="noStrike">
-              <a:solidFill>
-                <a:srgbClr val="000000"/>
-              </a:solidFill>
-              <a:effectLst/>
-              <a:uFillTx/>
-              <a:latin typeface="Arial"/>
-            </a:endParaRPr>
-          </a:p>
-          <a:p>
-            <a:pPr marL="12600">
-              <a:lnSpc>
-                <a:spcPct val="100000"/>
-              </a:lnSpc>
-              <a:spcBef>
-                <a:spcPts val="1310"/>
-              </a:spcBef>
-            </a:pPr>
-            <a:r>
-              <a:rPr lang="en-IN" sz="1350" b="0" u="none" spc="85" strike="noStrike">
-                <a:solidFill>
-                  <a:srgbClr val="E1E6E9"/>
-                </a:solidFill>
-                <a:effectLst/>
-                <a:uFillTx/>
-                <a:latin typeface="Cambria"/>
-              </a:rPr>
-              <a:t>Proficient</a:t>
-            </a:r>
-            <a:r>
-              <a:rPr lang="en-IN" sz="1350" b="0" u="none" spc="71" strike="noStrike">
-                <a:solidFill>
-                  <a:srgbClr val="E1E6E9"/>
-                </a:solidFill>
-                <a:effectLst/>
-                <a:uFillTx/>
-                <a:latin typeface="Cambria"/>
-              </a:rPr>
-              <a:t> </a:t>
-            </a:r>
-            <a:r>
-              <a:rPr lang="en-IN" sz="1350" b="0" u="none" spc="105" strike="noStrike">
-                <a:solidFill>
-                  <a:srgbClr val="E1E6E9"/>
-                </a:solidFill>
-                <a:effectLst/>
-                <a:uFillTx/>
-                <a:latin typeface="Cambria"/>
-              </a:rPr>
-              <a:t>in</a:t>
-            </a:r>
-            <a:r>
-              <a:rPr lang="en-IN" sz="1350" b="0" u="none" spc="14" strike="noStrike">
-                <a:solidFill>
-                  <a:srgbClr val="E1E6E9"/>
-                </a:solidFill>
-                <a:effectLst/>
-                <a:uFillTx/>
-                <a:latin typeface="Cambria"/>
-              </a:rPr>
-              <a:t> </a:t>
-            </a:r>
-            <a:r>
-              <a:rPr lang="en-IN" sz="1350" b="0" u="none" spc="96" strike="noStrike">
-                <a:solidFill>
-                  <a:srgbClr val="E1E6E9"/>
-                </a:solidFill>
-                <a:effectLst/>
-                <a:uFillTx/>
-                <a:latin typeface="Cambria"/>
-              </a:rPr>
-              <a:t>React,</a:t>
-            </a:r>
-            <a:r>
-              <a:rPr lang="en-IN" sz="1350" b="0" u="none" spc="79" strike="noStrike">
-                <a:solidFill>
-                  <a:srgbClr val="E1E6E9"/>
-                </a:solidFill>
-                <a:effectLst/>
-                <a:uFillTx/>
-                <a:latin typeface="Cambria"/>
-              </a:rPr>
-              <a:t> </a:t>
-            </a:r>
-            <a:r>
-              <a:rPr lang="en-IN" sz="1350" b="0" u="none" spc="99" strike="noStrike">
-                <a:solidFill>
-                  <a:srgbClr val="E1E6E9"/>
-                </a:solidFill>
-                <a:effectLst/>
-                <a:uFillTx/>
-                <a:latin typeface="Cambria"/>
-              </a:rPr>
-              <a:t>Spring</a:t>
-            </a:r>
-            <a:r>
-              <a:rPr lang="en-IN" sz="1350" b="0" u="none" spc="71" strike="noStrike">
-                <a:solidFill>
-                  <a:srgbClr val="E1E6E9"/>
-                </a:solidFill>
-                <a:effectLst/>
-                <a:uFillTx/>
-                <a:latin typeface="Cambria"/>
-              </a:rPr>
-              <a:t> </a:t>
-            </a:r>
-            <a:r>
-              <a:rPr lang="en-IN" sz="1350" b="0" u="none" spc="99" strike="noStrike">
-                <a:solidFill>
-                  <a:srgbClr val="E1E6E9"/>
-                </a:solidFill>
-                <a:effectLst/>
-                <a:uFillTx/>
-                <a:latin typeface="Cambria"/>
-              </a:rPr>
-              <a:t>Boot,</a:t>
-            </a:r>
-            <a:r>
-              <a:rPr lang="en-IN" sz="1350" b="0" u="none" spc="54" strike="noStrike">
-                <a:solidFill>
-                  <a:srgbClr val="E1E6E9"/>
-                </a:solidFill>
-                <a:effectLst/>
-                <a:uFillTx/>
-                <a:latin typeface="Cambria"/>
-              </a:rPr>
-              <a:t> </a:t>
-            </a:r>
-            <a:r>
-              <a:rPr lang="en-IN" sz="1350" b="0" u="none" spc="105" strike="noStrike">
-                <a:solidFill>
-                  <a:srgbClr val="E1E6E9"/>
-                </a:solidFill>
-                <a:effectLst/>
-                <a:uFillTx/>
-                <a:latin typeface="Cambria"/>
-              </a:rPr>
-              <a:t>MySQL.</a:t>
-            </a:r>
-            <a:endParaRPr lang="en-IN" sz="1350" b="0" u="none" strike="noStrike">
-              <a:solidFill>
-                <a:srgbClr val="000000"/>
-              </a:solidFill>
-              <a:effectLst/>
-              <a:uFillTx/>
-              <a:latin typeface="Arial"/>
-            </a:endParaRPr>
-          </a:p>
-        </p:txBody>
-      </p:sp>
-      <p:grpSp>
-        <p:nvGrpSpPr>
-          <p:cNvPr id="170" name="object 10"/>
-          <p:cNvGrpSpPr/>
-          <p:nvPr/>
-        </p:nvGrpSpPr>
-        <p:grpSpPr>
-          <a:xfrm>
-            <a:off x="708480" y="3220200"/>
-            <a:ext cx="7729560" cy="1737000"/>
-            <a:chOff x="708480" y="3220200"/>
-            <a:chExt cx="7729560" cy="1737000"/>
-          </a:xfrm>
-        </p:grpSpPr>
-        <p:sp>
-          <p:nvSpPr>
-            <p:cNvPr id="171" name="object 11"/>
-            <p:cNvSpPr/>
-            <p:nvPr/>
-          </p:nvSpPr>
-          <p:spPr>
-            <a:xfrm>
-              <a:off x="708480" y="3220200"/>
-              <a:ext cx="7729560" cy="1737000"/>
-            </a:xfrm>
-            <a:custGeom>
-              <a:avLst/>
-              <a:gdLst>
-                <a:gd name="textAreaLeft" fmla="*/ 0 w 7729560"/>
-                <a:gd name="textAreaRight" fmla="*/ 7729920 w 7729560"/>
-                <a:gd name="textAreaTop" fmla="*/ 0 h 1737000"/>
-                <a:gd name="textAreaBottom" fmla="*/ 1737360 h 1737000"/>
-              </a:gdLst>
-              <a:ahLst/>
-              <a:cxnLst/>
-              <a:rect l="textAreaLeft" t="textAreaTop" r="textAreaRight" b="textAreaBottom"/>
-              <a:pathLst>
-                <a:path w="7729855" h="1737360">
-                  <a:moveTo>
-                    <a:pt x="7655560" y="0"/>
-                  </a:moveTo>
-                  <a:lnTo>
-                    <a:pt x="74117" y="0"/>
-                  </a:lnTo>
-                  <a:lnTo>
-                    <a:pt x="45268" y="5820"/>
-                  </a:lnTo>
-                  <a:lnTo>
-                    <a:pt x="21709" y="21701"/>
-                  </a:lnTo>
-                  <a:lnTo>
-                    <a:pt x="5824" y="45273"/>
-                  </a:lnTo>
-                  <a:lnTo>
-                    <a:pt x="0" y="74167"/>
-                  </a:lnTo>
-                  <a:lnTo>
-                    <a:pt x="0" y="1663191"/>
-                  </a:lnTo>
-                  <a:lnTo>
-                    <a:pt x="5824" y="1692086"/>
-                  </a:lnTo>
-                  <a:lnTo>
-                    <a:pt x="21709" y="1715658"/>
-                  </a:lnTo>
-                  <a:lnTo>
-                    <a:pt x="45268" y="1731539"/>
-                  </a:lnTo>
-                  <a:lnTo>
-                    <a:pt x="74117" y="1737360"/>
-                  </a:lnTo>
-                  <a:lnTo>
-                    <a:pt x="7655560" y="1737360"/>
-                  </a:lnTo>
-                  <a:lnTo>
-                    <a:pt x="7684454" y="1731539"/>
-                  </a:lnTo>
-                  <a:lnTo>
-                    <a:pt x="7708026" y="1715658"/>
-                  </a:lnTo>
-                  <a:lnTo>
-                    <a:pt x="7723907" y="1692086"/>
-                  </a:lnTo>
-                  <a:lnTo>
-                    <a:pt x="7729728" y="1663191"/>
-                  </a:lnTo>
-                  <a:lnTo>
-                    <a:pt x="7729728" y="74167"/>
-                  </a:lnTo>
-                  <a:lnTo>
-                    <a:pt x="7723907" y="45273"/>
-                  </a:lnTo>
-                  <a:lnTo>
-                    <a:pt x="7708026" y="21701"/>
-                  </a:lnTo>
-                  <a:lnTo>
-                    <a:pt x="7684454" y="5820"/>
-                  </a:lnTo>
-                  <a:lnTo>
-                    <a:pt x="7655560" y="0"/>
-                  </a:lnTo>
-                  <a:close/>
-                </a:path>
-              </a:pathLst>
-            </a:custGeom>
-            <a:solidFill>
-              <a:srgbClr val="003080"/>
-            </a:solidFill>
-            <a:ln w="0">
-              <a:noFill/>
-            </a:ln>
-          </p:spPr>
-          <p:style>
-            <a:lnRef idx="0"/>
-            <a:fillRef idx="0"/>
-            <a:effectRef idx="0"/>
-            <a:fontRef idx="minor"/>
-          </p:style>
-          <p:txBody>
-            <a:bodyPr lIns="0" tIns="0" rIns="0" bIns="0" anchor="t">
-              <a:noAutofit/>
-            </a:bodyPr>
-            <a:p>
-              <a:endParaRPr lang="en-IN" sz="1800" b="0" u="none" strike="noStrike">
-                <a:solidFill>
-                  <a:srgbClr val="FFFFFF"/>
-                </a:solidFill>
-                <a:effectLst/>
-                <a:uFillTx/>
-                <a:latin typeface="Arial"/>
-              </a:endParaRPr>
-            </a:p>
-          </p:txBody>
-        </p:sp>
-        <p:sp>
-          <p:nvSpPr>
-            <p:cNvPr id="172" name="object 12"/>
-            <p:cNvSpPr/>
-            <p:nvPr/>
-          </p:nvSpPr>
-          <p:spPr>
-            <a:xfrm>
-              <a:off x="708480" y="3220200"/>
-              <a:ext cx="7729560" cy="1737000"/>
-            </a:xfrm>
-            <a:custGeom>
-              <a:avLst/>
-              <a:gdLst>
-                <a:gd name="textAreaLeft" fmla="*/ 0 w 7729560"/>
-                <a:gd name="textAreaRight" fmla="*/ 7729920 w 7729560"/>
-                <a:gd name="textAreaTop" fmla="*/ 0 h 1737000"/>
-                <a:gd name="textAreaBottom" fmla="*/ 1737360 h 1737000"/>
-              </a:gdLst>
-              <a:ahLst/>
-              <a:cxnLst/>
-              <a:rect l="textAreaLeft" t="textAreaTop" r="textAreaRight" b="textAreaBottom"/>
-              <a:pathLst>
-                <a:path w="7729855" h="1737360">
-                  <a:moveTo>
-                    <a:pt x="0" y="74167"/>
-                  </a:moveTo>
-                  <a:lnTo>
-                    <a:pt x="5824" y="45273"/>
-                  </a:lnTo>
-                  <a:lnTo>
-                    <a:pt x="21709" y="21701"/>
-                  </a:lnTo>
-                  <a:lnTo>
-                    <a:pt x="45268" y="5820"/>
-                  </a:lnTo>
-                  <a:lnTo>
-                    <a:pt x="74117" y="0"/>
-                  </a:lnTo>
-                  <a:lnTo>
-                    <a:pt x="7655560" y="0"/>
-                  </a:lnTo>
-                  <a:lnTo>
-                    <a:pt x="7684454" y="5820"/>
-                  </a:lnTo>
-                  <a:lnTo>
-                    <a:pt x="7708026" y="21701"/>
-                  </a:lnTo>
-                  <a:lnTo>
-                    <a:pt x="7723907" y="45273"/>
-                  </a:lnTo>
-                  <a:lnTo>
-                    <a:pt x="7729728" y="74167"/>
-                  </a:lnTo>
-                  <a:lnTo>
-                    <a:pt x="7729728" y="1663191"/>
-                  </a:lnTo>
-                  <a:lnTo>
-                    <a:pt x="7723907" y="1692086"/>
-                  </a:lnTo>
-                  <a:lnTo>
-                    <a:pt x="7708026" y="1715658"/>
-                  </a:lnTo>
-                  <a:lnTo>
-                    <a:pt x="7684454" y="1731539"/>
-                  </a:lnTo>
-                  <a:lnTo>
-                    <a:pt x="7655560" y="1737360"/>
-                  </a:lnTo>
-                  <a:lnTo>
-                    <a:pt x="74117" y="1737360"/>
-                  </a:lnTo>
-                  <a:lnTo>
-                    <a:pt x="45268" y="1731539"/>
-                  </a:lnTo>
-                  <a:lnTo>
-                    <a:pt x="21709" y="1715658"/>
-                  </a:lnTo>
-                  <a:lnTo>
-                    <a:pt x="5824" y="1692086"/>
-                  </a:lnTo>
-                  <a:lnTo>
-                    <a:pt x="0" y="1663191"/>
-                  </a:lnTo>
-                  <a:lnTo>
-                    <a:pt x="0" y="74167"/>
-                  </a:lnTo>
-                  <a:close/>
-                </a:path>
-              </a:pathLst>
-            </a:custGeom>
-            <a:noFill/>
-            <a:ln w="9144">
-              <a:solidFill>
-                <a:srgbClr val="184999"/>
-              </a:solidFill>
-              <a:round/>
-            </a:ln>
-          </p:spPr>
-          <p:style>
-            <a:lnRef idx="0"/>
-            <a:fillRef idx="0"/>
-            <a:effectRef idx="0"/>
-            <a:fontRef idx="minor"/>
-          </p:style>
-          <p:txBody>
-            <a:bodyPr lIns="0" tIns="0" rIns="0" bIns="0" anchor="t">
-              <a:noAutofit/>
-            </a:bodyPr>
-            <a:p>
-              <a:endParaRPr lang="en-IN" sz="1800" b="0" u="none" strike="noStrike">
-                <a:solidFill>
-                  <a:srgbClr val="000000"/>
-                </a:solidFill>
-                <a:effectLst/>
-                <a:uFillTx/>
-                <a:latin typeface="Arial"/>
-              </a:endParaRPr>
-            </a:p>
-          </p:txBody>
-        </p:sp>
-        <p:sp>
-          <p:nvSpPr>
-            <p:cNvPr id="173" name="object 13"/>
-            <p:cNvSpPr/>
-            <p:nvPr/>
-          </p:nvSpPr>
-          <p:spPr>
-            <a:xfrm>
-              <a:off x="889920" y="3401640"/>
-              <a:ext cx="530640" cy="530640"/>
-            </a:xfrm>
-            <a:custGeom>
-              <a:avLst/>
-              <a:gdLst>
-                <a:gd name="textAreaLeft" fmla="*/ 0 w 530640"/>
-                <a:gd name="textAreaRight" fmla="*/ 531000 w 530640"/>
-                <a:gd name="textAreaTop" fmla="*/ 0 h 530640"/>
-                <a:gd name="textAreaBottom" fmla="*/ 531000 h 530640"/>
-              </a:gdLst>
-              <a:ahLst/>
-              <a:cxnLst/>
-              <a:rect l="textAreaLeft" t="textAreaTop" r="textAreaRight" b="textAreaBottom"/>
-              <a:pathLst>
-                <a:path w="530860" h="530860">
-                  <a:moveTo>
-                    <a:pt x="265175" y="0"/>
-                  </a:moveTo>
-                  <a:lnTo>
-                    <a:pt x="217509" y="4273"/>
-                  </a:lnTo>
-                  <a:lnTo>
-                    <a:pt x="172645" y="16592"/>
-                  </a:lnTo>
-                  <a:lnTo>
-                    <a:pt x="131334" y="36209"/>
-                  </a:lnTo>
-                  <a:lnTo>
-                    <a:pt x="94324" y="62373"/>
-                  </a:lnTo>
-                  <a:lnTo>
-                    <a:pt x="62364" y="94335"/>
-                  </a:lnTo>
-                  <a:lnTo>
-                    <a:pt x="36203" y="131346"/>
-                  </a:lnTo>
-                  <a:lnTo>
-                    <a:pt x="16589" y="172656"/>
-                  </a:lnTo>
-                  <a:lnTo>
-                    <a:pt x="4272" y="217515"/>
-                  </a:lnTo>
-                  <a:lnTo>
-                    <a:pt x="0" y="265176"/>
-                  </a:lnTo>
-                  <a:lnTo>
-                    <a:pt x="4272" y="312836"/>
-                  </a:lnTo>
-                  <a:lnTo>
-                    <a:pt x="16589" y="357695"/>
-                  </a:lnTo>
-                  <a:lnTo>
-                    <a:pt x="36203" y="399005"/>
-                  </a:lnTo>
-                  <a:lnTo>
-                    <a:pt x="62364" y="436016"/>
-                  </a:lnTo>
-                  <a:lnTo>
-                    <a:pt x="94324" y="467978"/>
-                  </a:lnTo>
-                  <a:lnTo>
-                    <a:pt x="131334" y="494142"/>
-                  </a:lnTo>
-                  <a:lnTo>
-                    <a:pt x="172645" y="513759"/>
-                  </a:lnTo>
-                  <a:lnTo>
-                    <a:pt x="217509" y="526078"/>
-                  </a:lnTo>
-                  <a:lnTo>
-                    <a:pt x="265175" y="530352"/>
-                  </a:lnTo>
-                  <a:lnTo>
-                    <a:pt x="312836" y="526078"/>
-                  </a:lnTo>
-                  <a:lnTo>
-                    <a:pt x="357695" y="513759"/>
-                  </a:lnTo>
-                  <a:lnTo>
-                    <a:pt x="399005" y="494142"/>
-                  </a:lnTo>
-                  <a:lnTo>
-                    <a:pt x="436016" y="467978"/>
-                  </a:lnTo>
-                  <a:lnTo>
-                    <a:pt x="467978" y="436016"/>
-                  </a:lnTo>
-                  <a:lnTo>
-                    <a:pt x="494142" y="399005"/>
-                  </a:lnTo>
-                  <a:lnTo>
-                    <a:pt x="513759" y="357695"/>
-                  </a:lnTo>
-                  <a:lnTo>
-                    <a:pt x="526078" y="312836"/>
-                  </a:lnTo>
-                  <a:lnTo>
-                    <a:pt x="530352" y="265176"/>
-                  </a:lnTo>
-                  <a:lnTo>
-                    <a:pt x="526078" y="217515"/>
-                  </a:lnTo>
-                  <a:lnTo>
-                    <a:pt x="513759" y="172656"/>
-                  </a:lnTo>
-                  <a:lnTo>
-                    <a:pt x="494142" y="131346"/>
-                  </a:lnTo>
-                  <a:lnTo>
-                    <a:pt x="467978" y="94335"/>
-                  </a:lnTo>
-                  <a:lnTo>
-                    <a:pt x="436016" y="62373"/>
-                  </a:lnTo>
-                  <a:lnTo>
-                    <a:pt x="399005" y="36209"/>
-                  </a:lnTo>
-                  <a:lnTo>
-                    <a:pt x="357695" y="16592"/>
-                  </a:lnTo>
-                  <a:lnTo>
-                    <a:pt x="312836" y="4273"/>
-                  </a:lnTo>
-                  <a:lnTo>
-                    <a:pt x="265175" y="0"/>
-                  </a:lnTo>
-                  <a:close/>
-                </a:path>
-              </a:pathLst>
-            </a:custGeom>
-            <a:solidFill>
-              <a:srgbClr val="5F9DFF"/>
-            </a:solidFill>
-            <a:ln w="0">
-              <a:noFill/>
-            </a:ln>
-          </p:spPr>
-          <p:style>
-            <a:lnRef idx="0"/>
-            <a:fillRef idx="0"/>
-            <a:effectRef idx="0"/>
-            <a:fontRef idx="minor"/>
-          </p:style>
-          <p:txBody>
-            <a:bodyPr lIns="0" tIns="0" rIns="0" bIns="0" anchor="t">
-              <a:noAutofit/>
-            </a:bodyPr>
-            <a:p>
-              <a:endParaRPr lang="en-IN" sz="1800" b="0" u="none" strike="noStrike">
-                <a:solidFill>
-                  <a:srgbClr val="FFFFFF"/>
-                </a:solidFill>
-                <a:effectLst/>
-                <a:uFillTx/>
-                <a:latin typeface="Arial"/>
-              </a:endParaRPr>
-            </a:p>
-          </p:txBody>
-        </p:sp>
-        <p:pic>
-          <p:nvPicPr>
-            <p:cNvPr id="174" name="object 14"/>
-            <p:cNvPicPr/>
-            <p:nvPr/>
-          </p:nvPicPr>
-          <p:blipFill>
-            <a:blip r:embed="rId3"/>
-            <a:stretch/>
-          </p:blipFill>
-          <p:spPr>
-            <a:xfrm>
-              <a:off x="1036440" y="3547800"/>
-              <a:ext cx="237240" cy="237240"/>
-            </a:xfrm>
-            <a:prstGeom prst="rect">
-              <a:avLst/>
-            </a:prstGeom>
-            <a:noFill/>
-            <a:ln w="0">
-              <a:noFill/>
-            </a:ln>
-          </p:spPr>
-        </p:pic>
-      </p:grpSp>
-      <p:sp>
-        <p:nvSpPr>
-          <p:cNvPr id="175" name="object 15"/>
-          <p:cNvSpPr/>
-          <p:nvPr/>
-        </p:nvSpPr>
-        <p:spPr>
-          <a:xfrm>
-            <a:off x="878040" y="4090680"/>
-            <a:ext cx="4082040" cy="657360"/>
-          </a:xfrm>
-          <a:prstGeom prst="rect">
-            <a:avLst/>
-          </a:prstGeom>
-          <a:noFill/>
-          <a:ln w="0">
-            <a:noFill/>
-          </a:ln>
-        </p:spPr>
-        <p:style>
-          <a:lnRef idx="0"/>
-          <a:fillRef idx="0"/>
-          <a:effectRef idx="0"/>
-          <a:fontRef idx="minor"/>
-        </p:style>
-        <p:txBody>
-          <a:bodyPr lIns="0" tIns="13320" rIns="0" bIns="0" anchor="t">
-            <a:spAutoFit/>
-          </a:bodyPr>
-          <a:p>
-            <a:pPr marL="12600">
-              <a:lnSpc>
-                <a:spcPct val="100000"/>
-              </a:lnSpc>
-              <a:spcBef>
-                <a:spcPts val="105"/>
-              </a:spcBef>
-            </a:pPr>
-            <a:r>
-              <a:rPr lang="en-IN" sz="1700" b="0" u="none" spc="113" strike="noStrike">
-                <a:solidFill>
-                  <a:srgbClr val="E1E6E9"/>
-                </a:solidFill>
-                <a:effectLst/>
-                <a:uFillTx/>
-                <a:latin typeface="Cambria"/>
-              </a:rPr>
-              <a:t>Structured</a:t>
-            </a:r>
-            <a:r>
-              <a:rPr lang="en-IN" sz="1700" b="0" u="none" spc="-31" strike="noStrike">
-                <a:solidFill>
-                  <a:srgbClr val="E1E6E9"/>
-                </a:solidFill>
-                <a:effectLst/>
-                <a:uFillTx/>
-                <a:latin typeface="Cambria"/>
-              </a:rPr>
-              <a:t> </a:t>
-            </a:r>
-            <a:r>
-              <a:rPr lang="en-IN" sz="1700" b="0" u="none" spc="139" strike="noStrike">
-                <a:solidFill>
-                  <a:srgbClr val="E1E6E9"/>
-                </a:solidFill>
-                <a:effectLst/>
-                <a:uFillTx/>
-                <a:latin typeface="Cambria"/>
-              </a:rPr>
-              <a:t>Thinking</a:t>
-            </a:r>
-            <a:endParaRPr lang="en-IN" sz="1700" b="0" u="none" strike="noStrike">
-              <a:solidFill>
-                <a:srgbClr val="000000"/>
-              </a:solidFill>
-              <a:effectLst/>
-              <a:uFillTx/>
-              <a:latin typeface="Arial"/>
-            </a:endParaRPr>
-          </a:p>
-          <a:p>
-            <a:pPr marL="12600">
-              <a:lnSpc>
-                <a:spcPct val="100000"/>
-              </a:lnSpc>
-              <a:spcBef>
-                <a:spcPts val="1315"/>
-              </a:spcBef>
-            </a:pPr>
-            <a:r>
-              <a:rPr lang="en-IN" sz="1350" b="0" u="none" spc="99" strike="noStrike">
-                <a:solidFill>
-                  <a:srgbClr val="E1E6E9"/>
-                </a:solidFill>
-                <a:effectLst/>
-                <a:uFillTx/>
-                <a:latin typeface="Cambria"/>
-              </a:rPr>
-              <a:t>Systematic,</a:t>
-            </a:r>
-            <a:r>
-              <a:rPr lang="en-IN" sz="1350" b="0" u="none" spc="105" strike="noStrike">
-                <a:solidFill>
-                  <a:srgbClr val="E1E6E9"/>
-                </a:solidFill>
-                <a:effectLst/>
-                <a:uFillTx/>
-                <a:latin typeface="Cambria"/>
-              </a:rPr>
-              <a:t> </a:t>
-            </a:r>
-            <a:r>
-              <a:rPr lang="en-IN" sz="1350" b="0" u="none" spc="125" strike="noStrike">
-                <a:solidFill>
-                  <a:srgbClr val="E1E6E9"/>
-                </a:solidFill>
-                <a:effectLst/>
-                <a:uFillTx/>
-                <a:latin typeface="Cambria"/>
-              </a:rPr>
-              <a:t>milestone-</a:t>
-            </a:r>
-            <a:r>
-              <a:rPr lang="en-IN" sz="1350" b="0" u="none" spc="79" strike="noStrike">
-                <a:solidFill>
-                  <a:srgbClr val="E1E6E9"/>
-                </a:solidFill>
-                <a:effectLst/>
-                <a:uFillTx/>
-                <a:latin typeface="Cambria"/>
-              </a:rPr>
-              <a:t>driven</a:t>
-            </a:r>
-            <a:r>
-              <a:rPr lang="en-IN" sz="1350" b="0" u="none" spc="119" strike="noStrike">
-                <a:solidFill>
-                  <a:srgbClr val="E1E6E9"/>
-                </a:solidFill>
-                <a:effectLst/>
-                <a:uFillTx/>
-                <a:latin typeface="Cambria"/>
-              </a:rPr>
-              <a:t> </a:t>
-            </a:r>
-            <a:r>
-              <a:rPr lang="en-IN" sz="1350" b="0" u="none" spc="130" strike="noStrike">
-                <a:solidFill>
-                  <a:srgbClr val="E1E6E9"/>
-                </a:solidFill>
-                <a:effectLst/>
-                <a:uFillTx/>
-                <a:latin typeface="Cambria"/>
-              </a:rPr>
-              <a:t>problem-</a:t>
-            </a:r>
-            <a:r>
-              <a:rPr lang="en-IN" sz="1350" b="0" u="none" spc="91" strike="noStrike">
-                <a:solidFill>
-                  <a:srgbClr val="E1E6E9"/>
-                </a:solidFill>
-                <a:effectLst/>
-                <a:uFillTx/>
-                <a:latin typeface="Cambria"/>
-              </a:rPr>
-              <a:t>solving.</a:t>
-            </a:r>
-            <a:endParaRPr lang="en-IN" sz="1350" b="0" u="none" strike="noStrike">
-              <a:solidFill>
-                <a:srgbClr val="000000"/>
-              </a:solidFill>
-              <a:effectLst/>
-              <a:uFillTx/>
-              <a:latin typeface="Arial"/>
-            </a:endParaRPr>
-          </a:p>
-        </p:txBody>
-      </p:sp>
-      <p:grpSp>
-        <p:nvGrpSpPr>
-          <p:cNvPr id="176" name="object 16"/>
-          <p:cNvGrpSpPr/>
-          <p:nvPr/>
-        </p:nvGrpSpPr>
-        <p:grpSpPr>
-          <a:xfrm>
-            <a:off x="708480" y="5134320"/>
-            <a:ext cx="7729560" cy="1737000"/>
-            <a:chOff x="708480" y="5134320"/>
-            <a:chExt cx="7729560" cy="1737000"/>
-          </a:xfrm>
-        </p:grpSpPr>
-        <p:sp>
-          <p:nvSpPr>
-            <p:cNvPr id="177" name="object 17"/>
-            <p:cNvSpPr/>
-            <p:nvPr/>
-          </p:nvSpPr>
-          <p:spPr>
-            <a:xfrm>
-              <a:off x="708480" y="5134320"/>
-              <a:ext cx="7729560" cy="1737000"/>
-            </a:xfrm>
-            <a:custGeom>
-              <a:avLst/>
-              <a:gdLst>
-                <a:gd name="textAreaLeft" fmla="*/ 0 w 7729560"/>
-                <a:gd name="textAreaRight" fmla="*/ 7729920 w 7729560"/>
-                <a:gd name="textAreaTop" fmla="*/ 0 h 1737000"/>
-                <a:gd name="textAreaBottom" fmla="*/ 1737360 h 1737000"/>
-              </a:gdLst>
-              <a:ahLst/>
-              <a:cxnLst/>
-              <a:rect l="textAreaLeft" t="textAreaTop" r="textAreaRight" b="textAreaBottom"/>
-              <a:pathLst>
-                <a:path w="7729855" h="1737359">
-                  <a:moveTo>
-                    <a:pt x="7655560" y="0"/>
-                  </a:moveTo>
-                  <a:lnTo>
-                    <a:pt x="74117" y="0"/>
-                  </a:lnTo>
-                  <a:lnTo>
-                    <a:pt x="45268" y="5820"/>
-                  </a:lnTo>
-                  <a:lnTo>
-                    <a:pt x="21709" y="21701"/>
-                  </a:lnTo>
-                  <a:lnTo>
-                    <a:pt x="5824" y="45273"/>
-                  </a:lnTo>
-                  <a:lnTo>
-                    <a:pt x="0" y="74168"/>
-                  </a:lnTo>
-                  <a:lnTo>
-                    <a:pt x="0" y="1663192"/>
-                  </a:lnTo>
-                  <a:lnTo>
-                    <a:pt x="5824" y="1692086"/>
-                  </a:lnTo>
-                  <a:lnTo>
-                    <a:pt x="21709" y="1715658"/>
-                  </a:lnTo>
-                  <a:lnTo>
-                    <a:pt x="45268" y="1731539"/>
-                  </a:lnTo>
-                  <a:lnTo>
-                    <a:pt x="74117" y="1737360"/>
-                  </a:lnTo>
-                  <a:lnTo>
-                    <a:pt x="7655560" y="1737360"/>
-                  </a:lnTo>
-                  <a:lnTo>
-                    <a:pt x="7684454" y="1731539"/>
-                  </a:lnTo>
-                  <a:lnTo>
-                    <a:pt x="7708026" y="1715658"/>
-                  </a:lnTo>
-                  <a:lnTo>
-                    <a:pt x="7723907" y="1692086"/>
-                  </a:lnTo>
-                  <a:lnTo>
-                    <a:pt x="7729728" y="1663192"/>
-                  </a:lnTo>
-                  <a:lnTo>
-                    <a:pt x="7729728" y="74168"/>
-                  </a:lnTo>
-                  <a:lnTo>
-                    <a:pt x="7723907" y="45273"/>
-                  </a:lnTo>
-                  <a:lnTo>
-                    <a:pt x="7708026" y="21701"/>
-                  </a:lnTo>
-                  <a:lnTo>
-                    <a:pt x="7684454" y="5820"/>
-                  </a:lnTo>
-                  <a:lnTo>
-                    <a:pt x="7655560" y="0"/>
-                  </a:lnTo>
-                  <a:close/>
-                </a:path>
-              </a:pathLst>
-            </a:custGeom>
-            <a:solidFill>
-              <a:srgbClr val="003080"/>
-            </a:solidFill>
-            <a:ln w="0">
-              <a:noFill/>
-            </a:ln>
-          </p:spPr>
-          <p:style>
-            <a:lnRef idx="0"/>
-            <a:fillRef idx="0"/>
-            <a:effectRef idx="0"/>
-            <a:fontRef idx="minor"/>
-          </p:style>
-          <p:txBody>
-            <a:bodyPr lIns="0" tIns="0" rIns="0" bIns="0" anchor="t">
-              <a:noAutofit/>
-            </a:bodyPr>
-            <a:p>
-              <a:endParaRPr lang="en-IN" sz="1800" b="0" u="none" strike="noStrike">
-                <a:solidFill>
-                  <a:srgbClr val="FFFFFF"/>
-                </a:solidFill>
-                <a:effectLst/>
-                <a:uFillTx/>
-                <a:latin typeface="Arial"/>
-              </a:endParaRPr>
-            </a:p>
-          </p:txBody>
-        </p:sp>
-        <p:sp>
-          <p:nvSpPr>
-            <p:cNvPr id="178" name="object 18"/>
-            <p:cNvSpPr/>
-            <p:nvPr/>
-          </p:nvSpPr>
-          <p:spPr>
-            <a:xfrm>
-              <a:off x="708480" y="5134320"/>
-              <a:ext cx="7729560" cy="1737000"/>
-            </a:xfrm>
-            <a:custGeom>
-              <a:avLst/>
-              <a:gdLst>
-                <a:gd name="textAreaLeft" fmla="*/ 0 w 7729560"/>
-                <a:gd name="textAreaRight" fmla="*/ 7729920 w 7729560"/>
-                <a:gd name="textAreaTop" fmla="*/ 0 h 1737000"/>
-                <a:gd name="textAreaBottom" fmla="*/ 1737360 h 1737000"/>
-              </a:gdLst>
-              <a:ahLst/>
-              <a:cxnLst/>
-              <a:rect l="textAreaLeft" t="textAreaTop" r="textAreaRight" b="textAreaBottom"/>
-              <a:pathLst>
-                <a:path w="7729855" h="1737359">
-                  <a:moveTo>
-                    <a:pt x="0" y="74168"/>
-                  </a:moveTo>
-                  <a:lnTo>
-                    <a:pt x="5824" y="45273"/>
-                  </a:lnTo>
-                  <a:lnTo>
-                    <a:pt x="21709" y="21701"/>
-                  </a:lnTo>
-                  <a:lnTo>
-                    <a:pt x="45268" y="5820"/>
-                  </a:lnTo>
-                  <a:lnTo>
-                    <a:pt x="74117" y="0"/>
-                  </a:lnTo>
-                  <a:lnTo>
-                    <a:pt x="7655560" y="0"/>
-                  </a:lnTo>
-                  <a:lnTo>
-                    <a:pt x="7684454" y="5820"/>
-                  </a:lnTo>
-                  <a:lnTo>
-                    <a:pt x="7708026" y="21701"/>
-                  </a:lnTo>
-                  <a:lnTo>
-                    <a:pt x="7723907" y="45273"/>
-                  </a:lnTo>
-                  <a:lnTo>
-                    <a:pt x="7729728" y="74168"/>
-                  </a:lnTo>
-                  <a:lnTo>
-                    <a:pt x="7729728" y="1663192"/>
-                  </a:lnTo>
-                  <a:lnTo>
-                    <a:pt x="7723907" y="1692086"/>
-                  </a:lnTo>
-                  <a:lnTo>
-                    <a:pt x="7708026" y="1715658"/>
-                  </a:lnTo>
-                  <a:lnTo>
-                    <a:pt x="7684454" y="1731539"/>
-                  </a:lnTo>
-                  <a:lnTo>
-                    <a:pt x="7655560" y="1737360"/>
-                  </a:lnTo>
-                  <a:lnTo>
-                    <a:pt x="74117" y="1737360"/>
-                  </a:lnTo>
-                  <a:lnTo>
-                    <a:pt x="45268" y="1731539"/>
-                  </a:lnTo>
-                  <a:lnTo>
-                    <a:pt x="21709" y="1715658"/>
-                  </a:lnTo>
-                  <a:lnTo>
-                    <a:pt x="5824" y="1692086"/>
-                  </a:lnTo>
-                  <a:lnTo>
-                    <a:pt x="0" y="1663192"/>
-                  </a:lnTo>
-                  <a:lnTo>
-                    <a:pt x="0" y="74168"/>
-                  </a:lnTo>
-                  <a:close/>
-                </a:path>
-              </a:pathLst>
-            </a:custGeom>
-            <a:noFill/>
-            <a:ln w="9144">
-              <a:solidFill>
-                <a:srgbClr val="184999"/>
-              </a:solidFill>
-              <a:round/>
-            </a:ln>
-          </p:spPr>
-          <p:style>
-            <a:lnRef idx="0"/>
-            <a:fillRef idx="0"/>
-            <a:effectRef idx="0"/>
-            <a:fontRef idx="minor"/>
-          </p:style>
-          <p:txBody>
-            <a:bodyPr lIns="0" tIns="0" rIns="0" bIns="0" anchor="t">
-              <a:noAutofit/>
-            </a:bodyPr>
-            <a:p>
-              <a:endParaRPr lang="en-IN" sz="1800" b="0" u="none" strike="noStrike">
-                <a:solidFill>
-                  <a:srgbClr val="000000"/>
-                </a:solidFill>
-                <a:effectLst/>
-                <a:uFillTx/>
-                <a:latin typeface="Arial"/>
-              </a:endParaRPr>
-            </a:p>
-          </p:txBody>
-        </p:sp>
-        <p:sp>
-          <p:nvSpPr>
-            <p:cNvPr id="179" name="object 19"/>
-            <p:cNvSpPr/>
-            <p:nvPr/>
-          </p:nvSpPr>
-          <p:spPr>
-            <a:xfrm>
-              <a:off x="889920" y="5315760"/>
-              <a:ext cx="530640" cy="530640"/>
-            </a:xfrm>
-            <a:custGeom>
-              <a:avLst/>
-              <a:gdLst>
-                <a:gd name="textAreaLeft" fmla="*/ 0 w 530640"/>
-                <a:gd name="textAreaRight" fmla="*/ 531000 w 530640"/>
-                <a:gd name="textAreaTop" fmla="*/ 0 h 530640"/>
-                <a:gd name="textAreaBottom" fmla="*/ 531000 h 530640"/>
-              </a:gdLst>
-              <a:ahLst/>
-              <a:cxnLst/>
-              <a:rect l="textAreaLeft" t="textAreaTop" r="textAreaRight" b="textAreaBottom"/>
-              <a:pathLst>
-                <a:path w="530860" h="530860">
-                  <a:moveTo>
-                    <a:pt x="265175" y="0"/>
-                  </a:moveTo>
-                  <a:lnTo>
-                    <a:pt x="217509" y="4273"/>
-                  </a:lnTo>
-                  <a:lnTo>
-                    <a:pt x="172645" y="16592"/>
-                  </a:lnTo>
-                  <a:lnTo>
-                    <a:pt x="131334" y="36209"/>
-                  </a:lnTo>
-                  <a:lnTo>
-                    <a:pt x="94324" y="62373"/>
-                  </a:lnTo>
-                  <a:lnTo>
-                    <a:pt x="62364" y="94335"/>
-                  </a:lnTo>
-                  <a:lnTo>
-                    <a:pt x="36203" y="131346"/>
-                  </a:lnTo>
-                  <a:lnTo>
-                    <a:pt x="16589" y="172656"/>
-                  </a:lnTo>
-                  <a:lnTo>
-                    <a:pt x="4272" y="217515"/>
-                  </a:lnTo>
-                  <a:lnTo>
-                    <a:pt x="0" y="265175"/>
-                  </a:lnTo>
-                  <a:lnTo>
-                    <a:pt x="4272" y="312836"/>
-                  </a:lnTo>
-                  <a:lnTo>
-                    <a:pt x="16589" y="357695"/>
-                  </a:lnTo>
-                  <a:lnTo>
-                    <a:pt x="36203" y="399005"/>
-                  </a:lnTo>
-                  <a:lnTo>
-                    <a:pt x="62364" y="436016"/>
-                  </a:lnTo>
-                  <a:lnTo>
-                    <a:pt x="94324" y="467978"/>
-                  </a:lnTo>
-                  <a:lnTo>
-                    <a:pt x="131334" y="494142"/>
-                  </a:lnTo>
-                  <a:lnTo>
-                    <a:pt x="172645" y="513759"/>
-                  </a:lnTo>
-                  <a:lnTo>
-                    <a:pt x="217509" y="526078"/>
-                  </a:lnTo>
-                  <a:lnTo>
-                    <a:pt x="265175" y="530351"/>
-                  </a:lnTo>
-                  <a:lnTo>
-                    <a:pt x="312836" y="526078"/>
-                  </a:lnTo>
-                  <a:lnTo>
-                    <a:pt x="357695" y="513759"/>
-                  </a:lnTo>
-                  <a:lnTo>
-                    <a:pt x="399005" y="494142"/>
-                  </a:lnTo>
-                  <a:lnTo>
-                    <a:pt x="436016" y="467978"/>
-                  </a:lnTo>
-                  <a:lnTo>
-                    <a:pt x="467978" y="436016"/>
-                  </a:lnTo>
-                  <a:lnTo>
-                    <a:pt x="494142" y="399005"/>
-                  </a:lnTo>
-                  <a:lnTo>
-                    <a:pt x="513759" y="357695"/>
-                  </a:lnTo>
-                  <a:lnTo>
-                    <a:pt x="526078" y="312836"/>
-                  </a:lnTo>
-                  <a:lnTo>
-                    <a:pt x="530352" y="265175"/>
-                  </a:lnTo>
-                  <a:lnTo>
-                    <a:pt x="526078" y="217515"/>
-                  </a:lnTo>
-                  <a:lnTo>
-                    <a:pt x="513759" y="172656"/>
-                  </a:lnTo>
-                  <a:lnTo>
-                    <a:pt x="494142" y="131346"/>
-                  </a:lnTo>
-                  <a:lnTo>
-                    <a:pt x="467978" y="94335"/>
-                  </a:lnTo>
-                  <a:lnTo>
-                    <a:pt x="436016" y="62373"/>
-                  </a:lnTo>
-                  <a:lnTo>
-                    <a:pt x="399005" y="36209"/>
-                  </a:lnTo>
-                  <a:lnTo>
-                    <a:pt x="357695" y="16592"/>
-                  </a:lnTo>
-                  <a:lnTo>
-                    <a:pt x="312836" y="4273"/>
-                  </a:lnTo>
-                  <a:lnTo>
-                    <a:pt x="265175" y="0"/>
-                  </a:lnTo>
-                  <a:close/>
-                </a:path>
-              </a:pathLst>
-            </a:custGeom>
-            <a:solidFill>
-              <a:srgbClr val="5F9DFF"/>
-            </a:solidFill>
-            <a:ln w="0">
-              <a:noFill/>
-            </a:ln>
-          </p:spPr>
-          <p:style>
-            <a:lnRef idx="0"/>
-            <a:fillRef idx="0"/>
-            <a:effectRef idx="0"/>
-            <a:fontRef idx="minor"/>
-          </p:style>
-          <p:txBody>
-            <a:bodyPr lIns="0" tIns="0" rIns="0" bIns="0" anchor="t">
-              <a:noAutofit/>
-            </a:bodyPr>
-            <a:p>
-              <a:endParaRPr lang="en-IN" sz="1800" b="0" u="none" strike="noStrike">
-                <a:solidFill>
-                  <a:srgbClr val="FFFFFF"/>
-                </a:solidFill>
-                <a:effectLst/>
-                <a:uFillTx/>
-                <a:latin typeface="Arial"/>
-              </a:endParaRPr>
-            </a:p>
-          </p:txBody>
-        </p:sp>
-        <p:pic>
-          <p:nvPicPr>
-            <p:cNvPr id="180" name="object 20"/>
-            <p:cNvPicPr/>
-            <p:nvPr/>
-          </p:nvPicPr>
-          <p:blipFill>
-            <a:blip r:embed="rId4"/>
-            <a:stretch/>
-          </p:blipFill>
-          <p:spPr>
-            <a:xfrm>
-              <a:off x="1036440" y="5461920"/>
-              <a:ext cx="237240" cy="237240"/>
-            </a:xfrm>
-            <a:prstGeom prst="rect">
-              <a:avLst/>
-            </a:prstGeom>
-            <a:noFill/>
-            <a:ln w="0">
-              <a:noFill/>
-            </a:ln>
-          </p:spPr>
-        </p:pic>
-      </p:grpSp>
-      <p:sp>
-        <p:nvSpPr>
-          <p:cNvPr id="181" name="object 21"/>
-          <p:cNvSpPr/>
-          <p:nvPr/>
-        </p:nvSpPr>
-        <p:spPr>
-          <a:xfrm>
-            <a:off x="878040" y="6006960"/>
-            <a:ext cx="3629880" cy="657360"/>
-          </a:xfrm>
-          <a:prstGeom prst="rect">
-            <a:avLst/>
-          </a:prstGeom>
-          <a:noFill/>
-          <a:ln w="0">
-            <a:noFill/>
-          </a:ln>
-        </p:spPr>
-        <p:style>
-          <a:lnRef idx="0"/>
-          <a:fillRef idx="0"/>
-          <a:effectRef idx="0"/>
-          <a:fontRef idx="minor"/>
-        </p:style>
-        <p:txBody>
-          <a:bodyPr lIns="0" tIns="12600" rIns="0" bIns="0" anchor="t">
-            <a:spAutoFit/>
-          </a:bodyPr>
-          <a:p>
-            <a:pPr marL="12600">
-              <a:lnSpc>
-                <a:spcPct val="100000"/>
-              </a:lnSpc>
-              <a:spcBef>
-                <a:spcPts val="99"/>
-              </a:spcBef>
-            </a:pPr>
-            <a:r>
-              <a:rPr lang="en-IN" sz="1700" b="0" u="none" spc="111" strike="noStrike">
-                <a:solidFill>
-                  <a:srgbClr val="E1E6E9"/>
-                </a:solidFill>
-                <a:effectLst/>
-                <a:uFillTx/>
-                <a:latin typeface="Cambria"/>
-              </a:rPr>
-              <a:t>Practical</a:t>
-            </a:r>
-            <a:r>
-              <a:rPr lang="en-IN" sz="1700" b="0" u="none" spc="-11" strike="noStrike">
-                <a:solidFill>
-                  <a:srgbClr val="E1E6E9"/>
-                </a:solidFill>
-                <a:effectLst/>
-                <a:uFillTx/>
-                <a:latin typeface="Cambria"/>
-              </a:rPr>
-              <a:t> </a:t>
-            </a:r>
-            <a:r>
-              <a:rPr lang="en-IN" sz="1700" b="0" u="none" spc="105" strike="noStrike">
-                <a:solidFill>
-                  <a:srgbClr val="E1E6E9"/>
-                </a:solidFill>
-                <a:effectLst/>
-                <a:uFillTx/>
-                <a:latin typeface="Cambria"/>
-              </a:rPr>
-              <a:t>Application</a:t>
-            </a:r>
-            <a:endParaRPr lang="en-IN" sz="1700" b="0" u="none" strike="noStrike">
-              <a:solidFill>
-                <a:srgbClr val="000000"/>
-              </a:solidFill>
-              <a:effectLst/>
-              <a:uFillTx/>
-              <a:latin typeface="Arial"/>
-            </a:endParaRPr>
-          </a:p>
-          <a:p>
-            <a:pPr marL="12600">
-              <a:lnSpc>
-                <a:spcPct val="100000"/>
-              </a:lnSpc>
-              <a:spcBef>
-                <a:spcPts val="1321"/>
-              </a:spcBef>
-            </a:pPr>
-            <a:r>
-              <a:rPr lang="en-IN" sz="1350" b="0" u="none" spc="79" strike="noStrike">
-                <a:solidFill>
-                  <a:srgbClr val="E1E6E9"/>
-                </a:solidFill>
-                <a:effectLst/>
-                <a:uFillTx/>
-                <a:latin typeface="Cambria"/>
-              </a:rPr>
-              <a:t>Applied</a:t>
-            </a:r>
-            <a:r>
-              <a:rPr lang="en-IN" sz="1350" b="0" u="none" spc="71" strike="noStrike">
-                <a:solidFill>
-                  <a:srgbClr val="E1E6E9"/>
-                </a:solidFill>
-                <a:effectLst/>
-                <a:uFillTx/>
-                <a:latin typeface="Cambria"/>
-              </a:rPr>
-              <a:t> </a:t>
-            </a:r>
-            <a:r>
-              <a:rPr lang="en-IN" sz="1350" b="0" u="none" spc="91" strike="noStrike">
-                <a:solidFill>
-                  <a:srgbClr val="E1E6E9"/>
-                </a:solidFill>
-                <a:effectLst/>
-                <a:uFillTx/>
-                <a:latin typeface="Cambria"/>
-              </a:rPr>
-              <a:t>concepts</a:t>
-            </a:r>
-            <a:r>
-              <a:rPr lang="en-IN" sz="1350" b="0" u="none" spc="54" strike="noStrike">
-                <a:solidFill>
-                  <a:srgbClr val="E1E6E9"/>
-                </a:solidFill>
-                <a:effectLst/>
-                <a:uFillTx/>
-                <a:latin typeface="Cambria"/>
-              </a:rPr>
-              <a:t> </a:t>
-            </a:r>
-            <a:r>
-              <a:rPr lang="en-IN" sz="1350" b="0" u="none" spc="91" strike="noStrike">
-                <a:solidFill>
-                  <a:srgbClr val="E1E6E9"/>
-                </a:solidFill>
-                <a:effectLst/>
-                <a:uFillTx/>
-                <a:latin typeface="Cambria"/>
-              </a:rPr>
-              <a:t>to</a:t>
-            </a:r>
-            <a:r>
-              <a:rPr lang="en-IN" sz="1350" b="0" u="none" spc="34" strike="noStrike">
-                <a:solidFill>
-                  <a:srgbClr val="E1E6E9"/>
-                </a:solidFill>
-                <a:effectLst/>
-                <a:uFillTx/>
-                <a:latin typeface="Cambria"/>
-              </a:rPr>
-              <a:t> </a:t>
-            </a:r>
-            <a:r>
-              <a:rPr lang="en-IN" sz="1350" b="0" u="none" spc="136" strike="noStrike">
-                <a:solidFill>
-                  <a:srgbClr val="E1E6E9"/>
-                </a:solidFill>
-                <a:effectLst/>
-                <a:uFillTx/>
-                <a:latin typeface="Cambria"/>
-              </a:rPr>
-              <a:t>real-</a:t>
-            </a:r>
-            <a:r>
-              <a:rPr lang="en-IN" sz="1350" b="0" u="none" spc="79" strike="noStrike">
-                <a:solidFill>
-                  <a:srgbClr val="E1E6E9"/>
-                </a:solidFill>
-                <a:effectLst/>
-                <a:uFillTx/>
-                <a:latin typeface="Cambria"/>
-              </a:rPr>
-              <a:t>world</a:t>
-            </a:r>
-            <a:r>
-              <a:rPr lang="en-IN" sz="1350" b="0" u="none" spc="45" strike="noStrike">
-                <a:solidFill>
-                  <a:srgbClr val="E1E6E9"/>
-                </a:solidFill>
-                <a:effectLst/>
-                <a:uFillTx/>
-                <a:latin typeface="Cambria"/>
-              </a:rPr>
-              <a:t> </a:t>
-            </a:r>
-            <a:r>
-              <a:rPr lang="en-IN" sz="1350" b="0" u="none" spc="79" strike="noStrike">
-                <a:solidFill>
-                  <a:srgbClr val="E1E6E9"/>
-                </a:solidFill>
-                <a:effectLst/>
-                <a:uFillTx/>
-                <a:latin typeface="Cambria"/>
-              </a:rPr>
-              <a:t>challenges.</a:t>
-            </a:r>
-            <a:endParaRPr lang="en-IN" sz="1350" b="0" u="none" strike="noStrike">
-              <a:solidFill>
-                <a:srgbClr val="000000"/>
-              </a:solidFill>
-              <a:effectLst/>
-              <a:uFillTx/>
-              <a:latin typeface="Arial"/>
-            </a:endParaRPr>
-          </a:p>
-        </p:txBody>
-      </p:sp>
-      <p:sp>
-        <p:nvSpPr>
-          <p:cNvPr id="182" name="object 22"/>
-          <p:cNvSpPr/>
-          <p:nvPr/>
-        </p:nvSpPr>
-        <p:spPr>
-          <a:xfrm>
-            <a:off x="958680" y="7298640"/>
-            <a:ext cx="5213160" cy="230040"/>
-          </a:xfrm>
-          <a:prstGeom prst="rect">
-            <a:avLst/>
-          </a:prstGeom>
-          <a:noFill/>
-          <a:ln w="0">
-            <a:noFill/>
-          </a:ln>
-        </p:spPr>
-        <p:style>
-          <a:lnRef idx="0"/>
-          <a:fillRef idx="0"/>
-          <a:effectRef idx="0"/>
-          <a:fontRef idx="minor"/>
-        </p:style>
-        <p:txBody>
-          <a:bodyPr lIns="0" tIns="11520" rIns="0" bIns="0" anchor="t">
-            <a:spAutoFit/>
-          </a:bodyPr>
-          <a:p>
-            <a:pPr marL="12600">
-              <a:lnSpc>
-                <a:spcPct val="100000"/>
-              </a:lnSpc>
-              <a:spcBef>
-                <a:spcPts val="91"/>
-              </a:spcBef>
-            </a:pPr>
-            <a:r>
-              <a:rPr lang="en-IN" sz="1350" b="1" u="none" spc="20" strike="noStrike">
-                <a:solidFill>
-                  <a:srgbClr val="E1E6E9"/>
-                </a:solidFill>
-                <a:effectLst/>
-                <a:uFillTx/>
-                <a:latin typeface="Cambria"/>
-              </a:rPr>
-              <a:t>Special</a:t>
-            </a:r>
-            <a:r>
-              <a:rPr lang="en-IN" sz="1350" b="1" u="none" spc="-54" strike="noStrike">
-                <a:solidFill>
-                  <a:srgbClr val="E1E6E9"/>
-                </a:solidFill>
-                <a:effectLst/>
-                <a:uFillTx/>
-                <a:latin typeface="Cambria"/>
-              </a:rPr>
-              <a:t> </a:t>
-            </a:r>
-            <a:r>
-              <a:rPr lang="en-IN" sz="1350" b="1" u="none" spc="51" strike="noStrike">
-                <a:solidFill>
-                  <a:srgbClr val="E1E6E9"/>
-                </a:solidFill>
-                <a:effectLst/>
-                <a:uFillTx/>
-                <a:latin typeface="Cambria"/>
-              </a:rPr>
-              <a:t>Thanks:</a:t>
-            </a:r>
-            <a:r>
-              <a:rPr lang="en-IN" sz="1350" b="1" u="none" strike="noStrike">
-                <a:solidFill>
-                  <a:srgbClr val="E1E6E9"/>
-                </a:solidFill>
-                <a:effectLst/>
-                <a:uFillTx/>
-                <a:latin typeface="Cambria"/>
-              </a:rPr>
-              <a:t> </a:t>
-            </a:r>
-            <a:r>
-              <a:rPr lang="en-IN" sz="1350" b="0" u="none" spc="85" strike="noStrike">
-                <a:solidFill>
-                  <a:srgbClr val="E1E6E9"/>
-                </a:solidFill>
-                <a:effectLst/>
-                <a:uFillTx/>
-                <a:latin typeface="Cambria"/>
-              </a:rPr>
-              <a:t>Grateful</a:t>
-            </a:r>
-            <a:r>
-              <a:rPr lang="en-IN" sz="1350" b="0" u="none" spc="125" strike="noStrike">
-                <a:solidFill>
-                  <a:srgbClr val="E1E6E9"/>
-                </a:solidFill>
-                <a:effectLst/>
-                <a:uFillTx/>
-                <a:latin typeface="Cambria"/>
-              </a:rPr>
-              <a:t> </a:t>
-            </a:r>
-            <a:r>
-              <a:rPr lang="en-IN" sz="1350" b="0" u="none" spc="91" strike="noStrike">
-                <a:solidFill>
-                  <a:srgbClr val="E1E6E9"/>
-                </a:solidFill>
-                <a:effectLst/>
-                <a:uFillTx/>
-                <a:latin typeface="Cambria"/>
-              </a:rPr>
-              <a:t>to</a:t>
-            </a:r>
-            <a:r>
-              <a:rPr lang="en-IN" sz="1350" b="0" u="none" spc="71" strike="noStrike">
-                <a:solidFill>
-                  <a:srgbClr val="E1E6E9"/>
-                </a:solidFill>
-                <a:effectLst/>
-                <a:uFillTx/>
-                <a:latin typeface="Cambria"/>
-              </a:rPr>
-              <a:t> </a:t>
-            </a:r>
-            <a:r>
-              <a:rPr lang="en-IN" sz="1350" b="0" u="none" spc="99" strike="noStrike">
-                <a:solidFill>
-                  <a:srgbClr val="E1E6E9"/>
-                </a:solidFill>
-                <a:effectLst/>
-                <a:uFillTx/>
-                <a:latin typeface="Cambria"/>
-              </a:rPr>
-              <a:t>Infosys</a:t>
-            </a:r>
-            <a:r>
-              <a:rPr lang="en-IN" sz="1350" b="0" u="none" spc="113" strike="noStrike">
-                <a:solidFill>
-                  <a:srgbClr val="E1E6E9"/>
-                </a:solidFill>
-                <a:effectLst/>
-                <a:uFillTx/>
-                <a:latin typeface="Cambria"/>
-              </a:rPr>
-              <a:t> </a:t>
-            </a:r>
-            <a:r>
-              <a:rPr lang="en-IN" sz="1350" b="0" u="none" spc="91" strike="noStrike">
-                <a:solidFill>
-                  <a:srgbClr val="E1E6E9"/>
-                </a:solidFill>
-                <a:effectLst/>
-                <a:uFillTx/>
-                <a:latin typeface="Cambria"/>
-              </a:rPr>
-              <a:t>Springboard</a:t>
-            </a:r>
-            <a:r>
-              <a:rPr lang="en-IN" sz="1350" b="0" u="none" spc="99" strike="noStrike">
-                <a:solidFill>
-                  <a:srgbClr val="E1E6E9"/>
-                </a:solidFill>
-                <a:effectLst/>
-                <a:uFillTx/>
-                <a:latin typeface="Cambria"/>
-              </a:rPr>
-              <a:t> </a:t>
-            </a:r>
-            <a:r>
-              <a:rPr lang="en-IN" sz="1350" b="0" u="none" spc="96" strike="noStrike">
-                <a:solidFill>
-                  <a:srgbClr val="E1E6E9"/>
-                </a:solidFill>
-                <a:effectLst/>
-                <a:uFillTx/>
-                <a:latin typeface="Cambria"/>
-              </a:rPr>
-              <a:t>and</a:t>
-            </a:r>
-            <a:r>
-              <a:rPr lang="en-IN" sz="1350" b="0" u="none" spc="105" strike="noStrike">
-                <a:solidFill>
-                  <a:srgbClr val="E1E6E9"/>
-                </a:solidFill>
-                <a:effectLst/>
-                <a:uFillTx/>
-                <a:latin typeface="Cambria"/>
-              </a:rPr>
-              <a:t> </a:t>
-            </a:r>
-            <a:r>
-              <a:rPr lang="en-IN" sz="1350" b="0" u="none" spc="91" strike="noStrike">
-                <a:solidFill>
-                  <a:srgbClr val="E1E6E9"/>
-                </a:solidFill>
-                <a:effectLst/>
-                <a:uFillTx/>
-                <a:latin typeface="Cambria"/>
-              </a:rPr>
-              <a:t>mentors.</a:t>
-            </a:r>
-            <a:endParaRPr lang="en-IN" sz="1350" b="0" u="none" strike="noStrike">
-              <a:solidFill>
-                <a:srgbClr val="000000"/>
-              </a:solidFill>
-              <a:effectLst/>
-              <a:uFillTx/>
-              <a:latin typeface="Arial"/>
-            </a:endParaRPr>
-          </a:p>
-        </p:txBody>
-      </p:sp>
-      <p:sp>
-        <p:nvSpPr>
-          <p:cNvPr id="183" name="object 23"/>
-          <p:cNvSpPr/>
-          <p:nvPr/>
-        </p:nvSpPr>
-        <p:spPr>
-          <a:xfrm>
-            <a:off x="707040" y="7071480"/>
-            <a:ext cx="21240" cy="679680"/>
-          </a:xfrm>
-          <a:custGeom>
-            <a:avLst/>
-            <a:gdLst>
-              <a:gd name="textAreaLeft" fmla="*/ 0 w 21240"/>
-              <a:gd name="textAreaRight" fmla="*/ 21600 w 21240"/>
-              <a:gd name="textAreaTop" fmla="*/ 0 h 679680"/>
-              <a:gd name="textAreaBottom" fmla="*/ 680040 h 679680"/>
-            </a:gdLst>
-            <a:ahLst/>
-            <a:cxnLst/>
-            <a:rect l="textAreaLeft" t="textAreaTop" r="textAreaRight" b="textAreaBottom"/>
-            <a:pathLst>
-              <a:path w="21590" h="680084">
-                <a:moveTo>
-                  <a:pt x="21335" y="0"/>
-                </a:moveTo>
-                <a:lnTo>
-                  <a:pt x="0" y="0"/>
-                </a:lnTo>
-                <a:lnTo>
-                  <a:pt x="0" y="679704"/>
-                </a:lnTo>
-                <a:lnTo>
-                  <a:pt x="21335" y="679704"/>
-                </a:lnTo>
-                <a:lnTo>
-                  <a:pt x="21335" y="0"/>
-                </a:lnTo>
-                <a:close/>
-              </a:path>
-            </a:pathLst>
-          </a:custGeom>
-          <a:solidFill>
-            <a:srgbClr val="5F9DFF"/>
-          </a:solidFill>
-          <a:ln w="0">
-            <a:noFill/>
-          </a:ln>
-        </p:spPr>
-        <p:style>
-          <a:lnRef idx="0"/>
-          <a:fillRef idx="0"/>
-          <a:effectRef idx="0"/>
-          <a:fontRef idx="minor"/>
-        </p:style>
-        <p:txBody>
-          <a:bodyPr lIns="0" tIns="0" rIns="0" bIns="0" anchor="t">
-            <a:noAutofit/>
-          </a:bodyPr>
-          <a:p>
-            <a:endParaRPr lang="en-IN" sz="1800" b="0" u="none" strike="noStrike">
-              <a:solidFill>
-                <a:srgbClr val="FFFFFF"/>
               </a:solidFill>
               <a:effectLst/>
               <a:uFillTx/>
@@ -6498,7 +4432,7 @@
         <p:spPr>
           <a:xfrm>
             <a:off x="12750840" y="7700040"/>
-            <a:ext cx="1852920" cy="465480"/>
+            <a:ext cx="1852560" cy="465120"/>
           </a:xfrm>
           <a:prstGeom prst="rect">
             <a:avLst/>
@@ -6522,7 +4456,7 @@
         <p:spPr>
           <a:xfrm>
             <a:off x="693720" y="442440"/>
-            <a:ext cx="13242240" cy="1697040"/>
+            <a:ext cx="13241880" cy="1697400"/>
           </a:xfrm>
           <a:prstGeom prst="rect">
             <a:avLst/>
@@ -6545,6 +4479,9 @@
                 <a:spcPts val="99"/>
               </a:spcBef>
               <a:buNone/>
+              <a:tabLst>
+                <a:tab pos="0" algn="l"/>
+              </a:tabLst>
             </a:pPr>
             <a:r>
               <a:rPr lang="en-IN" sz="4750" b="0" u="none" spc="386" strike="noStrike">
@@ -6654,7 +4591,7 @@
         <p:spPr>
           <a:xfrm>
             <a:off x="961920" y="2819520"/>
-            <a:ext cx="4939200" cy="1265040"/>
+            <a:ext cx="4938840" cy="1264680"/>
           </a:xfrm>
           <a:prstGeom prst="rect">
             <a:avLst/>
@@ -6943,7 +4880,7 @@
         <p:spPr>
           <a:xfrm>
             <a:off x="8948880" y="2831760"/>
-            <a:ext cx="4714920" cy="4714920"/>
+            <a:ext cx="4714560" cy="4714560"/>
           </a:xfrm>
           <a:prstGeom prst="rect">
             <a:avLst/>
@@ -6997,7 +4934,7 @@
         <p:spPr>
           <a:xfrm>
             <a:off x="0" y="0"/>
-            <a:ext cx="5486040" cy="8229240"/>
+            <a:ext cx="5485680" cy="8228880"/>
           </a:xfrm>
           <a:prstGeom prst="rect">
             <a:avLst/>
@@ -7021,7 +4958,7 @@
         <p:spPr>
           <a:xfrm>
             <a:off x="693720" y="442440"/>
-            <a:ext cx="13242240" cy="1697040"/>
+            <a:ext cx="13241880" cy="1697400"/>
           </a:xfrm>
           <a:prstGeom prst="rect">
             <a:avLst/>
@@ -7044,6 +4981,9 @@
                 <a:spcPts val="91"/>
               </a:spcBef>
               <a:buNone/>
+              <a:tabLst>
+                <a:tab pos="0" algn="l"/>
+              </a:tabLst>
             </a:pPr>
             <a:r>
               <a:rPr lang="en-IN" sz="3850" b="0" u="none" spc="230" strike="noStrike">
@@ -7098,9 +5038,9 @@
         <p:grpSpPr>
           <a:xfrm>
             <a:off x="6277320" y="1458360"/>
-            <a:ext cx="7565040" cy="1947960"/>
+            <a:ext cx="7564680" cy="1947600"/>
             <a:chOff x="6277320" y="1458360"/>
-            <a:chExt cx="7565040" cy="1947960"/>
+            <a:chExt cx="7564680" cy="1947600"/>
           </a:xfrm>
         </p:grpSpPr>
         <p:sp>
@@ -7112,15 +5052,15 @@
           <p:spPr>
             <a:xfrm>
               <a:off x="6277320" y="1458360"/>
-              <a:ext cx="7565040" cy="1947960"/>
+              <a:ext cx="7564680" cy="1947600"/>
             </a:xfrm>
             <a:custGeom>
               <a:avLst/>
               <a:gdLst>
-                <a:gd name="textAreaLeft" fmla="*/ 0 w 7565040"/>
-                <a:gd name="textAreaRight" fmla="*/ 7565400 w 7565040"/>
-                <a:gd name="textAreaTop" fmla="*/ 0 h 1947960"/>
-                <a:gd name="textAreaBottom" fmla="*/ 1948320 h 1947960"/>
+                <a:gd name="textAreaLeft" fmla="*/ 0 w 7564680"/>
+                <a:gd name="textAreaRight" fmla="*/ 7565400 w 7564680"/>
+                <a:gd name="textAreaTop" fmla="*/ 0 h 1947600"/>
+                <a:gd name="textAreaBottom" fmla="*/ 1948320 h 1947600"/>
               </a:gdLst>
               <a:ahLst/>
               <a:cxnLst/>
@@ -7232,15 +5172,15 @@
           <p:spPr>
             <a:xfrm>
               <a:off x="6277320" y="1458360"/>
-              <a:ext cx="7565040" cy="1947960"/>
+              <a:ext cx="7564680" cy="1947600"/>
             </a:xfrm>
             <a:custGeom>
               <a:avLst/>
               <a:gdLst>
-                <a:gd name="textAreaLeft" fmla="*/ 0 w 7565040"/>
-                <a:gd name="textAreaRight" fmla="*/ 7565400 w 7565040"/>
-                <a:gd name="textAreaTop" fmla="*/ 0 h 1947960"/>
-                <a:gd name="textAreaBottom" fmla="*/ 1948320 h 1947960"/>
+                <a:gd name="textAreaLeft" fmla="*/ 0 w 7564680"/>
+                <a:gd name="textAreaRight" fmla="*/ 7565400 w 7564680"/>
+                <a:gd name="textAreaTop" fmla="*/ 0 h 1947600"/>
+                <a:gd name="textAreaBottom" fmla="*/ 1948320 h 1947600"/>
               </a:gdLst>
               <a:ahLst/>
               <a:cxnLst/>
@@ -7353,15 +5293,15 @@
           <p:spPr>
             <a:xfrm>
               <a:off x="6483240" y="1664280"/>
-              <a:ext cx="591480" cy="591480"/>
+              <a:ext cx="591120" cy="591120"/>
             </a:xfrm>
             <a:custGeom>
               <a:avLst/>
               <a:gdLst>
-                <a:gd name="textAreaLeft" fmla="*/ 0 w 591480"/>
-                <a:gd name="textAreaRight" fmla="*/ 591840 w 591480"/>
-                <a:gd name="textAreaTop" fmla="*/ 0 h 591480"/>
-                <a:gd name="textAreaBottom" fmla="*/ 591840 h 591480"/>
+                <a:gd name="textAreaLeft" fmla="*/ 0 w 591120"/>
+                <a:gd name="textAreaRight" fmla="*/ 591840 w 591120"/>
+                <a:gd name="textAreaTop" fmla="*/ 0 h 591120"/>
+                <a:gd name="textAreaBottom" fmla="*/ 591840 h 591120"/>
               </a:gdLst>
               <a:ahLst/>
               <a:cxnLst/>
@@ -7537,7 +5477,7 @@
           <p:spPr>
             <a:xfrm>
               <a:off x="6644520" y="1825920"/>
-              <a:ext cx="267840" cy="267840"/>
+              <a:ext cx="267480" cy="267480"/>
             </a:xfrm>
             <a:prstGeom prst="rect">
               <a:avLst/>
@@ -7558,7 +5498,7 @@
         <p:spPr>
           <a:xfrm>
             <a:off x="7432920" y="1923840"/>
-            <a:ext cx="2195640" cy="742680"/>
+            <a:ext cx="2195280" cy="742320"/>
           </a:xfrm>
           <a:prstGeom prst="rect">
             <a:avLst/>
@@ -7713,9 +5653,9 @@
         <p:grpSpPr>
           <a:xfrm>
             <a:off x="6329880" y="3643920"/>
-            <a:ext cx="7565040" cy="1947960"/>
+            <a:ext cx="7564680" cy="1947600"/>
             <a:chOff x="6329880" y="3643920"/>
-            <a:chExt cx="7565040" cy="1947960"/>
+            <a:chExt cx="7564680" cy="1947600"/>
           </a:xfrm>
         </p:grpSpPr>
         <p:sp>
@@ -7727,15 +5667,15 @@
           <p:spPr>
             <a:xfrm>
               <a:off x="6329880" y="3643920"/>
-              <a:ext cx="7565040" cy="1947960"/>
+              <a:ext cx="7564680" cy="1947600"/>
             </a:xfrm>
             <a:custGeom>
               <a:avLst/>
               <a:gdLst>
-                <a:gd name="textAreaLeft" fmla="*/ 0 w 7565040"/>
-                <a:gd name="textAreaRight" fmla="*/ 7565400 w 7565040"/>
-                <a:gd name="textAreaTop" fmla="*/ 0 h 1947960"/>
-                <a:gd name="textAreaBottom" fmla="*/ 1948320 h 1947960"/>
+                <a:gd name="textAreaLeft" fmla="*/ 0 w 7564680"/>
+                <a:gd name="textAreaRight" fmla="*/ 7565400 w 7564680"/>
+                <a:gd name="textAreaTop" fmla="*/ 0 h 1947600"/>
+                <a:gd name="textAreaBottom" fmla="*/ 1948320 h 1947600"/>
               </a:gdLst>
               <a:ahLst/>
               <a:cxnLst/>
@@ -7847,15 +5787,15 @@
           <p:spPr>
             <a:xfrm>
               <a:off x="6329880" y="3643920"/>
-              <a:ext cx="7565040" cy="1947960"/>
+              <a:ext cx="7564680" cy="1947600"/>
             </a:xfrm>
             <a:custGeom>
               <a:avLst/>
               <a:gdLst>
-                <a:gd name="textAreaLeft" fmla="*/ 0 w 7565040"/>
-                <a:gd name="textAreaRight" fmla="*/ 7565400 w 7565040"/>
-                <a:gd name="textAreaTop" fmla="*/ 0 h 1947960"/>
-                <a:gd name="textAreaBottom" fmla="*/ 1948320 h 1947960"/>
+                <a:gd name="textAreaLeft" fmla="*/ 0 w 7564680"/>
+                <a:gd name="textAreaRight" fmla="*/ 7565400 w 7564680"/>
+                <a:gd name="textAreaTop" fmla="*/ 0 h 1947600"/>
+                <a:gd name="textAreaBottom" fmla="*/ 1948320 h 1947600"/>
               </a:gdLst>
               <a:ahLst/>
               <a:cxnLst/>
@@ -7968,15 +5908,15 @@
           <p:spPr>
             <a:xfrm>
               <a:off x="6535800" y="3849840"/>
-              <a:ext cx="591480" cy="591480"/>
+              <a:ext cx="591120" cy="591120"/>
             </a:xfrm>
             <a:custGeom>
               <a:avLst/>
               <a:gdLst>
-                <a:gd name="textAreaLeft" fmla="*/ 0 w 591480"/>
-                <a:gd name="textAreaRight" fmla="*/ 591840 w 591480"/>
-                <a:gd name="textAreaTop" fmla="*/ 0 h 591480"/>
-                <a:gd name="textAreaBottom" fmla="*/ 591840 h 591480"/>
+                <a:gd name="textAreaLeft" fmla="*/ 0 w 591120"/>
+                <a:gd name="textAreaRight" fmla="*/ 591840 w 591120"/>
+                <a:gd name="textAreaTop" fmla="*/ 0 h 591120"/>
+                <a:gd name="textAreaBottom" fmla="*/ 591840 h 591120"/>
               </a:gdLst>
               <a:ahLst/>
               <a:cxnLst/>
@@ -8152,7 +6092,7 @@
           <p:spPr>
             <a:xfrm>
               <a:off x="6697080" y="4011480"/>
-              <a:ext cx="267840" cy="267840"/>
+              <a:ext cx="267480" cy="267480"/>
             </a:xfrm>
             <a:prstGeom prst="rect">
               <a:avLst/>
@@ -8173,7 +6113,7 @@
         <p:spPr>
           <a:xfrm>
             <a:off x="7560000" y="3960000"/>
-            <a:ext cx="2415960" cy="742680"/>
+            <a:ext cx="2415600" cy="742320"/>
           </a:xfrm>
           <a:prstGeom prst="rect">
             <a:avLst/>
@@ -8339,9 +6279,9 @@
         <p:grpSpPr>
           <a:xfrm>
             <a:off x="6277320" y="5747040"/>
-            <a:ext cx="7565040" cy="1944720"/>
+            <a:ext cx="7564680" cy="1944360"/>
             <a:chOff x="6277320" y="5747040"/>
-            <a:chExt cx="7565040" cy="1944720"/>
+            <a:chExt cx="7564680" cy="1944360"/>
           </a:xfrm>
         </p:grpSpPr>
         <p:sp>
@@ -8353,15 +6293,15 @@
           <p:spPr>
             <a:xfrm>
               <a:off x="6277320" y="5747040"/>
-              <a:ext cx="7565040" cy="1944720"/>
+              <a:ext cx="7564680" cy="1944360"/>
             </a:xfrm>
             <a:custGeom>
               <a:avLst/>
               <a:gdLst>
-                <a:gd name="textAreaLeft" fmla="*/ 0 w 7565040"/>
-                <a:gd name="textAreaRight" fmla="*/ 7565400 w 7565040"/>
-                <a:gd name="textAreaTop" fmla="*/ 0 h 1944720"/>
-                <a:gd name="textAreaBottom" fmla="*/ 1945080 h 1944720"/>
+                <a:gd name="textAreaLeft" fmla="*/ 0 w 7564680"/>
+                <a:gd name="textAreaRight" fmla="*/ 7565400 w 7564680"/>
+                <a:gd name="textAreaTop" fmla="*/ 0 h 1944360"/>
+                <a:gd name="textAreaBottom" fmla="*/ 1945080 h 1944360"/>
               </a:gdLst>
               <a:ahLst/>
               <a:cxnLst/>
@@ -8473,15 +6413,15 @@
           <p:spPr>
             <a:xfrm>
               <a:off x="6277320" y="5747040"/>
-              <a:ext cx="7565040" cy="1944720"/>
+              <a:ext cx="7564680" cy="1944360"/>
             </a:xfrm>
             <a:custGeom>
               <a:avLst/>
               <a:gdLst>
-                <a:gd name="textAreaLeft" fmla="*/ 0 w 7565040"/>
-                <a:gd name="textAreaRight" fmla="*/ 7565400 w 7565040"/>
-                <a:gd name="textAreaTop" fmla="*/ 0 h 1944720"/>
-                <a:gd name="textAreaBottom" fmla="*/ 1945080 h 1944720"/>
+                <a:gd name="textAreaLeft" fmla="*/ 0 w 7564680"/>
+                <a:gd name="textAreaRight" fmla="*/ 7565400 w 7564680"/>
+                <a:gd name="textAreaTop" fmla="*/ 0 h 1944360"/>
+                <a:gd name="textAreaBottom" fmla="*/ 1945080 h 1944360"/>
               </a:gdLst>
               <a:ahLst/>
               <a:cxnLst/>
@@ -8594,15 +6534,15 @@
           <p:spPr>
             <a:xfrm>
               <a:off x="6483240" y="5949720"/>
-              <a:ext cx="591480" cy="591480"/>
+              <a:ext cx="591120" cy="591120"/>
             </a:xfrm>
             <a:custGeom>
               <a:avLst/>
               <a:gdLst>
-                <a:gd name="textAreaLeft" fmla="*/ 0 w 591480"/>
-                <a:gd name="textAreaRight" fmla="*/ 591840 w 591480"/>
-                <a:gd name="textAreaTop" fmla="*/ 0 h 591480"/>
-                <a:gd name="textAreaBottom" fmla="*/ 591840 h 591480"/>
+                <a:gd name="textAreaLeft" fmla="*/ 0 w 591120"/>
+                <a:gd name="textAreaRight" fmla="*/ 591840 w 591120"/>
+                <a:gd name="textAreaTop" fmla="*/ 0 h 591120"/>
+                <a:gd name="textAreaBottom" fmla="*/ 591840 h 591120"/>
               </a:gdLst>
               <a:ahLst/>
               <a:cxnLst/>
@@ -8778,7 +6718,7 @@
           <p:spPr>
             <a:xfrm>
               <a:off x="6644520" y="6111360"/>
-              <a:ext cx="267840" cy="267840"/>
+              <a:ext cx="267480" cy="267480"/>
             </a:xfrm>
             <a:prstGeom prst="rect">
               <a:avLst/>
@@ -8799,7 +6739,7 @@
         <p:spPr>
           <a:xfrm>
             <a:off x="7380000" y="6120000"/>
-            <a:ext cx="3575160" cy="742680"/>
+            <a:ext cx="3574800" cy="742320"/>
           </a:xfrm>
           <a:prstGeom prst="rect">
             <a:avLst/>
@@ -8958,7 +6898,7 @@
         <p:spPr>
           <a:xfrm>
             <a:off x="12776040" y="7738200"/>
-            <a:ext cx="1852920" cy="465480"/>
+            <a:ext cx="1852560" cy="465120"/>
           </a:xfrm>
           <a:prstGeom prst="rect">
             <a:avLst/>
@@ -9008,9 +6948,9 @@
         <p:grpSpPr>
           <a:xfrm>
             <a:off x="7583400" y="1819800"/>
-            <a:ext cx="7046640" cy="6307920"/>
+            <a:ext cx="7046280" cy="6307560"/>
             <a:chOff x="7583400" y="1819800"/>
-            <a:chExt cx="7046640" cy="6307920"/>
+            <a:chExt cx="7046280" cy="6307560"/>
           </a:xfrm>
         </p:grpSpPr>
         <p:pic>
@@ -9026,7 +6966,7 @@
           <p:spPr>
             <a:xfrm>
               <a:off x="7583400" y="1819800"/>
-              <a:ext cx="6196320" cy="6284520"/>
+              <a:ext cx="6195960" cy="6284160"/>
             </a:xfrm>
             <a:prstGeom prst="rect">
               <a:avLst/>
@@ -9050,7 +6990,7 @@
           <p:spPr>
             <a:xfrm>
               <a:off x="13716000" y="7797600"/>
-              <a:ext cx="914040" cy="330120"/>
+              <a:ext cx="913680" cy="329760"/>
             </a:xfrm>
             <a:prstGeom prst="rect">
               <a:avLst/>
@@ -9075,7 +7015,7 @@
         <p:spPr>
           <a:xfrm>
             <a:off x="844560" y="549720"/>
-            <a:ext cx="5786280" cy="665640"/>
+            <a:ext cx="5785920" cy="666000"/>
           </a:xfrm>
           <a:prstGeom prst="rect">
             <a:avLst/>
@@ -9098,6 +7038,9 @@
                 <a:spcPts val="99"/>
               </a:spcBef>
               <a:buNone/>
+              <a:tabLst>
+                <a:tab pos="0" algn="l"/>
+              </a:tabLst>
             </a:pPr>
             <a:r>
               <a:rPr lang="en-IN" sz="4200" b="0" u="none" spc="334" strike="noStrike">
@@ -9152,7 +7095,7 @@
         <p:spPr>
           <a:xfrm>
             <a:off x="844560" y="1769760"/>
-            <a:ext cx="5722920" cy="3085200"/>
+            <a:ext cx="5722560" cy="3084840"/>
           </a:xfrm>
           <a:prstGeom prst="rect">
             <a:avLst/>
@@ -9852,7 +7795,7 @@
         <p:spPr>
           <a:xfrm>
             <a:off x="12547440" y="7659000"/>
-            <a:ext cx="2016720" cy="506880"/>
+            <a:ext cx="2016360" cy="506520"/>
           </a:xfrm>
           <a:prstGeom prst="rect">
             <a:avLst/>
@@ -9876,7 +7819,7 @@
         <p:spPr>
           <a:xfrm>
             <a:off x="1007640" y="1879920"/>
-            <a:ext cx="5562720" cy="786960"/>
+            <a:ext cx="5562360" cy="787320"/>
           </a:xfrm>
           <a:prstGeom prst="rect">
             <a:avLst/>
@@ -9899,6 +7842,9 @@
                 <a:spcPts val="91"/>
               </a:spcBef>
               <a:buNone/>
+              <a:tabLst>
+                <a:tab pos="0" algn="l"/>
+              </a:tabLst>
             </a:pPr>
             <a:r>
               <a:rPr lang="en-IN" sz="5000" b="0" u="none" spc="394" strike="noStrike">
@@ -9953,9 +7899,9 @@
         <p:grpSpPr>
           <a:xfrm>
             <a:off x="1020960" y="3233880"/>
-            <a:ext cx="4026240" cy="3069000"/>
+            <a:ext cx="4025880" cy="3068640"/>
             <a:chOff x="1020960" y="3233880"/>
-            <a:chExt cx="4026240" cy="3069000"/>
+            <a:chExt cx="4025880" cy="3068640"/>
           </a:xfrm>
         </p:grpSpPr>
         <p:sp>
@@ -9967,15 +7913,15 @@
           <p:spPr>
             <a:xfrm>
               <a:off x="1020960" y="3614760"/>
-              <a:ext cx="4026240" cy="2688120"/>
+              <a:ext cx="4025880" cy="2687760"/>
             </a:xfrm>
             <a:custGeom>
               <a:avLst/>
               <a:gdLst>
-                <a:gd name="textAreaLeft" fmla="*/ 0 w 4026240"/>
-                <a:gd name="textAreaRight" fmla="*/ 4026600 w 4026240"/>
-                <a:gd name="textAreaTop" fmla="*/ 0 h 2688120"/>
-                <a:gd name="textAreaBottom" fmla="*/ 2688480 h 2688120"/>
+                <a:gd name="textAreaLeft" fmla="*/ 0 w 4025880"/>
+                <a:gd name="textAreaRight" fmla="*/ 4026600 w 4025880"/>
+                <a:gd name="textAreaTop" fmla="*/ 0 h 2687760"/>
+                <a:gd name="textAreaBottom" fmla="*/ 2688480 h 2687760"/>
               </a:gdLst>
               <a:ahLst/>
               <a:cxnLst/>
@@ -10101,15 +8047,15 @@
           <p:spPr>
             <a:xfrm>
               <a:off x="1020960" y="3233880"/>
-              <a:ext cx="4026240" cy="764640"/>
+              <a:ext cx="4025880" cy="764280"/>
             </a:xfrm>
             <a:custGeom>
               <a:avLst/>
               <a:gdLst>
-                <a:gd name="textAreaLeft" fmla="*/ 0 w 4026240"/>
-                <a:gd name="textAreaRight" fmla="*/ 4026600 w 4026240"/>
-                <a:gd name="textAreaTop" fmla="*/ 0 h 764640"/>
-                <a:gd name="textAreaBottom" fmla="*/ 765000 h 764640"/>
+                <a:gd name="textAreaLeft" fmla="*/ 0 w 4025880"/>
+                <a:gd name="textAreaRight" fmla="*/ 4026600 w 4025880"/>
+                <a:gd name="textAreaTop" fmla="*/ 0 h 764280"/>
+                <a:gd name="textAreaBottom" fmla="*/ 765000 h 764280"/>
               </a:gdLst>
               <a:ahLst/>
               <a:cxnLst/>
@@ -10375,7 +8321,7 @@
           <p:spPr>
             <a:xfrm>
               <a:off x="2880360" y="3462480"/>
-              <a:ext cx="304560" cy="304560"/>
+              <a:ext cx="304200" cy="304200"/>
             </a:xfrm>
             <a:prstGeom prst="rect">
               <a:avLst/>
@@ -10396,7 +8342,7 @@
         <p:spPr>
           <a:xfrm>
             <a:off x="1293480" y="4220280"/>
-            <a:ext cx="3368880" cy="1359000"/>
+            <a:ext cx="3368520" cy="1358640"/>
           </a:xfrm>
           <a:prstGeom prst="rect">
             <a:avLst/>
@@ -10613,9 +8559,9 @@
         <p:grpSpPr>
           <a:xfrm>
             <a:off x="5330520" y="3240000"/>
-            <a:ext cx="4029480" cy="3069000"/>
+            <a:ext cx="4029120" cy="3068640"/>
             <a:chOff x="5330520" y="3240000"/>
-            <a:chExt cx="4029480" cy="3069000"/>
+            <a:chExt cx="4029120" cy="3068640"/>
           </a:xfrm>
         </p:grpSpPr>
         <p:sp>
@@ -10627,15 +8573,15 @@
           <p:spPr>
             <a:xfrm>
               <a:off x="5330520" y="3620880"/>
-              <a:ext cx="4029480" cy="2688120"/>
+              <a:ext cx="4029120" cy="2687760"/>
             </a:xfrm>
             <a:custGeom>
               <a:avLst/>
               <a:gdLst>
-                <a:gd name="textAreaLeft" fmla="*/ 0 w 4029480"/>
-                <a:gd name="textAreaRight" fmla="*/ 4029840 w 4029480"/>
-                <a:gd name="textAreaTop" fmla="*/ 0 h 2688120"/>
-                <a:gd name="textAreaBottom" fmla="*/ 2688480 h 2688120"/>
+                <a:gd name="textAreaLeft" fmla="*/ 0 w 4029120"/>
+                <a:gd name="textAreaRight" fmla="*/ 4029840 w 4029120"/>
+                <a:gd name="textAreaTop" fmla="*/ 0 h 2687760"/>
+                <a:gd name="textAreaBottom" fmla="*/ 2688480 h 2687760"/>
               </a:gdLst>
               <a:ahLst/>
               <a:cxnLst/>
@@ -10761,15 +8707,15 @@
           <p:spPr>
             <a:xfrm>
               <a:off x="5330520" y="3240000"/>
-              <a:ext cx="4029480" cy="764640"/>
+              <a:ext cx="4029120" cy="764280"/>
             </a:xfrm>
             <a:custGeom>
               <a:avLst/>
               <a:gdLst>
-                <a:gd name="textAreaLeft" fmla="*/ 0 w 4029480"/>
-                <a:gd name="textAreaRight" fmla="*/ 4029840 w 4029480"/>
-                <a:gd name="textAreaTop" fmla="*/ 0 h 764640"/>
-                <a:gd name="textAreaBottom" fmla="*/ 765000 h 764640"/>
+                <a:gd name="textAreaLeft" fmla="*/ 0 w 4029120"/>
+                <a:gd name="textAreaRight" fmla="*/ 4029840 w 4029120"/>
+                <a:gd name="textAreaTop" fmla="*/ 0 h 764280"/>
+                <a:gd name="textAreaBottom" fmla="*/ 765000 h 764280"/>
               </a:gdLst>
               <a:ahLst/>
               <a:cxnLst/>
@@ -11035,7 +8981,7 @@
           <p:spPr>
             <a:xfrm>
               <a:off x="7192800" y="3468600"/>
-              <a:ext cx="304560" cy="304560"/>
+              <a:ext cx="304200" cy="304200"/>
             </a:xfrm>
             <a:prstGeom prst="rect">
               <a:avLst/>
@@ -11056,7 +9002,7 @@
         <p:spPr>
           <a:xfrm>
             <a:off x="5909760" y="3960000"/>
-            <a:ext cx="3090240" cy="1757880"/>
+            <a:ext cx="3089880" cy="1757520"/>
           </a:xfrm>
           <a:prstGeom prst="rect">
             <a:avLst/>
@@ -11303,9 +9249,9 @@
         <p:grpSpPr>
           <a:xfrm>
             <a:off x="9582840" y="3233880"/>
-            <a:ext cx="4026240" cy="3069000"/>
+            <a:ext cx="4025880" cy="3068640"/>
             <a:chOff x="9582840" y="3233880"/>
-            <a:chExt cx="4026240" cy="3069000"/>
+            <a:chExt cx="4025880" cy="3068640"/>
           </a:xfrm>
         </p:grpSpPr>
         <p:sp>
@@ -11317,15 +9263,15 @@
           <p:spPr>
             <a:xfrm>
               <a:off x="9582840" y="3614760"/>
-              <a:ext cx="4026240" cy="2688120"/>
+              <a:ext cx="4025880" cy="2687760"/>
             </a:xfrm>
             <a:custGeom>
               <a:avLst/>
               <a:gdLst>
-                <a:gd name="textAreaLeft" fmla="*/ 0 w 4026240"/>
-                <a:gd name="textAreaRight" fmla="*/ 4026600 w 4026240"/>
-                <a:gd name="textAreaTop" fmla="*/ 0 h 2688120"/>
-                <a:gd name="textAreaBottom" fmla="*/ 2688480 h 2688120"/>
+                <a:gd name="textAreaLeft" fmla="*/ 0 w 4025880"/>
+                <a:gd name="textAreaRight" fmla="*/ 4026600 w 4025880"/>
+                <a:gd name="textAreaTop" fmla="*/ 0 h 2687760"/>
+                <a:gd name="textAreaBottom" fmla="*/ 2688480 h 2687760"/>
               </a:gdLst>
               <a:ahLst/>
               <a:cxnLst/>
@@ -11451,15 +9397,15 @@
           <p:spPr>
             <a:xfrm>
               <a:off x="9582840" y="3233880"/>
-              <a:ext cx="4026240" cy="764640"/>
+              <a:ext cx="4025880" cy="764280"/>
             </a:xfrm>
             <a:custGeom>
               <a:avLst/>
               <a:gdLst>
-                <a:gd name="textAreaLeft" fmla="*/ 0 w 4026240"/>
-                <a:gd name="textAreaRight" fmla="*/ 4026600 w 4026240"/>
-                <a:gd name="textAreaTop" fmla="*/ 0 h 764640"/>
-                <a:gd name="textAreaBottom" fmla="*/ 765000 h 764640"/>
+                <a:gd name="textAreaLeft" fmla="*/ 0 w 4025880"/>
+                <a:gd name="textAreaRight" fmla="*/ 4026600 w 4025880"/>
+                <a:gd name="textAreaTop" fmla="*/ 0 h 764280"/>
+                <a:gd name="textAreaBottom" fmla="*/ 765000 h 764280"/>
               </a:gdLst>
               <a:ahLst/>
               <a:cxnLst/>
@@ -11725,7 +9671,7 @@
           <p:spPr>
             <a:xfrm>
               <a:off x="11442240" y="3462480"/>
-              <a:ext cx="307440" cy="304560"/>
+              <a:ext cx="307080" cy="304200"/>
             </a:xfrm>
             <a:prstGeom prst="rect">
               <a:avLst/>
@@ -11746,7 +9692,7 @@
         <p:spPr>
           <a:xfrm>
             <a:off x="9858600" y="4220280"/>
-            <a:ext cx="3222360" cy="1359000"/>
+            <a:ext cx="3222000" cy="1358640"/>
           </a:xfrm>
           <a:prstGeom prst="rect">
             <a:avLst/>
@@ -11986,7 +9932,7 @@
         <p:spPr>
           <a:xfrm>
             <a:off x="12725280" y="7700040"/>
-            <a:ext cx="1852920" cy="465480"/>
+            <a:ext cx="1852560" cy="465120"/>
           </a:xfrm>
           <a:prstGeom prst="rect">
             <a:avLst/>
@@ -12010,7 +9956,7 @@
         <p:spPr>
           <a:xfrm>
             <a:off x="693720" y="442440"/>
-            <a:ext cx="13242240" cy="1697040"/>
+            <a:ext cx="13241880" cy="1697400"/>
           </a:xfrm>
           <a:prstGeom prst="rect">
             <a:avLst/>
@@ -12033,6 +9979,9 @@
                 <a:spcPts val="96"/>
               </a:spcBef>
               <a:buNone/>
+              <a:tabLst>
+                <a:tab pos="0" algn="l"/>
+              </a:tabLst>
             </a:pPr>
             <a:r>
               <a:rPr lang="en-IN" sz="5000" b="0" u="none" spc="386" strike="noStrike">
@@ -12113,7 +10062,7 @@
         <p:spPr>
           <a:xfrm>
             <a:off x="1020960" y="2234160"/>
-            <a:ext cx="4660200" cy="4663080"/>
+            <a:ext cx="4659840" cy="4662720"/>
           </a:xfrm>
           <a:prstGeom prst="rect">
             <a:avLst/>
@@ -12137,7 +10086,7 @@
         <p:spPr>
           <a:xfrm>
             <a:off x="6312240" y="3102840"/>
-            <a:ext cx="127800" cy="127800"/>
+            <a:ext cx="127440" cy="127440"/>
           </a:xfrm>
           <a:prstGeom prst="rect">
             <a:avLst/>
@@ -12161,7 +10110,7 @@
         <p:spPr>
           <a:xfrm>
             <a:off x="6312240" y="4675680"/>
-            <a:ext cx="127800" cy="127800"/>
+            <a:ext cx="127440" cy="127440"/>
           </a:xfrm>
           <a:prstGeom prst="rect">
             <a:avLst/>
@@ -12185,7 +10134,7 @@
         <p:spPr>
           <a:xfrm>
             <a:off x="6312240" y="6248520"/>
-            <a:ext cx="127800" cy="127800"/>
+            <a:ext cx="127440" cy="127440"/>
           </a:xfrm>
           <a:prstGeom prst="rect">
             <a:avLst/>
@@ -12205,7 +10154,7 @@
         <p:spPr>
           <a:xfrm>
             <a:off x="6301080" y="2173320"/>
-            <a:ext cx="4142880" cy="4962960"/>
+            <a:ext cx="4142520" cy="4962600"/>
           </a:xfrm>
           <a:prstGeom prst="rect">
             <a:avLst/>
@@ -12745,7 +10694,7 @@
         <p:spPr>
           <a:xfrm>
             <a:off x="0" y="0"/>
-            <a:ext cx="5486040" cy="8229240"/>
+            <a:ext cx="5485680" cy="8228880"/>
           </a:xfrm>
           <a:prstGeom prst="rect">
             <a:avLst/>
@@ -12768,8 +10717,8 @@
         </p:nvSpPr>
         <p:spPr>
           <a:xfrm>
-            <a:off x="6351120" y="204480"/>
-            <a:ext cx="5348880" cy="695520"/>
+            <a:off x="6316200" y="3600"/>
+            <a:ext cx="5348520" cy="695880"/>
           </a:xfrm>
           <a:prstGeom prst="rect">
             <a:avLst/>
@@ -12792,6 +10741,9 @@
                 <a:spcPts val="96"/>
               </a:spcBef>
               <a:buNone/>
+              <a:tabLst>
+                <a:tab pos="0" algn="l"/>
+              </a:tabLst>
             </a:pPr>
             <a:r>
               <a:rPr lang="en-IN" sz="4400" b="0" u="none" spc="476" strike="noStrike">
@@ -12861,7 +10813,7 @@
         <p:spPr>
           <a:xfrm>
             <a:off x="6385680" y="1892880"/>
-            <a:ext cx="673200" cy="673200"/>
+            <a:ext cx="672840" cy="672840"/>
           </a:xfrm>
           <a:prstGeom prst="rect">
             <a:avLst/>
@@ -12885,7 +10837,7 @@
         <p:spPr>
           <a:xfrm>
             <a:off x="6385680" y="3374280"/>
-            <a:ext cx="673200" cy="673200"/>
+            <a:ext cx="672840" cy="672840"/>
           </a:xfrm>
           <a:prstGeom prst="rect">
             <a:avLst/>
@@ -12909,7 +10861,7 @@
         <p:spPr>
           <a:xfrm>
             <a:off x="6385680" y="4858560"/>
-            <a:ext cx="673200" cy="673200"/>
+            <a:ext cx="672840" cy="672840"/>
           </a:xfrm>
           <a:prstGeom prst="rect">
             <a:avLst/>
@@ -12933,7 +10885,7 @@
         <p:spPr>
           <a:xfrm>
             <a:off x="6385680" y="6339960"/>
-            <a:ext cx="673200" cy="673200"/>
+            <a:ext cx="672840" cy="672840"/>
           </a:xfrm>
           <a:prstGeom prst="rect">
             <a:avLst/>
@@ -12956,8 +10908,8 @@
         </p:nvSpPr>
         <p:spPr>
           <a:xfrm>
-            <a:off x="7309440" y="1647000"/>
-            <a:ext cx="6111000" cy="5196240"/>
+            <a:off x="7209360" y="1620000"/>
+            <a:ext cx="6110640" cy="5481360"/>
           </a:xfrm>
           <a:prstGeom prst="rect">
             <a:avLst/>
@@ -12980,6 +10932,9 @@
                 <a:spcPts val="105"/>
               </a:spcBef>
               <a:buNone/>
+              <a:tabLst>
+                <a:tab pos="0" algn="l"/>
+              </a:tabLst>
             </a:pPr>
             <a:r>
               <a:rPr lang="en-IN" sz="2200" b="0" u="none" spc="139" strike="noStrike">
@@ -13032,6 +10987,9 @@
                 <a:spcPts val="1636"/>
               </a:spcBef>
               <a:buNone/>
+              <a:tabLst>
+                <a:tab pos="0" algn="l"/>
+              </a:tabLst>
             </a:pPr>
             <a:r>
               <a:rPr lang="en-IN" sz="1750" b="0" u="none" spc="139" strike="noStrike">
@@ -13154,41 +11112,6 @@
               </a:rPr>
               <a:t>work.</a:t>
             </a:r>
-            <a:endParaRPr lang="en-IN" sz="1750" b="0" u="none" strike="noStrike">
-              <a:solidFill>
-                <a:srgbClr val="000000"/>
-              </a:solidFill>
-              <a:effectLst/>
-              <a:uFillTx/>
-              <a:latin typeface="Calibri"/>
-            </a:endParaRPr>
-          </a:p>
-          <a:p>
-            <a:pPr indent="0" algn="l">
-              <a:lnSpc>
-                <a:spcPct val="100000"/>
-              </a:lnSpc>
-              <a:buNone/>
-            </a:pPr>
-            <a:endParaRPr lang="en-IN" sz="1750" b="0" u="none" strike="noStrike">
-              <a:solidFill>
-                <a:srgbClr val="000000"/>
-              </a:solidFill>
-              <a:effectLst/>
-              <a:uFillTx/>
-              <a:latin typeface="Calibri"/>
-            </a:endParaRPr>
-          </a:p>
-          <a:p>
-            <a:pPr indent="0" algn="l">
-              <a:lnSpc>
-                <a:spcPct val="100000"/>
-              </a:lnSpc>
-              <a:spcBef>
-                <a:spcPts val="1205"/>
-              </a:spcBef>
-              <a:buNone/>
-            </a:pPr>
             <a:endParaRPr lang="en-IN" sz="1750" b="0" u="none" strike="noStrike">
               <a:solidFill>
                 <a:srgbClr val="000000"/>
@@ -13203,7 +11126,13 @@
               <a:lnSpc>
                 <a:spcPct val="100000"/>
               </a:lnSpc>
+              <a:spcBef>
+                <a:spcPts val="1417"/>
+              </a:spcBef>
               <a:buNone/>
+              <a:tabLst>
+                <a:tab pos="0" algn="l"/>
+              </a:tabLst>
             </a:pPr>
             <a:r>
               <a:rPr lang="en-IN" sz="2200" b="0" u="none" spc="176" strike="noStrike">
@@ -13267,6 +11196,9 @@
                 <a:spcPts val="1630"/>
               </a:spcBef>
               <a:buNone/>
+              <a:tabLst>
+                <a:tab pos="0" algn="l"/>
+              </a:tabLst>
             </a:pPr>
             <a:r>
               <a:rPr lang="en-IN" sz="1750" b="0" u="none" spc="139" strike="noStrike">
@@ -13389,22 +11321,6 @@
               </a:rPr>
               <a:t>dashboards.</a:t>
             </a:r>
-            <a:endParaRPr lang="en-IN" sz="1750" b="0" u="none" strike="noStrike">
-              <a:solidFill>
-                <a:srgbClr val="000000"/>
-              </a:solidFill>
-              <a:effectLst/>
-              <a:uFillTx/>
-              <a:latin typeface="Calibri"/>
-            </a:endParaRPr>
-          </a:p>
-          <a:p>
-            <a:pPr indent="0" algn="l">
-              <a:lnSpc>
-                <a:spcPct val="100000"/>
-              </a:lnSpc>
-              <a:buNone/>
-            </a:pPr>
             <a:endParaRPr lang="en-IN" sz="1750" b="0" u="none" strike="noStrike">
               <a:solidFill>
                 <a:srgbClr val="000000"/>
@@ -13420,9 +11336,12 @@
                 <a:spcPct val="100000"/>
               </a:lnSpc>
               <a:spcBef>
-                <a:spcPts val="1205"/>
+                <a:spcPts val="1417"/>
               </a:spcBef>
               <a:buNone/>
+              <a:tabLst>
+                <a:tab pos="0" algn="l"/>
+              </a:tabLst>
             </a:pPr>
             <a:endParaRPr lang="en-IN" sz="1750" b="0" u="none" strike="noStrike">
               <a:solidFill>
@@ -13438,7 +11357,13 @@
               <a:lnSpc>
                 <a:spcPct val="100000"/>
               </a:lnSpc>
+              <a:spcBef>
+                <a:spcPts val="1417"/>
+              </a:spcBef>
               <a:buNone/>
+              <a:tabLst>
+                <a:tab pos="0" algn="l"/>
+              </a:tabLst>
             </a:pPr>
             <a:r>
               <a:rPr lang="en-IN" sz="2200" b="0" u="none" spc="164" strike="noStrike">
@@ -13491,6 +11416,9 @@
                 <a:spcPts val="1636"/>
               </a:spcBef>
               <a:buNone/>
+              <a:tabLst>
+                <a:tab pos="0" algn="l"/>
+              </a:tabLst>
             </a:pPr>
             <a:r>
               <a:rPr lang="en-IN" sz="1750" b="0" u="none" spc="113" strike="noStrike">
@@ -13613,22 +11541,6 @@
               </a:rPr>
               <a:t>compliance.</a:t>
             </a:r>
-            <a:endParaRPr lang="en-IN" sz="1750" b="0" u="none" strike="noStrike">
-              <a:solidFill>
-                <a:srgbClr val="000000"/>
-              </a:solidFill>
-              <a:effectLst/>
-              <a:uFillTx/>
-              <a:latin typeface="Calibri"/>
-            </a:endParaRPr>
-          </a:p>
-          <a:p>
-            <a:pPr indent="0" algn="l">
-              <a:lnSpc>
-                <a:spcPct val="100000"/>
-              </a:lnSpc>
-              <a:buNone/>
-            </a:pPr>
             <a:endParaRPr lang="en-IN" sz="1750" b="0" u="none" strike="noStrike">
               <a:solidFill>
                 <a:srgbClr val="000000"/>
@@ -13644,9 +11556,12 @@
                 <a:spcPct val="100000"/>
               </a:lnSpc>
               <a:spcBef>
-                <a:spcPts val="1205"/>
+                <a:spcPts val="1417"/>
               </a:spcBef>
               <a:buNone/>
+              <a:tabLst>
+                <a:tab pos="0" algn="l"/>
+              </a:tabLst>
             </a:pPr>
             <a:endParaRPr lang="en-IN" sz="1750" b="0" u="none" strike="noStrike">
               <a:solidFill>
@@ -13662,7 +11577,13 @@
               <a:lnSpc>
                 <a:spcPct val="100000"/>
               </a:lnSpc>
+              <a:spcBef>
+                <a:spcPts val="1417"/>
+              </a:spcBef>
               <a:buNone/>
+              <a:tabLst>
+                <a:tab pos="0" algn="l"/>
+              </a:tabLst>
             </a:pPr>
             <a:r>
               <a:rPr lang="en-IN" sz="2200" b="0" u="none" spc="156" strike="noStrike">
@@ -13715,6 +11636,9 @@
                 <a:spcPts val="1630"/>
               </a:spcBef>
               <a:buNone/>
+              <a:tabLst>
+                <a:tab pos="0" algn="l"/>
+              </a:tabLst>
             </a:pPr>
             <a:r>
               <a:rPr lang="en-IN" sz="1750" b="0" u="none" spc="130" strike="noStrike">
@@ -13861,7 +11785,7 @@
         <p:spPr>
           <a:xfrm>
             <a:off x="12718440" y="7764120"/>
-            <a:ext cx="1852920" cy="465480"/>
+            <a:ext cx="1852560" cy="465120"/>
           </a:xfrm>
           <a:prstGeom prst="rect">
             <a:avLst/>
@@ -13915,7 +11839,7 @@
         <p:spPr>
           <a:xfrm>
             <a:off x="12750840" y="7687440"/>
-            <a:ext cx="1852920" cy="465480"/>
+            <a:ext cx="1852560" cy="465120"/>
           </a:xfrm>
           <a:prstGeom prst="rect">
             <a:avLst/>
@@ -13939,7 +11863,7 @@
         <p:spPr>
           <a:xfrm>
             <a:off x="1007640" y="360000"/>
-            <a:ext cx="8506080" cy="786960"/>
+            <a:ext cx="8505720" cy="787320"/>
           </a:xfrm>
           <a:prstGeom prst="rect">
             <a:avLst/>
@@ -13962,6 +11886,9 @@
                 <a:spcPts val="91"/>
               </a:spcBef>
               <a:buNone/>
+              <a:tabLst>
+                <a:tab pos="0" algn="l"/>
+              </a:tabLst>
             </a:pPr>
             <a:r>
               <a:rPr lang="en-IN" sz="5000" b="0" u="none" spc="300" strike="noStrike">
@@ -14038,9 +11965,9 @@
         <p:grpSpPr>
           <a:xfrm>
             <a:off x="1020960" y="3590640"/>
-            <a:ext cx="12587760" cy="1056240"/>
+            <a:ext cx="12587400" cy="1055880"/>
             <a:chOff x="1020960" y="3590640"/>
-            <a:chExt cx="12587760" cy="1056240"/>
+            <a:chExt cx="12587400" cy="1055880"/>
           </a:xfrm>
         </p:grpSpPr>
         <p:sp>
@@ -14052,15 +11979,15 @@
           <p:spPr>
             <a:xfrm>
               <a:off x="1020960" y="3590640"/>
-              <a:ext cx="12587760" cy="795240"/>
+              <a:ext cx="12587400" cy="794880"/>
             </a:xfrm>
             <a:custGeom>
               <a:avLst/>
               <a:gdLst>
-                <a:gd name="textAreaLeft" fmla="*/ 0 w 12587760"/>
-                <a:gd name="textAreaRight" fmla="*/ 12588120 w 12587760"/>
-                <a:gd name="textAreaTop" fmla="*/ 0 h 795240"/>
-                <a:gd name="textAreaBottom" fmla="*/ 795600 h 795240"/>
+                <a:gd name="textAreaLeft" fmla="*/ 0 w 12587400"/>
+                <a:gd name="textAreaRight" fmla="*/ 12588120 w 12587400"/>
+                <a:gd name="textAreaTop" fmla="*/ 0 h 794880"/>
+                <a:gd name="textAreaBottom" fmla="*/ 795600 h 794880"/>
               </a:gdLst>
               <a:ahLst/>
               <a:cxnLst/>
@@ -14166,15 +12093,15 @@
           <p:spPr>
             <a:xfrm>
               <a:off x="3156120" y="4070520"/>
-              <a:ext cx="576360" cy="576360"/>
+              <a:ext cx="576000" cy="576000"/>
             </a:xfrm>
             <a:custGeom>
               <a:avLst/>
               <a:gdLst>
-                <a:gd name="textAreaLeft" fmla="*/ 0 w 576360"/>
-                <a:gd name="textAreaRight" fmla="*/ 576720 w 576360"/>
-                <a:gd name="textAreaTop" fmla="*/ 0 h 576360"/>
-                <a:gd name="textAreaBottom" fmla="*/ 576720 h 576360"/>
+                <a:gd name="textAreaLeft" fmla="*/ 0 w 576000"/>
+                <a:gd name="textAreaRight" fmla="*/ 576720 w 576000"/>
+                <a:gd name="textAreaTop" fmla="*/ 0 h 576000"/>
+                <a:gd name="textAreaBottom" fmla="*/ 576720 h 576000"/>
               </a:gdLst>
               <a:ahLst/>
               <a:cxnLst/>
@@ -14286,15 +12213,15 @@
           <p:spPr>
             <a:xfrm>
               <a:off x="3156120" y="4070520"/>
-              <a:ext cx="576360" cy="576360"/>
+              <a:ext cx="576000" cy="576000"/>
             </a:xfrm>
             <a:custGeom>
               <a:avLst/>
               <a:gdLst>
-                <a:gd name="textAreaLeft" fmla="*/ 0 w 576360"/>
-                <a:gd name="textAreaRight" fmla="*/ 576720 w 576360"/>
-                <a:gd name="textAreaTop" fmla="*/ 0 h 576360"/>
-                <a:gd name="textAreaBottom" fmla="*/ 576720 h 576360"/>
+                <a:gd name="textAreaLeft" fmla="*/ 0 w 576000"/>
+                <a:gd name="textAreaRight" fmla="*/ 576720 w 576000"/>
+                <a:gd name="textAreaTop" fmla="*/ 0 h 576000"/>
+                <a:gd name="textAreaBottom" fmla="*/ 576720 h 576000"/>
               </a:gdLst>
               <a:ahLst/>
               <a:cxnLst/>
@@ -14408,7 +12335,7 @@
         <p:spPr>
           <a:xfrm>
             <a:off x="3346920" y="4012560"/>
-            <a:ext cx="192600" cy="482400"/>
+            <a:ext cx="192240" cy="482040"/>
           </a:xfrm>
           <a:prstGeom prst="rect">
             <a:avLst/>
@@ -14468,7 +12395,7 @@
         <p:spPr>
           <a:xfrm>
             <a:off x="1369800" y="1935360"/>
-            <a:ext cx="4151160" cy="1359720"/>
+            <a:ext cx="4150800" cy="1359360"/>
           </a:xfrm>
           <a:prstGeom prst="rect">
             <a:avLst/>
@@ -14656,9 +12583,9 @@
         <p:grpSpPr>
           <a:xfrm>
             <a:off x="5738040" y="4070520"/>
-            <a:ext cx="576360" cy="1053000"/>
+            <a:ext cx="576000" cy="1052640"/>
             <a:chOff x="5738040" y="4070520"/>
-            <a:chExt cx="576360" cy="1053000"/>
+            <a:chExt cx="576000" cy="1052640"/>
           </a:xfrm>
         </p:grpSpPr>
         <p:sp>
@@ -14670,15 +12597,15 @@
           <p:spPr>
             <a:xfrm>
               <a:off x="6007680" y="4355640"/>
-              <a:ext cx="30240" cy="767880"/>
+              <a:ext cx="29880" cy="767520"/>
             </a:xfrm>
             <a:custGeom>
               <a:avLst/>
               <a:gdLst>
-                <a:gd name="textAreaLeft" fmla="*/ 0 w 30240"/>
-                <a:gd name="textAreaRight" fmla="*/ 30600 w 30240"/>
-                <a:gd name="textAreaTop" fmla="*/ 0 h 767880"/>
-                <a:gd name="textAreaBottom" fmla="*/ 768240 h 767880"/>
+                <a:gd name="textAreaLeft" fmla="*/ 0 w 29880"/>
+                <a:gd name="textAreaRight" fmla="*/ 30600 w 29880"/>
+                <a:gd name="textAreaTop" fmla="*/ 0 h 767520"/>
+                <a:gd name="textAreaBottom" fmla="*/ 768240 h 767520"/>
               </a:gdLst>
               <a:ahLst/>
               <a:cxnLst/>
@@ -14757,15 +12684,15 @@
           <p:spPr>
             <a:xfrm>
               <a:off x="5738040" y="4070520"/>
-              <a:ext cx="576360" cy="576360"/>
+              <a:ext cx="576000" cy="576000"/>
             </a:xfrm>
             <a:custGeom>
               <a:avLst/>
               <a:gdLst>
-                <a:gd name="textAreaLeft" fmla="*/ 0 w 576360"/>
-                <a:gd name="textAreaRight" fmla="*/ 576720 w 576360"/>
-                <a:gd name="textAreaTop" fmla="*/ 0 h 576360"/>
-                <a:gd name="textAreaBottom" fmla="*/ 576720 h 576360"/>
+                <a:gd name="textAreaLeft" fmla="*/ 0 w 576000"/>
+                <a:gd name="textAreaRight" fmla="*/ 576720 w 576000"/>
+                <a:gd name="textAreaTop" fmla="*/ 0 h 576000"/>
+                <a:gd name="textAreaBottom" fmla="*/ 576720 h 576000"/>
               </a:gdLst>
               <a:ahLst/>
               <a:cxnLst/>
@@ -14877,15 +12804,15 @@
           <p:spPr>
             <a:xfrm>
               <a:off x="5738040" y="4070520"/>
-              <a:ext cx="576360" cy="576360"/>
+              <a:ext cx="576000" cy="576000"/>
             </a:xfrm>
             <a:custGeom>
               <a:avLst/>
               <a:gdLst>
-                <a:gd name="textAreaLeft" fmla="*/ 0 w 576360"/>
-                <a:gd name="textAreaRight" fmla="*/ 576720 w 576360"/>
-                <a:gd name="textAreaTop" fmla="*/ 0 h 576360"/>
-                <a:gd name="textAreaBottom" fmla="*/ 576720 h 576360"/>
+                <a:gd name="textAreaLeft" fmla="*/ 0 w 576000"/>
+                <a:gd name="textAreaRight" fmla="*/ 576720 w 576000"/>
+                <a:gd name="textAreaTop" fmla="*/ 0 h 576000"/>
+                <a:gd name="textAreaBottom" fmla="*/ 576720 h 576000"/>
               </a:gdLst>
               <a:ahLst/>
               <a:cxnLst/>
@@ -14999,7 +12926,7 @@
         <p:spPr>
           <a:xfrm>
             <a:off x="5898600" y="4012560"/>
-            <a:ext cx="253080" cy="482400"/>
+            <a:ext cx="252720" cy="482040"/>
           </a:xfrm>
           <a:prstGeom prst="rect">
             <a:avLst/>
@@ -15059,7 +12986,7 @@
         <p:spPr>
           <a:xfrm>
             <a:off x="4205160" y="5345280"/>
-            <a:ext cx="3637440" cy="954000"/>
+            <a:ext cx="3637080" cy="953640"/>
           </a:xfrm>
           <a:prstGeom prst="rect">
             <a:avLst/>
@@ -15236,9 +13163,9 @@
         <p:grpSpPr>
           <a:xfrm>
             <a:off x="8319600" y="3590640"/>
-            <a:ext cx="576360" cy="1056240"/>
+            <a:ext cx="576000" cy="1055880"/>
             <a:chOff x="8319600" y="3590640"/>
-            <a:chExt cx="576360" cy="1056240"/>
+            <a:chExt cx="576000" cy="1055880"/>
           </a:xfrm>
         </p:grpSpPr>
         <p:sp>
@@ -15250,15 +13177,15 @@
           <p:spPr>
             <a:xfrm>
               <a:off x="8589240" y="3590640"/>
-              <a:ext cx="30240" cy="764640"/>
+              <a:ext cx="29880" cy="764280"/>
             </a:xfrm>
             <a:custGeom>
               <a:avLst/>
               <a:gdLst>
-                <a:gd name="textAreaLeft" fmla="*/ 0 w 30240"/>
-                <a:gd name="textAreaRight" fmla="*/ 30600 w 30240"/>
-                <a:gd name="textAreaTop" fmla="*/ 0 h 764640"/>
-                <a:gd name="textAreaBottom" fmla="*/ 765000 h 764640"/>
+                <a:gd name="textAreaLeft" fmla="*/ 0 w 29880"/>
+                <a:gd name="textAreaRight" fmla="*/ 30600 w 29880"/>
+                <a:gd name="textAreaTop" fmla="*/ 0 h 764280"/>
+                <a:gd name="textAreaBottom" fmla="*/ 765000 h 764280"/>
               </a:gdLst>
               <a:ahLst/>
               <a:cxnLst/>
@@ -15337,15 +13264,15 @@
           <p:spPr>
             <a:xfrm>
               <a:off x="8319600" y="4070520"/>
-              <a:ext cx="576360" cy="576360"/>
+              <a:ext cx="576000" cy="576000"/>
             </a:xfrm>
             <a:custGeom>
               <a:avLst/>
               <a:gdLst>
-                <a:gd name="textAreaLeft" fmla="*/ 0 w 576360"/>
-                <a:gd name="textAreaRight" fmla="*/ 576720 w 576360"/>
-                <a:gd name="textAreaTop" fmla="*/ 0 h 576360"/>
-                <a:gd name="textAreaBottom" fmla="*/ 576720 h 576360"/>
+                <a:gd name="textAreaLeft" fmla="*/ 0 w 576000"/>
+                <a:gd name="textAreaRight" fmla="*/ 576720 w 576000"/>
+                <a:gd name="textAreaTop" fmla="*/ 0 h 576000"/>
+                <a:gd name="textAreaBottom" fmla="*/ 576720 h 576000"/>
               </a:gdLst>
               <a:ahLst/>
               <a:cxnLst/>
@@ -15457,15 +13384,15 @@
           <p:spPr>
             <a:xfrm>
               <a:off x="8319600" y="4070520"/>
-              <a:ext cx="576360" cy="576360"/>
+              <a:ext cx="576000" cy="576000"/>
             </a:xfrm>
             <a:custGeom>
               <a:avLst/>
               <a:gdLst>
-                <a:gd name="textAreaLeft" fmla="*/ 0 w 576360"/>
-                <a:gd name="textAreaRight" fmla="*/ 576720 w 576360"/>
-                <a:gd name="textAreaTop" fmla="*/ 0 h 576360"/>
-                <a:gd name="textAreaBottom" fmla="*/ 576720 h 576360"/>
+                <a:gd name="textAreaLeft" fmla="*/ 0 w 576000"/>
+                <a:gd name="textAreaRight" fmla="*/ 576720 w 576000"/>
+                <a:gd name="textAreaTop" fmla="*/ 0 h 576000"/>
+                <a:gd name="textAreaBottom" fmla="*/ 576720 h 576000"/>
               </a:gdLst>
               <a:ahLst/>
               <a:cxnLst/>
@@ -15579,7 +13506,7 @@
         <p:spPr>
           <a:xfrm>
             <a:off x="8487000" y="4012560"/>
-            <a:ext cx="238320" cy="482400"/>
+            <a:ext cx="237960" cy="482040"/>
           </a:xfrm>
           <a:prstGeom prst="rect">
             <a:avLst/>
@@ -15639,7 +13566,7 @@
         <p:spPr>
           <a:xfrm>
             <a:off x="6555600" y="1935360"/>
-            <a:ext cx="4097160" cy="954000"/>
+            <a:ext cx="4096800" cy="953640"/>
           </a:xfrm>
           <a:prstGeom prst="rect">
             <a:avLst/>
@@ -15838,9 +13765,9 @@
         <p:grpSpPr>
           <a:xfrm>
             <a:off x="10901160" y="4070520"/>
-            <a:ext cx="576360" cy="1053000"/>
+            <a:ext cx="576000" cy="1052640"/>
             <a:chOff x="10901160" y="4070520"/>
-            <a:chExt cx="576360" cy="1053000"/>
+            <a:chExt cx="576000" cy="1052640"/>
           </a:xfrm>
         </p:grpSpPr>
         <p:sp>
@@ -15852,15 +13779,15 @@
           <p:spPr>
             <a:xfrm>
               <a:off x="11170800" y="4355640"/>
-              <a:ext cx="30240" cy="767880"/>
+              <a:ext cx="29880" cy="767520"/>
             </a:xfrm>
             <a:custGeom>
               <a:avLst/>
               <a:gdLst>
-                <a:gd name="textAreaLeft" fmla="*/ 0 w 30240"/>
-                <a:gd name="textAreaRight" fmla="*/ 30600 w 30240"/>
-                <a:gd name="textAreaTop" fmla="*/ 0 h 767880"/>
-                <a:gd name="textAreaBottom" fmla="*/ 768240 h 767880"/>
+                <a:gd name="textAreaLeft" fmla="*/ 0 w 29880"/>
+                <a:gd name="textAreaRight" fmla="*/ 30600 w 29880"/>
+                <a:gd name="textAreaTop" fmla="*/ 0 h 767520"/>
+                <a:gd name="textAreaBottom" fmla="*/ 768240 h 767520"/>
               </a:gdLst>
               <a:ahLst/>
               <a:cxnLst/>
@@ -15939,15 +13866,15 @@
           <p:spPr>
             <a:xfrm>
               <a:off x="10901160" y="4070520"/>
-              <a:ext cx="576360" cy="576360"/>
+              <a:ext cx="576000" cy="576000"/>
             </a:xfrm>
             <a:custGeom>
               <a:avLst/>
               <a:gdLst>
-                <a:gd name="textAreaLeft" fmla="*/ 0 w 576360"/>
-                <a:gd name="textAreaRight" fmla="*/ 576720 w 576360"/>
-                <a:gd name="textAreaTop" fmla="*/ 0 h 576360"/>
-                <a:gd name="textAreaBottom" fmla="*/ 576720 h 576360"/>
+                <a:gd name="textAreaLeft" fmla="*/ 0 w 576000"/>
+                <a:gd name="textAreaRight" fmla="*/ 576720 w 576000"/>
+                <a:gd name="textAreaTop" fmla="*/ 0 h 576000"/>
+                <a:gd name="textAreaBottom" fmla="*/ 576720 h 576000"/>
               </a:gdLst>
               <a:ahLst/>
               <a:cxnLst/>
@@ -16059,15 +13986,15 @@
           <p:spPr>
             <a:xfrm>
               <a:off x="10901160" y="4070520"/>
-              <a:ext cx="576360" cy="576360"/>
+              <a:ext cx="576000" cy="576000"/>
             </a:xfrm>
             <a:custGeom>
               <a:avLst/>
               <a:gdLst>
-                <a:gd name="textAreaLeft" fmla="*/ 0 w 576360"/>
-                <a:gd name="textAreaRight" fmla="*/ 576720 w 576360"/>
-                <a:gd name="textAreaTop" fmla="*/ 0 h 576360"/>
-                <a:gd name="textAreaBottom" fmla="*/ 576720 h 576360"/>
+                <a:gd name="textAreaLeft" fmla="*/ 0 w 576000"/>
+                <a:gd name="textAreaRight" fmla="*/ 576720 w 576000"/>
+                <a:gd name="textAreaTop" fmla="*/ 0 h 576000"/>
+                <a:gd name="textAreaBottom" fmla="*/ 576720 h 576000"/>
               </a:gdLst>
               <a:ahLst/>
               <a:cxnLst/>
@@ -16181,7 +14108,7 @@
         <p:spPr>
           <a:xfrm>
             <a:off x="11053800" y="4012560"/>
-            <a:ext cx="270720" cy="482400"/>
+            <a:ext cx="270360" cy="482040"/>
           </a:xfrm>
           <a:prstGeom prst="rect">
             <a:avLst/>
@@ -16241,7 +14168,7 @@
         <p:spPr>
           <a:xfrm>
             <a:off x="9336240" y="5345280"/>
-            <a:ext cx="3705480" cy="1359720"/>
+            <a:ext cx="3705120" cy="1359360"/>
           </a:xfrm>
           <a:prstGeom prst="rect">
             <a:avLst/>
@@ -16425,7 +14352,7 @@
         <p:spPr>
           <a:xfrm>
             <a:off x="1007640" y="7073640"/>
-            <a:ext cx="5070240" cy="329040"/>
+            <a:ext cx="5069880" cy="328680"/>
           </a:xfrm>
           <a:prstGeom prst="rect">
             <a:avLst/>
@@ -16596,7 +14523,7 @@
         <p:spPr>
           <a:xfrm>
             <a:off x="12725280" y="7687440"/>
-            <a:ext cx="1852920" cy="465480"/>
+            <a:ext cx="1852560" cy="465120"/>
           </a:xfrm>
           <a:prstGeom prst="rect">
             <a:avLst/>
@@ -16620,7 +14547,7 @@
         <p:spPr>
           <a:xfrm>
             <a:off x="888840" y="241920"/>
-            <a:ext cx="5796000" cy="695520"/>
+            <a:ext cx="5795640" cy="695880"/>
           </a:xfrm>
           <a:prstGeom prst="rect">
             <a:avLst/>
@@ -16643,6 +14570,9 @@
                 <a:spcPts val="91"/>
               </a:spcBef>
               <a:buNone/>
+              <a:tabLst>
+                <a:tab pos="0" algn="l"/>
+              </a:tabLst>
             </a:pPr>
             <a:r>
               <a:rPr lang="en-IN" sz="4400" b="0" u="none" spc="340" strike="noStrike">
@@ -16719,7 +14649,7 @@
         <p:spPr>
           <a:xfrm>
             <a:off x="880200" y="1644120"/>
-            <a:ext cx="3539880" cy="428400"/>
+            <a:ext cx="3539520" cy="428040"/>
           </a:xfrm>
           <a:prstGeom prst="rect">
             <a:avLst/>
@@ -16801,9 +14731,9 @@
         <p:grpSpPr>
           <a:xfrm>
             <a:off x="871560" y="2563200"/>
-            <a:ext cx="6169320" cy="1447560"/>
+            <a:ext cx="6168960" cy="1447200"/>
             <a:chOff x="871560" y="2563200"/>
-            <a:chExt cx="6169320" cy="1447560"/>
+            <a:chExt cx="6168960" cy="1447200"/>
           </a:xfrm>
         </p:grpSpPr>
         <p:sp>
@@ -16815,15 +14745,15 @@
           <p:spPr>
             <a:xfrm>
               <a:off x="902160" y="2563200"/>
-              <a:ext cx="6138720" cy="1447560"/>
+              <a:ext cx="6138360" cy="1447200"/>
             </a:xfrm>
             <a:custGeom>
               <a:avLst/>
               <a:gdLst>
-                <a:gd name="textAreaLeft" fmla="*/ 0 w 6138720"/>
-                <a:gd name="textAreaRight" fmla="*/ 6139080 w 6138720"/>
-                <a:gd name="textAreaTop" fmla="*/ 0 h 1447560"/>
-                <a:gd name="textAreaBottom" fmla="*/ 1447920 h 1447560"/>
+                <a:gd name="textAreaLeft" fmla="*/ 0 w 6138360"/>
+                <a:gd name="textAreaRight" fmla="*/ 6139080 w 6138360"/>
+                <a:gd name="textAreaTop" fmla="*/ 0 h 1447200"/>
+                <a:gd name="textAreaBottom" fmla="*/ 1447920 h 1447200"/>
               </a:gdLst>
               <a:ahLst/>
               <a:cxnLst/>
@@ -16949,15 +14879,15 @@
           <p:spPr>
             <a:xfrm>
               <a:off x="902160" y="2563200"/>
-              <a:ext cx="6138720" cy="1447560"/>
+              <a:ext cx="6138360" cy="1447200"/>
             </a:xfrm>
             <a:custGeom>
               <a:avLst/>
               <a:gdLst>
-                <a:gd name="textAreaLeft" fmla="*/ 0 w 6138720"/>
-                <a:gd name="textAreaRight" fmla="*/ 6139080 w 6138720"/>
-                <a:gd name="textAreaTop" fmla="*/ 0 h 1447560"/>
-                <a:gd name="textAreaBottom" fmla="*/ 1447920 h 1447560"/>
+                <a:gd name="textAreaLeft" fmla="*/ 0 w 6138360"/>
+                <a:gd name="textAreaRight" fmla="*/ 6139080 w 6138360"/>
+                <a:gd name="textAreaTop" fmla="*/ 0 h 1447200"/>
+                <a:gd name="textAreaBottom" fmla="*/ 1447920 h 1447200"/>
               </a:gdLst>
               <a:ahLst/>
               <a:cxnLst/>
@@ -17082,15 +15012,15 @@
           <p:spPr>
             <a:xfrm>
               <a:off x="871560" y="2563200"/>
-              <a:ext cx="121680" cy="1447560"/>
+              <a:ext cx="121320" cy="1447200"/>
             </a:xfrm>
             <a:custGeom>
               <a:avLst/>
               <a:gdLst>
-                <a:gd name="textAreaLeft" fmla="*/ 0 w 121680"/>
-                <a:gd name="textAreaRight" fmla="*/ 122040 w 121680"/>
-                <a:gd name="textAreaTop" fmla="*/ 0 h 1447560"/>
-                <a:gd name="textAreaBottom" fmla="*/ 1447920 h 1447560"/>
+                <a:gd name="textAreaLeft" fmla="*/ 0 w 121320"/>
+                <a:gd name="textAreaRight" fmla="*/ 122040 w 121320"/>
+                <a:gd name="textAreaTop" fmla="*/ 0 h 1447200"/>
+                <a:gd name="textAreaBottom" fmla="*/ 1447920 h 1447200"/>
               </a:gdLst>
               <a:ahLst/>
               <a:cxnLst/>
@@ -17197,7 +15127,7 @@
         <p:spPr>
           <a:xfrm>
             <a:off x="1236240" y="2795040"/>
-            <a:ext cx="3721320" cy="928080"/>
+            <a:ext cx="3720960" cy="927720"/>
           </a:xfrm>
           <a:prstGeom prst="rect">
             <a:avLst/>
@@ -17374,9 +15304,9 @@
         <p:grpSpPr>
           <a:xfrm>
             <a:off x="871560" y="4236840"/>
-            <a:ext cx="6169320" cy="1450440"/>
+            <a:ext cx="6168960" cy="1450080"/>
             <a:chOff x="871560" y="4236840"/>
-            <a:chExt cx="6169320" cy="1450440"/>
+            <a:chExt cx="6168960" cy="1450080"/>
           </a:xfrm>
         </p:grpSpPr>
         <p:sp>
@@ -17388,15 +15318,15 @@
           <p:spPr>
             <a:xfrm>
               <a:off x="902160" y="4236840"/>
-              <a:ext cx="6138720" cy="1450440"/>
+              <a:ext cx="6138360" cy="1450080"/>
             </a:xfrm>
             <a:custGeom>
               <a:avLst/>
               <a:gdLst>
-                <a:gd name="textAreaLeft" fmla="*/ 0 w 6138720"/>
-                <a:gd name="textAreaRight" fmla="*/ 6139080 w 6138720"/>
-                <a:gd name="textAreaTop" fmla="*/ 0 h 1450440"/>
-                <a:gd name="textAreaBottom" fmla="*/ 1450800 h 1450440"/>
+                <a:gd name="textAreaLeft" fmla="*/ 0 w 6138360"/>
+                <a:gd name="textAreaRight" fmla="*/ 6139080 w 6138360"/>
+                <a:gd name="textAreaTop" fmla="*/ 0 h 1450080"/>
+                <a:gd name="textAreaBottom" fmla="*/ 1450800 h 1450080"/>
               </a:gdLst>
               <a:ahLst/>
               <a:cxnLst/>
@@ -17522,15 +15452,15 @@
           <p:spPr>
             <a:xfrm>
               <a:off x="902160" y="4236840"/>
-              <a:ext cx="6138720" cy="1450440"/>
+              <a:ext cx="6138360" cy="1450080"/>
             </a:xfrm>
             <a:custGeom>
               <a:avLst/>
               <a:gdLst>
-                <a:gd name="textAreaLeft" fmla="*/ 0 w 6138720"/>
-                <a:gd name="textAreaRight" fmla="*/ 6139080 w 6138720"/>
-                <a:gd name="textAreaTop" fmla="*/ 0 h 1450440"/>
-                <a:gd name="textAreaBottom" fmla="*/ 1450800 h 1450440"/>
+                <a:gd name="textAreaLeft" fmla="*/ 0 w 6138360"/>
+                <a:gd name="textAreaRight" fmla="*/ 6139080 w 6138360"/>
+                <a:gd name="textAreaTop" fmla="*/ 0 h 1450080"/>
+                <a:gd name="textAreaBottom" fmla="*/ 1450800 h 1450080"/>
               </a:gdLst>
               <a:ahLst/>
               <a:cxnLst/>
@@ -17655,15 +15585,15 @@
           <p:spPr>
             <a:xfrm>
               <a:off x="871560" y="4236840"/>
-              <a:ext cx="121680" cy="1450440"/>
+              <a:ext cx="121320" cy="1450080"/>
             </a:xfrm>
             <a:custGeom>
               <a:avLst/>
               <a:gdLst>
-                <a:gd name="textAreaLeft" fmla="*/ 0 w 121680"/>
-                <a:gd name="textAreaRight" fmla="*/ 122040 w 121680"/>
-                <a:gd name="textAreaTop" fmla="*/ 0 h 1450440"/>
-                <a:gd name="textAreaBottom" fmla="*/ 1450800 h 1450440"/>
+                <a:gd name="textAreaLeft" fmla="*/ 0 w 121320"/>
+                <a:gd name="textAreaRight" fmla="*/ 122040 w 121320"/>
+                <a:gd name="textAreaTop" fmla="*/ 0 h 1450080"/>
+                <a:gd name="textAreaBottom" fmla="*/ 1450800 h 1450080"/>
               </a:gdLst>
               <a:ahLst/>
               <a:cxnLst/>
@@ -17770,7 +15700,7 @@
         <p:spPr>
           <a:xfrm>
             <a:off x="1236240" y="4470120"/>
-            <a:ext cx="3767760" cy="928080"/>
+            <a:ext cx="3767400" cy="927720"/>
           </a:xfrm>
           <a:prstGeom prst="rect">
             <a:avLst/>
@@ -17947,9 +15877,9 @@
         <p:grpSpPr>
           <a:xfrm>
             <a:off x="871560" y="5913000"/>
-            <a:ext cx="6169320" cy="1447560"/>
+            <a:ext cx="6168960" cy="1447200"/>
             <a:chOff x="871560" y="5913000"/>
-            <a:chExt cx="6169320" cy="1447560"/>
+            <a:chExt cx="6168960" cy="1447200"/>
           </a:xfrm>
         </p:grpSpPr>
         <p:sp>
@@ -17961,15 +15891,15 @@
           <p:spPr>
             <a:xfrm>
               <a:off x="902160" y="5913000"/>
-              <a:ext cx="6138720" cy="1447560"/>
+              <a:ext cx="6138360" cy="1447200"/>
             </a:xfrm>
             <a:custGeom>
               <a:avLst/>
               <a:gdLst>
-                <a:gd name="textAreaLeft" fmla="*/ 0 w 6138720"/>
-                <a:gd name="textAreaRight" fmla="*/ 6139080 w 6138720"/>
-                <a:gd name="textAreaTop" fmla="*/ 0 h 1447560"/>
-                <a:gd name="textAreaBottom" fmla="*/ 1447920 h 1447560"/>
+                <a:gd name="textAreaLeft" fmla="*/ 0 w 6138360"/>
+                <a:gd name="textAreaRight" fmla="*/ 6139080 w 6138360"/>
+                <a:gd name="textAreaTop" fmla="*/ 0 h 1447200"/>
+                <a:gd name="textAreaBottom" fmla="*/ 1447920 h 1447200"/>
               </a:gdLst>
               <a:ahLst/>
               <a:cxnLst/>
@@ -18095,15 +16025,15 @@
           <p:spPr>
             <a:xfrm>
               <a:off x="902160" y="5913000"/>
-              <a:ext cx="6138720" cy="1447560"/>
+              <a:ext cx="6138360" cy="1447200"/>
             </a:xfrm>
             <a:custGeom>
               <a:avLst/>
               <a:gdLst>
-                <a:gd name="textAreaLeft" fmla="*/ 0 w 6138720"/>
-                <a:gd name="textAreaRight" fmla="*/ 6139080 w 6138720"/>
-                <a:gd name="textAreaTop" fmla="*/ 0 h 1447560"/>
-                <a:gd name="textAreaBottom" fmla="*/ 1447920 h 1447560"/>
+                <a:gd name="textAreaLeft" fmla="*/ 0 w 6138360"/>
+                <a:gd name="textAreaRight" fmla="*/ 6139080 w 6138360"/>
+                <a:gd name="textAreaTop" fmla="*/ 0 h 1447200"/>
+                <a:gd name="textAreaBottom" fmla="*/ 1447920 h 1447200"/>
               </a:gdLst>
               <a:ahLst/>
               <a:cxnLst/>
@@ -18228,15 +16158,15 @@
           <p:spPr>
             <a:xfrm>
               <a:off x="871560" y="5913000"/>
-              <a:ext cx="121680" cy="1447560"/>
+              <a:ext cx="121320" cy="1447200"/>
             </a:xfrm>
             <a:custGeom>
               <a:avLst/>
               <a:gdLst>
-                <a:gd name="textAreaLeft" fmla="*/ 0 w 121680"/>
-                <a:gd name="textAreaRight" fmla="*/ 122040 w 121680"/>
-                <a:gd name="textAreaTop" fmla="*/ 0 h 1447560"/>
-                <a:gd name="textAreaBottom" fmla="*/ 1447920 h 1447560"/>
+                <a:gd name="textAreaLeft" fmla="*/ 0 w 121320"/>
+                <a:gd name="textAreaRight" fmla="*/ 122040 w 121320"/>
+                <a:gd name="textAreaTop" fmla="*/ 0 h 1447200"/>
+                <a:gd name="textAreaBottom" fmla="*/ 1447920 h 1447200"/>
               </a:gdLst>
               <a:ahLst/>
               <a:cxnLst/>
@@ -18343,7 +16273,7 @@
         <p:spPr>
           <a:xfrm>
             <a:off x="1236240" y="6145200"/>
-            <a:ext cx="3467880" cy="928080"/>
+            <a:ext cx="3467520" cy="927720"/>
           </a:xfrm>
           <a:prstGeom prst="rect">
             <a:avLst/>
@@ -18487,7 +16417,7 @@
         <p:spPr>
           <a:xfrm>
             <a:off x="7560000" y="1551600"/>
-            <a:ext cx="2490840" cy="428400"/>
+            <a:ext cx="2490480" cy="428040"/>
           </a:xfrm>
           <a:prstGeom prst="rect">
             <a:avLst/>
@@ -18569,9 +16499,9 @@
         <p:grpSpPr>
           <a:xfrm>
             <a:off x="7600320" y="2565000"/>
-            <a:ext cx="6138720" cy="1401840"/>
+            <a:ext cx="6138360" cy="1401480"/>
             <a:chOff x="7600320" y="2565000"/>
-            <a:chExt cx="6138720" cy="1401840"/>
+            <a:chExt cx="6138360" cy="1401480"/>
           </a:xfrm>
         </p:grpSpPr>
         <p:sp>
@@ -18583,15 +16513,15 @@
           <p:spPr>
             <a:xfrm>
               <a:off x="7600320" y="2565000"/>
-              <a:ext cx="6138720" cy="1401840"/>
+              <a:ext cx="6138360" cy="1401480"/>
             </a:xfrm>
             <a:custGeom>
               <a:avLst/>
               <a:gdLst>
-                <a:gd name="textAreaLeft" fmla="*/ 0 w 6138720"/>
-                <a:gd name="textAreaRight" fmla="*/ 6139080 w 6138720"/>
-                <a:gd name="textAreaTop" fmla="*/ 0 h 1401840"/>
-                <a:gd name="textAreaBottom" fmla="*/ 1402200 h 1401840"/>
+                <a:gd name="textAreaLeft" fmla="*/ 0 w 6138360"/>
+                <a:gd name="textAreaRight" fmla="*/ 6139080 w 6138360"/>
+                <a:gd name="textAreaTop" fmla="*/ 0 h 1401480"/>
+                <a:gd name="textAreaBottom" fmla="*/ 1402200 h 1401480"/>
               </a:gdLst>
               <a:ahLst/>
               <a:cxnLst/>
@@ -18703,15 +16633,15 @@
           <p:spPr>
             <a:xfrm>
               <a:off x="7600320" y="2565000"/>
-              <a:ext cx="6138720" cy="1401840"/>
+              <a:ext cx="6138360" cy="1401480"/>
             </a:xfrm>
             <a:custGeom>
               <a:avLst/>
               <a:gdLst>
-                <a:gd name="textAreaLeft" fmla="*/ 0 w 6138720"/>
-                <a:gd name="textAreaRight" fmla="*/ 6139080 w 6138720"/>
-                <a:gd name="textAreaTop" fmla="*/ 0 h 1401840"/>
-                <a:gd name="textAreaBottom" fmla="*/ 1402200 h 1401840"/>
+                <a:gd name="textAreaLeft" fmla="*/ 0 w 6138360"/>
+                <a:gd name="textAreaRight" fmla="*/ 6139080 w 6138360"/>
+                <a:gd name="textAreaTop" fmla="*/ 0 h 1401480"/>
+                <a:gd name="textAreaBottom" fmla="*/ 1402200 h 1401480"/>
               </a:gdLst>
               <a:ahLst/>
               <a:cxnLst/>
@@ -18825,7 +16755,7 @@
         <p:spPr>
           <a:xfrm>
             <a:off x="7819920" y="2772360"/>
-            <a:ext cx="3198600" cy="928080"/>
+            <a:ext cx="3198240" cy="927720"/>
           </a:xfrm>
           <a:prstGeom prst="rect">
             <a:avLst/>
@@ -18958,9 +16888,9 @@
         <p:grpSpPr>
           <a:xfrm>
             <a:off x="7600320" y="4192560"/>
-            <a:ext cx="6138720" cy="1404720"/>
+            <a:ext cx="6138360" cy="1404360"/>
             <a:chOff x="7600320" y="4192560"/>
-            <a:chExt cx="6138720" cy="1404720"/>
+            <a:chExt cx="6138360" cy="1404360"/>
           </a:xfrm>
         </p:grpSpPr>
         <p:sp>
@@ -18972,15 +16902,15 @@
           <p:spPr>
             <a:xfrm>
               <a:off x="7600320" y="4192560"/>
-              <a:ext cx="6138720" cy="1404720"/>
+              <a:ext cx="6138360" cy="1404360"/>
             </a:xfrm>
             <a:custGeom>
               <a:avLst/>
               <a:gdLst>
-                <a:gd name="textAreaLeft" fmla="*/ 0 w 6138720"/>
-                <a:gd name="textAreaRight" fmla="*/ 6139080 w 6138720"/>
-                <a:gd name="textAreaTop" fmla="*/ 0 h 1404720"/>
-                <a:gd name="textAreaBottom" fmla="*/ 1405080 h 1404720"/>
+                <a:gd name="textAreaLeft" fmla="*/ 0 w 6138360"/>
+                <a:gd name="textAreaRight" fmla="*/ 6139080 w 6138360"/>
+                <a:gd name="textAreaTop" fmla="*/ 0 h 1404360"/>
+                <a:gd name="textAreaBottom" fmla="*/ 1405080 h 1404360"/>
               </a:gdLst>
               <a:ahLst/>
               <a:cxnLst/>
@@ -19092,15 +17022,15 @@
           <p:spPr>
             <a:xfrm>
               <a:off x="7600320" y="4192560"/>
-              <a:ext cx="6138720" cy="1404720"/>
+              <a:ext cx="6138360" cy="1404360"/>
             </a:xfrm>
             <a:custGeom>
               <a:avLst/>
               <a:gdLst>
-                <a:gd name="textAreaLeft" fmla="*/ 0 w 6138720"/>
-                <a:gd name="textAreaRight" fmla="*/ 6139080 w 6138720"/>
-                <a:gd name="textAreaTop" fmla="*/ 0 h 1404720"/>
-                <a:gd name="textAreaBottom" fmla="*/ 1405080 h 1404720"/>
+                <a:gd name="textAreaLeft" fmla="*/ 0 w 6138360"/>
+                <a:gd name="textAreaRight" fmla="*/ 6139080 w 6138360"/>
+                <a:gd name="textAreaTop" fmla="*/ 0 h 1404360"/>
+                <a:gd name="textAreaBottom" fmla="*/ 1405080 h 1404360"/>
               </a:gdLst>
               <a:ahLst/>
               <a:cxnLst/>
@@ -19214,7 +17144,7 @@
         <p:spPr>
           <a:xfrm>
             <a:off x="7819920" y="4401360"/>
-            <a:ext cx="3271680" cy="928080"/>
+            <a:ext cx="3271320" cy="927720"/>
           </a:xfrm>
           <a:prstGeom prst="rect">
             <a:avLst/>
@@ -19391,9 +17321,9 @@
         <p:grpSpPr>
           <a:xfrm>
             <a:off x="7600320" y="5823360"/>
-            <a:ext cx="6138720" cy="1401840"/>
+            <a:ext cx="6138360" cy="1401480"/>
             <a:chOff x="7600320" y="5823360"/>
-            <a:chExt cx="6138720" cy="1401840"/>
+            <a:chExt cx="6138360" cy="1401480"/>
           </a:xfrm>
         </p:grpSpPr>
         <p:sp>
@@ -19405,15 +17335,15 @@
           <p:spPr>
             <a:xfrm>
               <a:off x="7600320" y="5823360"/>
-              <a:ext cx="6138720" cy="1401840"/>
+              <a:ext cx="6138360" cy="1401480"/>
             </a:xfrm>
             <a:custGeom>
               <a:avLst/>
               <a:gdLst>
-                <a:gd name="textAreaLeft" fmla="*/ 0 w 6138720"/>
-                <a:gd name="textAreaRight" fmla="*/ 6139080 w 6138720"/>
-                <a:gd name="textAreaTop" fmla="*/ 0 h 1401840"/>
-                <a:gd name="textAreaBottom" fmla="*/ 1402200 h 1401840"/>
+                <a:gd name="textAreaLeft" fmla="*/ 0 w 6138360"/>
+                <a:gd name="textAreaRight" fmla="*/ 6139080 w 6138360"/>
+                <a:gd name="textAreaTop" fmla="*/ 0 h 1401480"/>
+                <a:gd name="textAreaBottom" fmla="*/ 1402200 h 1401480"/>
               </a:gdLst>
               <a:ahLst/>
               <a:cxnLst/>
@@ -19525,15 +17455,15 @@
           <p:spPr>
             <a:xfrm>
               <a:off x="7600320" y="5823360"/>
-              <a:ext cx="6138720" cy="1401840"/>
+              <a:ext cx="6138360" cy="1401480"/>
             </a:xfrm>
             <a:custGeom>
               <a:avLst/>
               <a:gdLst>
-                <a:gd name="textAreaLeft" fmla="*/ 0 w 6138720"/>
-                <a:gd name="textAreaRight" fmla="*/ 6139080 w 6138720"/>
-                <a:gd name="textAreaTop" fmla="*/ 0 h 1401840"/>
-                <a:gd name="textAreaBottom" fmla="*/ 1402200 h 1401840"/>
+                <a:gd name="textAreaLeft" fmla="*/ 0 w 6138360"/>
+                <a:gd name="textAreaRight" fmla="*/ 6139080 w 6138360"/>
+                <a:gd name="textAreaTop" fmla="*/ 0 h 1401480"/>
+                <a:gd name="textAreaBottom" fmla="*/ 1402200 h 1401480"/>
               </a:gdLst>
               <a:ahLst/>
               <a:cxnLst/>
@@ -19647,7 +17577,7 @@
         <p:spPr>
           <a:xfrm>
             <a:off x="7819920" y="6031080"/>
-            <a:ext cx="3925800" cy="928080"/>
+            <a:ext cx="3925440" cy="927720"/>
           </a:xfrm>
           <a:prstGeom prst="rect">
             <a:avLst/>
